--- a/output/wordlabs-eat-3day.pptx
+++ b/output/wordlabs-eat-3day.pptx
@@ -6040,7 +6040,7 @@
                 <a:ea typeface="Calibri" pitchFamily="34" charset="-122"/>
                 <a:cs typeface="Calibri" pitchFamily="34" charset="-120"/>
               </a:rPr>
-              <a:t>The messy </a:t>
+              <a:t>The </a:t>
             </a:r>
             <a:pPr algn="l" indent="0" marL="0">
               <a:buNone/>
@@ -6057,7 +6057,7 @@
                 <a:ea typeface="Calibri" pitchFamily="34" charset="-122"/>
                 <a:cs typeface="Calibri" pitchFamily="34" charset="-120"/>
               </a:rPr>
-              <a:t>eater</a:t>
+              <a:t>uneaten</a:t>
             </a:r>
             <a:pPr algn="l" indent="0" marL="0">
               <a:buNone/>
@@ -6071,7 +6071,7 @@
                 <a:ea typeface="Calibri" pitchFamily="34" charset="-122"/>
                 <a:cs typeface="Calibri" pitchFamily="34" charset="-120"/>
               </a:rPr>
-              <a:t> left a pile of </a:t>
+              <a:t> vegetables sat on the plate while the hungry </a:t>
             </a:r>
             <a:pPr algn="l" indent="0" marL="0">
               <a:buNone/>
@@ -6088,7 +6088,7 @@
                 <a:ea typeface="Calibri" pitchFamily="34" charset="-122"/>
                 <a:cs typeface="Calibri" pitchFamily="34" charset="-120"/>
               </a:rPr>
-              <a:t>uneaten</a:t>
+              <a:t>eater</a:t>
             </a:r>
             <a:pPr algn="l" indent="0" marL="0">
               <a:buNone/>
@@ -6102,7 +6102,7 @@
                 <a:ea typeface="Calibri" pitchFamily="34" charset="-122"/>
                 <a:cs typeface="Calibri" pitchFamily="34" charset="-120"/>
               </a:rPr>
-              <a:t> vegetables on his plate.</a:t>
+              <a:t> stared out the window.</a:t>
             </a:r>
             <a:endParaRPr lang="en-US" sz="1800" dirty="0"/>
           </a:p>
@@ -6257,7 +6257,7 @@
                 <a:ea typeface="Trebuchet MS" pitchFamily="34" charset="-122"/>
                 <a:cs typeface="Trebuchet MS" pitchFamily="34" charset="-120"/>
               </a:rPr>
-              <a:t>eater</a:t>
+              <a:t>uneaten</a:t>
             </a:r>
             <a:endParaRPr lang="en-US" sz="1400" dirty="0"/>
           </a:p>
@@ -6385,7 +6385,7 @@
                 <a:ea typeface="Trebuchet MS" pitchFamily="34" charset="-122"/>
                 <a:cs typeface="Trebuchet MS" pitchFamily="34" charset="-120"/>
               </a:rPr>
-              <a:t>uneaten</a:t>
+              <a:t>eater</a:t>
             </a:r>
             <a:endParaRPr lang="en-US" sz="1400" dirty="0"/>
           </a:p>
@@ -6855,7 +6855,7 @@
                 <a:ea typeface="Trebuchet MS" pitchFamily="34" charset="-122"/>
                 <a:cs typeface="Trebuchet MS" pitchFamily="34" charset="-120"/>
               </a:rPr>
-              <a:t>eater</a:t>
+              <a:t>uneaten</a:t>
             </a:r>
             <a:endParaRPr lang="en-US" sz="2800" dirty="0"/>
           </a:p>
@@ -7682,7 +7682,7 @@
                 <a:ea typeface="Trebuchet MS" pitchFamily="34" charset="-122"/>
                 <a:cs typeface="Trebuchet MS" pitchFamily="34" charset="-120"/>
               </a:rPr>
-              <a:t>eater</a:t>
+              <a:t>uneaten</a:t>
             </a:r>
             <a:endParaRPr lang="en-US" sz="2800" dirty="0"/>
           </a:p>
@@ -7762,7 +7762,7 @@
         </p:nvSpPr>
         <p:spPr>
           <a:xfrm>
-            <a:off x="2938272" y="2258568"/>
+            <a:off x="2221992" y="2258568"/>
             <a:ext cx="1828800" cy="292608"/>
           </a:xfrm>
           <a:prstGeom prst="rect">
@@ -7771,11 +7771,11 @@
             </a:avLst>
           </a:prstGeom>
           <a:solidFill>
-            <a:srgbClr val="CCFBF1"/>
+            <a:srgbClr val="DDD6FE"/>
           </a:solidFill>
           <a:ln w="19050">
             <a:solidFill>
-              <a:srgbClr val="0D9488"/>
+              <a:srgbClr val="7C3AED"/>
             </a:solidFill>
             <a:prstDash val="solid"/>
           </a:ln>
@@ -7796,7 +7796,7 @@
         </p:nvSpPr>
         <p:spPr>
           <a:xfrm>
-            <a:off x="2938272" y="2258568"/>
+            <a:off x="2221992" y="2258568"/>
             <a:ext cx="1828800" cy="292608"/>
           </a:xfrm>
           <a:prstGeom prst="rect">
@@ -7815,13 +7815,13 @@
             <a:r>
               <a:rPr lang="en-US" sz="1300" b="1" dirty="0">
                 <a:solidFill>
-                  <a:srgbClr val="0F766E"/>
+                  <a:srgbClr val="4C1D95"/>
                 </a:solidFill>
                 <a:latin typeface="Trebuchet MS" pitchFamily="34" charset="0"/>
                 <a:ea typeface="Trebuchet MS" pitchFamily="34" charset="-122"/>
                 <a:cs typeface="Trebuchet MS" pitchFamily="34" charset="-120"/>
               </a:rPr>
-              <a:t>eat</a:t>
+              <a:t>un</a:t>
             </a:r>
             <a:endParaRPr lang="en-US" sz="1300" dirty="0"/>
           </a:p>
@@ -7835,7 +7835,7 @@
         </p:nvSpPr>
         <p:spPr>
           <a:xfrm>
-            <a:off x="2938272" y="2569464"/>
+            <a:off x="2221992" y="2569464"/>
             <a:ext cx="1828800" cy="201168"/>
           </a:xfrm>
           <a:prstGeom prst="rect">
@@ -7860,7 +7860,7 @@
                 <a:ea typeface="Calibri" pitchFamily="34" charset="-122"/>
                 <a:cs typeface="Calibri" pitchFamily="34" charset="-120"/>
               </a:rPr>
-              <a:t>to consume food</a:t>
+              <a:t>not</a:t>
             </a:r>
             <a:endParaRPr lang="en-US" sz="850" dirty="0"/>
           </a:p>
@@ -7874,7 +7874,7 @@
         </p:nvSpPr>
         <p:spPr>
           <a:xfrm>
-            <a:off x="5803392" y="2258568"/>
+            <a:off x="4370832" y="2258568"/>
             <a:ext cx="1828800" cy="292608"/>
           </a:xfrm>
           <a:prstGeom prst="rect">
@@ -7883,11 +7883,11 @@
             </a:avLst>
           </a:prstGeom>
           <a:solidFill>
-            <a:srgbClr val="FCE7F3"/>
+            <a:srgbClr val="CCFBF1"/>
           </a:solidFill>
           <a:ln w="19050">
             <a:solidFill>
-              <a:srgbClr val="DB2777"/>
+              <a:srgbClr val="0D9488"/>
             </a:solidFill>
             <a:prstDash val="solid"/>
           </a:ln>
@@ -7908,7 +7908,7 @@
         </p:nvSpPr>
         <p:spPr>
           <a:xfrm>
-            <a:off x="5803392" y="2258568"/>
+            <a:off x="4370832" y="2258568"/>
             <a:ext cx="1828800" cy="292608"/>
           </a:xfrm>
           <a:prstGeom prst="rect">
@@ -7927,13 +7927,13 @@
             <a:r>
               <a:rPr lang="en-US" sz="1300" b="1" dirty="0">
                 <a:solidFill>
-                  <a:srgbClr val="9D174D"/>
+                  <a:srgbClr val="0F766E"/>
                 </a:solidFill>
                 <a:latin typeface="Trebuchet MS" pitchFamily="34" charset="0"/>
                 <a:ea typeface="Trebuchet MS" pitchFamily="34" charset="-122"/>
                 <a:cs typeface="Trebuchet MS" pitchFamily="34" charset="-120"/>
               </a:rPr>
-              <a:t>er</a:t>
+              <a:t>eat</a:t>
             </a:r>
             <a:endParaRPr lang="en-US" sz="1300" dirty="0"/>
           </a:p>
@@ -7947,7 +7947,7 @@
         </p:nvSpPr>
         <p:spPr>
           <a:xfrm>
-            <a:off x="5803392" y="2569464"/>
+            <a:off x="4370832" y="2569464"/>
             <a:ext cx="1828800" cy="201168"/>
           </a:xfrm>
           <a:prstGeom prst="rect">
@@ -7972,7 +7972,7 @@
                 <a:ea typeface="Calibri" pitchFamily="34" charset="-122"/>
                 <a:cs typeface="Calibri" pitchFamily="34" charset="-120"/>
               </a:rPr>
-              <a:t>a person who does something</a:t>
+              <a:t>to consume food</a:t>
             </a:r>
             <a:endParaRPr lang="en-US" sz="850" dirty="0"/>
           </a:p>
@@ -7981,6 +7981,118 @@
       <p:sp>
         <p:nvSpPr>
           <p:cNvPr id="22" name="Shape 20"/>
+          <p:cNvSpPr/>
+          <p:nvPr/>
+        </p:nvSpPr>
+        <p:spPr>
+          <a:xfrm>
+            <a:off x="6519672" y="2258568"/>
+            <a:ext cx="1828800" cy="292608"/>
+          </a:xfrm>
+          <a:prstGeom prst="rect">
+            <a:avLst>
+              <a:gd name="adj" fmla="val 25000"/>
+            </a:avLst>
+          </a:prstGeom>
+          <a:solidFill>
+            <a:srgbClr val="FCE7F3"/>
+          </a:solidFill>
+          <a:ln w="19050">
+            <a:solidFill>
+              <a:srgbClr val="DB2777"/>
+            </a:solidFill>
+            <a:prstDash val="solid"/>
+          </a:ln>
+          <a:effectLst>
+            <a:outerShdw sx="100000" sy="100000" kx="0" ky="0" algn="bl" rotWithShape="0" blurRad="101600" dist="38100" dir="8100000">
+              <a:srgbClr val="000000">
+                <a:alpha val="12000"/>
+              </a:srgbClr>
+            </a:outerShdw>
+          </a:effectLst>
+        </p:spPr>
+      </p:sp>
+      <p:sp>
+        <p:nvSpPr>
+          <p:cNvPr id="23" name="Text 21"/>
+          <p:cNvSpPr/>
+          <p:nvPr/>
+        </p:nvSpPr>
+        <p:spPr>
+          <a:xfrm>
+            <a:off x="6519672" y="2258568"/>
+            <a:ext cx="1828800" cy="292608"/>
+          </a:xfrm>
+          <a:prstGeom prst="rect">
+            <a:avLst/>
+          </a:prstGeom>
+          <a:noFill/>
+          <a:ln/>
+        </p:spPr>
+        <p:txBody>
+          <a:bodyPr wrap="square" lIns="0" tIns="0" rIns="0" bIns="0" rtlCol="0" anchor="ctr"/>
+          <a:lstStyle/>
+          <a:p>
+            <a:pPr algn="ctr" indent="0" marL="0">
+              <a:buNone/>
+            </a:pPr>
+            <a:r>
+              <a:rPr lang="en-US" sz="1300" b="1" dirty="0">
+                <a:solidFill>
+                  <a:srgbClr val="9D174D"/>
+                </a:solidFill>
+                <a:latin typeface="Trebuchet MS" pitchFamily="34" charset="0"/>
+                <a:ea typeface="Trebuchet MS" pitchFamily="34" charset="-122"/>
+                <a:cs typeface="Trebuchet MS" pitchFamily="34" charset="-120"/>
+              </a:rPr>
+              <a:t>en</a:t>
+            </a:r>
+            <a:endParaRPr lang="en-US" sz="1300" dirty="0"/>
+          </a:p>
+        </p:txBody>
+      </p:sp>
+      <p:sp>
+        <p:nvSpPr>
+          <p:cNvPr id="24" name="Text 22"/>
+          <p:cNvSpPr/>
+          <p:nvPr/>
+        </p:nvSpPr>
+        <p:spPr>
+          <a:xfrm>
+            <a:off x="6519672" y="2569464"/>
+            <a:ext cx="1828800" cy="201168"/>
+          </a:xfrm>
+          <a:prstGeom prst="rect">
+            <a:avLst/>
+          </a:prstGeom>
+          <a:noFill/>
+          <a:ln/>
+        </p:spPr>
+        <p:txBody>
+          <a:bodyPr wrap="square" lIns="0" tIns="0" rIns="0" bIns="0" rtlCol="0" anchor="t"/>
+          <a:lstStyle/>
+          <a:p>
+            <a:pPr algn="ctr" indent="0" marL="0">
+              <a:buNone/>
+            </a:pPr>
+            <a:r>
+              <a:rPr lang="en-US" sz="850" dirty="0">
+                <a:solidFill>
+                  <a:srgbClr val="475569"/>
+                </a:solidFill>
+                <a:latin typeface="Calibri" pitchFamily="34" charset="0"/>
+                <a:ea typeface="Calibri" pitchFamily="34" charset="-122"/>
+                <a:cs typeface="Calibri" pitchFamily="34" charset="-120"/>
+              </a:rPr>
+              <a:t>past participle suffix</a:t>
+            </a:r>
+            <a:endParaRPr lang="en-US" sz="850" dirty="0"/>
+          </a:p>
+        </p:txBody>
+      </p:sp>
+      <p:sp>
+        <p:nvSpPr>
+          <p:cNvPr id="25" name="Shape 23"/>
           <p:cNvSpPr/>
           <p:nvPr/>
         </p:nvSpPr>
@@ -8007,7 +8119,7 @@
       </p:sp>
       <p:sp>
         <p:nvSpPr>
-          <p:cNvPr id="23" name="Text 21"/>
+          <p:cNvPr id="26" name="Text 24"/>
           <p:cNvSpPr/>
           <p:nvPr/>
         </p:nvSpPr>
@@ -8046,7 +8158,7 @@
       </p:sp>
       <p:sp>
         <p:nvSpPr>
-          <p:cNvPr id="24" name="Shape 22"/>
+          <p:cNvPr id="27" name="Shape 25"/>
           <p:cNvSpPr/>
           <p:nvPr/>
         </p:nvSpPr>
@@ -8073,7 +8185,7 @@
       </p:sp>
       <p:sp>
         <p:nvSpPr>
-          <p:cNvPr id="25" name="Text 23"/>
+          <p:cNvPr id="28" name="Text 26"/>
           <p:cNvSpPr/>
           <p:nvPr/>
         </p:nvSpPr>
@@ -8112,7 +8224,7 @@
       </p:sp>
       <p:sp>
         <p:nvSpPr>
-          <p:cNvPr id="26" name="Shape 24"/>
+          <p:cNvPr id="29" name="Shape 27"/>
           <p:cNvSpPr/>
           <p:nvPr/>
         </p:nvSpPr>
@@ -8139,7 +8251,7 @@
       </p:sp>
       <p:sp>
         <p:nvSpPr>
-          <p:cNvPr id="27" name="Text 25"/>
+          <p:cNvPr id="30" name="Text 28"/>
           <p:cNvSpPr/>
           <p:nvPr/>
         </p:nvSpPr>
@@ -8178,7 +8290,7 @@
       </p:sp>
       <p:sp>
         <p:nvSpPr>
-          <p:cNvPr id="28" name="Shape 26"/>
+          <p:cNvPr id="31" name="Shape 29"/>
           <p:cNvSpPr/>
           <p:nvPr/>
         </p:nvSpPr>
@@ -8205,7 +8317,7 @@
       </p:sp>
       <p:sp>
         <p:nvSpPr>
-          <p:cNvPr id="29" name="Text 27"/>
+          <p:cNvPr id="32" name="Text 30"/>
           <p:cNvSpPr/>
           <p:nvPr/>
         </p:nvSpPr>
@@ -8667,7 +8779,7 @@
                 <a:ea typeface="Trebuchet MS" pitchFamily="34" charset="-122"/>
                 <a:cs typeface="Trebuchet MS" pitchFamily="34" charset="-120"/>
               </a:rPr>
-              <a:t>eater</a:t>
+              <a:t>uneaten</a:t>
             </a:r>
             <a:endParaRPr lang="en-US" sz="2800" dirty="0"/>
           </a:p>
@@ -8747,7 +8859,7 @@
         </p:nvSpPr>
         <p:spPr>
           <a:xfrm>
-            <a:off x="2938272" y="2258568"/>
+            <a:off x="2221992" y="2258568"/>
             <a:ext cx="1828800" cy="292608"/>
           </a:xfrm>
           <a:prstGeom prst="rect">
@@ -8756,11 +8868,11 @@
             </a:avLst>
           </a:prstGeom>
           <a:solidFill>
-            <a:srgbClr val="CCFBF1"/>
+            <a:srgbClr val="DDD6FE"/>
           </a:solidFill>
           <a:ln w="19050">
             <a:solidFill>
-              <a:srgbClr val="0D9488"/>
+              <a:srgbClr val="7C3AED"/>
             </a:solidFill>
             <a:prstDash val="solid"/>
           </a:ln>
@@ -8781,7 +8893,7 @@
         </p:nvSpPr>
         <p:spPr>
           <a:xfrm>
-            <a:off x="2938272" y="2258568"/>
+            <a:off x="2221992" y="2258568"/>
             <a:ext cx="1828800" cy="292608"/>
           </a:xfrm>
           <a:prstGeom prst="rect">
@@ -8800,13 +8912,13 @@
             <a:r>
               <a:rPr lang="en-US" sz="1300" b="1" dirty="0">
                 <a:solidFill>
-                  <a:srgbClr val="0F766E"/>
+                  <a:srgbClr val="4C1D95"/>
                 </a:solidFill>
                 <a:latin typeface="Trebuchet MS" pitchFamily="34" charset="0"/>
                 <a:ea typeface="Trebuchet MS" pitchFamily="34" charset="-122"/>
                 <a:cs typeface="Trebuchet MS" pitchFamily="34" charset="-120"/>
               </a:rPr>
-              <a:t>eat</a:t>
+              <a:t>un</a:t>
             </a:r>
             <a:endParaRPr lang="en-US" sz="1300" dirty="0"/>
           </a:p>
@@ -8820,7 +8932,7 @@
         </p:nvSpPr>
         <p:spPr>
           <a:xfrm>
-            <a:off x="2938272" y="2569464"/>
+            <a:off x="2221992" y="2569464"/>
             <a:ext cx="1828800" cy="201168"/>
           </a:xfrm>
           <a:prstGeom prst="rect">
@@ -8845,7 +8957,7 @@
                 <a:ea typeface="Calibri" pitchFamily="34" charset="-122"/>
                 <a:cs typeface="Calibri" pitchFamily="34" charset="-120"/>
               </a:rPr>
-              <a:t>to consume food</a:t>
+              <a:t>not</a:t>
             </a:r>
             <a:endParaRPr lang="en-US" sz="850" dirty="0"/>
           </a:p>
@@ -8859,7 +8971,7 @@
         </p:nvSpPr>
         <p:spPr>
           <a:xfrm>
-            <a:off x="5803392" y="2258568"/>
+            <a:off x="4370832" y="2258568"/>
             <a:ext cx="1828800" cy="292608"/>
           </a:xfrm>
           <a:prstGeom prst="rect">
@@ -8868,11 +8980,11 @@
             </a:avLst>
           </a:prstGeom>
           <a:solidFill>
-            <a:srgbClr val="FCE7F3"/>
+            <a:srgbClr val="CCFBF1"/>
           </a:solidFill>
           <a:ln w="19050">
             <a:solidFill>
-              <a:srgbClr val="DB2777"/>
+              <a:srgbClr val="0D9488"/>
             </a:solidFill>
             <a:prstDash val="solid"/>
           </a:ln>
@@ -8893,7 +9005,7 @@
         </p:nvSpPr>
         <p:spPr>
           <a:xfrm>
-            <a:off x="5803392" y="2258568"/>
+            <a:off x="4370832" y="2258568"/>
             <a:ext cx="1828800" cy="292608"/>
           </a:xfrm>
           <a:prstGeom prst="rect">
@@ -8912,13 +9024,13 @@
             <a:r>
               <a:rPr lang="en-US" sz="1300" b="1" dirty="0">
                 <a:solidFill>
-                  <a:srgbClr val="9D174D"/>
+                  <a:srgbClr val="0F766E"/>
                 </a:solidFill>
                 <a:latin typeface="Trebuchet MS" pitchFamily="34" charset="0"/>
                 <a:ea typeface="Trebuchet MS" pitchFamily="34" charset="-122"/>
                 <a:cs typeface="Trebuchet MS" pitchFamily="34" charset="-120"/>
               </a:rPr>
-              <a:t>er</a:t>
+              <a:t>eat</a:t>
             </a:r>
             <a:endParaRPr lang="en-US" sz="1300" dirty="0"/>
           </a:p>
@@ -8932,7 +9044,7 @@
         </p:nvSpPr>
         <p:spPr>
           <a:xfrm>
-            <a:off x="5803392" y="2569464"/>
+            <a:off x="4370832" y="2569464"/>
             <a:ext cx="1828800" cy="201168"/>
           </a:xfrm>
           <a:prstGeom prst="rect">
@@ -8957,7 +9069,7 @@
                 <a:ea typeface="Calibri" pitchFamily="34" charset="-122"/>
                 <a:cs typeface="Calibri" pitchFamily="34" charset="-120"/>
               </a:rPr>
-              <a:t>a person who does something</a:t>
+              <a:t>to consume food</a:t>
             </a:r>
             <a:endParaRPr lang="en-US" sz="850" dirty="0"/>
           </a:p>
@@ -8966,6 +9078,118 @@
       <p:sp>
         <p:nvSpPr>
           <p:cNvPr id="22" name="Shape 20"/>
+          <p:cNvSpPr/>
+          <p:nvPr/>
+        </p:nvSpPr>
+        <p:spPr>
+          <a:xfrm>
+            <a:off x="6519672" y="2258568"/>
+            <a:ext cx="1828800" cy="292608"/>
+          </a:xfrm>
+          <a:prstGeom prst="rect">
+            <a:avLst>
+              <a:gd name="adj" fmla="val 25000"/>
+            </a:avLst>
+          </a:prstGeom>
+          <a:solidFill>
+            <a:srgbClr val="FCE7F3"/>
+          </a:solidFill>
+          <a:ln w="19050">
+            <a:solidFill>
+              <a:srgbClr val="DB2777"/>
+            </a:solidFill>
+            <a:prstDash val="solid"/>
+          </a:ln>
+          <a:effectLst>
+            <a:outerShdw sx="100000" sy="100000" kx="0" ky="0" algn="bl" rotWithShape="0" blurRad="101600" dist="38100" dir="8100000">
+              <a:srgbClr val="000000">
+                <a:alpha val="12000"/>
+              </a:srgbClr>
+            </a:outerShdw>
+          </a:effectLst>
+        </p:spPr>
+      </p:sp>
+      <p:sp>
+        <p:nvSpPr>
+          <p:cNvPr id="23" name="Text 21"/>
+          <p:cNvSpPr/>
+          <p:nvPr/>
+        </p:nvSpPr>
+        <p:spPr>
+          <a:xfrm>
+            <a:off x="6519672" y="2258568"/>
+            <a:ext cx="1828800" cy="292608"/>
+          </a:xfrm>
+          <a:prstGeom prst="rect">
+            <a:avLst/>
+          </a:prstGeom>
+          <a:noFill/>
+          <a:ln/>
+        </p:spPr>
+        <p:txBody>
+          <a:bodyPr wrap="square" lIns="0" tIns="0" rIns="0" bIns="0" rtlCol="0" anchor="ctr"/>
+          <a:lstStyle/>
+          <a:p>
+            <a:pPr algn="ctr" indent="0" marL="0">
+              <a:buNone/>
+            </a:pPr>
+            <a:r>
+              <a:rPr lang="en-US" sz="1300" b="1" dirty="0">
+                <a:solidFill>
+                  <a:srgbClr val="9D174D"/>
+                </a:solidFill>
+                <a:latin typeface="Trebuchet MS" pitchFamily="34" charset="0"/>
+                <a:ea typeface="Trebuchet MS" pitchFamily="34" charset="-122"/>
+                <a:cs typeface="Trebuchet MS" pitchFamily="34" charset="-120"/>
+              </a:rPr>
+              <a:t>en</a:t>
+            </a:r>
+            <a:endParaRPr lang="en-US" sz="1300" dirty="0"/>
+          </a:p>
+        </p:txBody>
+      </p:sp>
+      <p:sp>
+        <p:nvSpPr>
+          <p:cNvPr id="24" name="Text 22"/>
+          <p:cNvSpPr/>
+          <p:nvPr/>
+        </p:nvSpPr>
+        <p:spPr>
+          <a:xfrm>
+            <a:off x="6519672" y="2569464"/>
+            <a:ext cx="1828800" cy="201168"/>
+          </a:xfrm>
+          <a:prstGeom prst="rect">
+            <a:avLst/>
+          </a:prstGeom>
+          <a:noFill/>
+          <a:ln/>
+        </p:spPr>
+        <p:txBody>
+          <a:bodyPr wrap="square" lIns="0" tIns="0" rIns="0" bIns="0" rtlCol="0" anchor="t"/>
+          <a:lstStyle/>
+          <a:p>
+            <a:pPr algn="ctr" indent="0" marL="0">
+              <a:buNone/>
+            </a:pPr>
+            <a:r>
+              <a:rPr lang="en-US" sz="850" dirty="0">
+                <a:solidFill>
+                  <a:srgbClr val="475569"/>
+                </a:solidFill>
+                <a:latin typeface="Calibri" pitchFamily="34" charset="0"/>
+                <a:ea typeface="Calibri" pitchFamily="34" charset="-122"/>
+                <a:cs typeface="Calibri" pitchFamily="34" charset="-120"/>
+              </a:rPr>
+              <a:t>past participle suffix</a:t>
+            </a:r>
+            <a:endParaRPr lang="en-US" sz="850" dirty="0"/>
+          </a:p>
+        </p:txBody>
+      </p:sp>
+      <p:sp>
+        <p:nvSpPr>
+          <p:cNvPr id="25" name="Shape 23"/>
           <p:cNvSpPr/>
           <p:nvPr/>
         </p:nvSpPr>
@@ -8992,7 +9216,7 @@
       </p:sp>
       <p:sp>
         <p:nvSpPr>
-          <p:cNvPr id="23" name="Text 21"/>
+          <p:cNvPr id="26" name="Text 24"/>
           <p:cNvSpPr/>
           <p:nvPr/>
         </p:nvSpPr>
@@ -9031,7 +9255,7 @@
       </p:sp>
       <p:sp>
         <p:nvSpPr>
-          <p:cNvPr id="24" name="Shape 22"/>
+          <p:cNvPr id="27" name="Shape 25"/>
           <p:cNvSpPr/>
           <p:nvPr/>
         </p:nvSpPr>
@@ -9058,13 +9282,13 @@
       </p:sp>
       <p:sp>
         <p:nvSpPr>
-          <p:cNvPr id="25" name="Shape 23"/>
-          <p:cNvSpPr/>
-          <p:nvPr/>
-        </p:nvSpPr>
-        <p:spPr>
-          <a:xfrm>
-            <a:off x="2999232" y="3364992"/>
+          <p:cNvPr id="28" name="Shape 26"/>
+          <p:cNvSpPr/>
+          <p:nvPr/>
+        </p:nvSpPr>
+        <p:spPr>
+          <a:xfrm>
+            <a:off x="2313432" y="3364992"/>
             <a:ext cx="1645920" cy="475488"/>
           </a:xfrm>
           <a:prstGeom prst="rect">
@@ -9085,13 +9309,13 @@
       </p:sp>
       <p:sp>
         <p:nvSpPr>
-          <p:cNvPr id="26" name="Text 24"/>
-          <p:cNvSpPr/>
-          <p:nvPr/>
-        </p:nvSpPr>
-        <p:spPr>
-          <a:xfrm>
-            <a:off x="2999232" y="3364992"/>
+          <p:cNvPr id="29" name="Text 27"/>
+          <p:cNvSpPr/>
+          <p:nvPr/>
+        </p:nvSpPr>
+        <p:spPr>
+          <a:xfrm>
+            <a:off x="2313432" y="3364992"/>
             <a:ext cx="1645920" cy="475488"/>
           </a:xfrm>
           <a:prstGeom prst="rect">
@@ -9116,7 +9340,7 @@
                 <a:ea typeface="Trebuchet MS" pitchFamily="34" charset="-122"/>
                 <a:cs typeface="Trebuchet MS" pitchFamily="34" charset="-120"/>
               </a:rPr>
-              <a:t>eat</a:t>
+              <a:t>un</a:t>
             </a:r>
             <a:endParaRPr lang="en-US" sz="1400" dirty="0"/>
           </a:p>
@@ -9124,14 +9348,14 @@
       </p:sp>
       <p:sp>
         <p:nvSpPr>
-          <p:cNvPr id="27" name="Text 25"/>
-          <p:cNvSpPr/>
-          <p:nvPr/>
-        </p:nvSpPr>
-        <p:spPr>
-          <a:xfrm>
-            <a:off x="4645152" y="3364992"/>
-            <a:ext cx="1097280" cy="475488"/>
+          <p:cNvPr id="30" name="Text 28"/>
+          <p:cNvSpPr/>
+          <p:nvPr/>
+        </p:nvSpPr>
+        <p:spPr>
+          <a:xfrm>
+            <a:off x="3959352" y="3364992"/>
+            <a:ext cx="411480" cy="475488"/>
           </a:xfrm>
           <a:prstGeom prst="rect">
             <a:avLst/>
@@ -9163,13 +9387,13 @@
       </p:sp>
       <p:sp>
         <p:nvSpPr>
-          <p:cNvPr id="28" name="Shape 26"/>
-          <p:cNvSpPr/>
-          <p:nvPr/>
-        </p:nvSpPr>
-        <p:spPr>
-          <a:xfrm>
-            <a:off x="5742432" y="3364992"/>
+          <p:cNvPr id="31" name="Shape 29"/>
+          <p:cNvSpPr/>
+          <p:nvPr/>
+        </p:nvSpPr>
+        <p:spPr>
+          <a:xfrm>
+            <a:off x="4370832" y="3364992"/>
             <a:ext cx="1645920" cy="475488"/>
           </a:xfrm>
           <a:prstGeom prst="rect">
@@ -9190,13 +9414,13 @@
       </p:sp>
       <p:sp>
         <p:nvSpPr>
-          <p:cNvPr id="29" name="Text 27"/>
-          <p:cNvSpPr/>
-          <p:nvPr/>
-        </p:nvSpPr>
-        <p:spPr>
-          <a:xfrm>
-            <a:off x="5742432" y="3364992"/>
+          <p:cNvPr id="32" name="Text 30"/>
+          <p:cNvSpPr/>
+          <p:nvPr/>
+        </p:nvSpPr>
+        <p:spPr>
+          <a:xfrm>
+            <a:off x="4370832" y="3364992"/>
             <a:ext cx="1645920" cy="475488"/>
           </a:xfrm>
           <a:prstGeom prst="rect">
@@ -9221,7 +9445,7 @@
                 <a:ea typeface="Trebuchet MS" pitchFamily="34" charset="-122"/>
                 <a:cs typeface="Trebuchet MS" pitchFamily="34" charset="-120"/>
               </a:rPr>
-              <a:t>er</a:t>
+              <a:t>eat</a:t>
             </a:r>
             <a:endParaRPr lang="en-US" sz="1400" dirty="0"/>
           </a:p>
@@ -9229,7 +9453,112 @@
       </p:sp>
       <p:sp>
         <p:nvSpPr>
-          <p:cNvPr id="30" name="Shape 28"/>
+          <p:cNvPr id="33" name="Text 31"/>
+          <p:cNvSpPr/>
+          <p:nvPr/>
+        </p:nvSpPr>
+        <p:spPr>
+          <a:xfrm>
+            <a:off x="6016752" y="3364992"/>
+            <a:ext cx="411480" cy="475488"/>
+          </a:xfrm>
+          <a:prstGeom prst="rect">
+            <a:avLst/>
+          </a:prstGeom>
+          <a:noFill/>
+          <a:ln/>
+        </p:spPr>
+        <p:txBody>
+          <a:bodyPr wrap="square" lIns="0" tIns="0" rIns="0" bIns="0" rtlCol="0" anchor="ctr"/>
+          <a:lstStyle/>
+          <a:p>
+            <a:pPr algn="ctr" indent="0" marL="0">
+              <a:buNone/>
+            </a:pPr>
+            <a:r>
+              <a:rPr lang="en-US" sz="1600" b="1" dirty="0">
+                <a:solidFill>
+                  <a:srgbClr val="0D9488"/>
+                </a:solidFill>
+                <a:latin typeface="Trebuchet MS" pitchFamily="34" charset="0"/>
+                <a:ea typeface="Trebuchet MS" pitchFamily="34" charset="-122"/>
+                <a:cs typeface="Trebuchet MS" pitchFamily="34" charset="-120"/>
+              </a:rPr>
+              <a:t>·</a:t>
+            </a:r>
+            <a:endParaRPr lang="en-US" sz="1600" dirty="0"/>
+          </a:p>
+        </p:txBody>
+      </p:sp>
+      <p:sp>
+        <p:nvSpPr>
+          <p:cNvPr id="34" name="Shape 32"/>
+          <p:cNvSpPr/>
+          <p:nvPr/>
+        </p:nvSpPr>
+        <p:spPr>
+          <a:xfrm>
+            <a:off x="6428232" y="3364992"/>
+            <a:ext cx="1645920" cy="475488"/>
+          </a:xfrm>
+          <a:prstGeom prst="rect">
+            <a:avLst>
+              <a:gd name="adj" fmla="val 9615"/>
+            </a:avLst>
+          </a:prstGeom>
+          <a:solidFill>
+            <a:srgbClr val="FFFFFF"/>
+          </a:solidFill>
+          <a:ln w="12700">
+            <a:solidFill>
+              <a:srgbClr val="0D9488"/>
+            </a:solidFill>
+            <a:prstDash val="solid"/>
+          </a:ln>
+        </p:spPr>
+      </p:sp>
+      <p:sp>
+        <p:nvSpPr>
+          <p:cNvPr id="35" name="Text 33"/>
+          <p:cNvSpPr/>
+          <p:nvPr/>
+        </p:nvSpPr>
+        <p:spPr>
+          <a:xfrm>
+            <a:off x="6428232" y="3364992"/>
+            <a:ext cx="1645920" cy="475488"/>
+          </a:xfrm>
+          <a:prstGeom prst="rect">
+            <a:avLst/>
+          </a:prstGeom>
+          <a:noFill/>
+          <a:ln/>
+        </p:spPr>
+        <p:txBody>
+          <a:bodyPr wrap="square" lIns="0" tIns="0" rIns="0" bIns="0" rtlCol="0" anchor="ctr"/>
+          <a:lstStyle/>
+          <a:p>
+            <a:pPr algn="ctr" indent="0" marL="0">
+              <a:buNone/>
+            </a:pPr>
+            <a:r>
+              <a:rPr lang="en-US" sz="1400" b="1" dirty="0">
+                <a:solidFill>
+                  <a:srgbClr val="0D9488"/>
+                </a:solidFill>
+                <a:latin typeface="Trebuchet MS" pitchFamily="34" charset="0"/>
+                <a:ea typeface="Trebuchet MS" pitchFamily="34" charset="-122"/>
+                <a:cs typeface="Trebuchet MS" pitchFamily="34" charset="-120"/>
+              </a:rPr>
+              <a:t>en</a:t>
+            </a:r>
+            <a:endParaRPr lang="en-US" sz="1400" dirty="0"/>
+          </a:p>
+        </p:txBody>
+      </p:sp>
+      <p:sp>
+        <p:nvSpPr>
+          <p:cNvPr id="36" name="Shape 34"/>
           <p:cNvSpPr/>
           <p:nvPr/>
         </p:nvSpPr>
@@ -9256,7 +9585,7 @@
       </p:sp>
       <p:sp>
         <p:nvSpPr>
-          <p:cNvPr id="31" name="Text 29"/>
+          <p:cNvPr id="37" name="Text 35"/>
           <p:cNvSpPr/>
           <p:nvPr/>
         </p:nvSpPr>
@@ -9295,7 +9624,7 @@
       </p:sp>
       <p:sp>
         <p:nvSpPr>
-          <p:cNvPr id="32" name="Shape 30"/>
+          <p:cNvPr id="38" name="Shape 36"/>
           <p:cNvSpPr/>
           <p:nvPr/>
         </p:nvSpPr>
@@ -9322,7 +9651,7 @@
       </p:sp>
       <p:sp>
         <p:nvSpPr>
-          <p:cNvPr id="33" name="Text 31"/>
+          <p:cNvPr id="39" name="Text 37"/>
           <p:cNvSpPr/>
           <p:nvPr/>
         </p:nvSpPr>
@@ -9784,7 +10113,7 @@
                 <a:ea typeface="Trebuchet MS" pitchFamily="34" charset="-122"/>
                 <a:cs typeface="Trebuchet MS" pitchFamily="34" charset="-120"/>
               </a:rPr>
-              <a:t>eater</a:t>
+              <a:t>uneaten</a:t>
             </a:r>
             <a:endParaRPr lang="en-US" sz="2800" dirty="0"/>
           </a:p>
@@ -9864,7 +10193,7 @@
         </p:nvSpPr>
         <p:spPr>
           <a:xfrm>
-            <a:off x="2938272" y="2258568"/>
+            <a:off x="2221992" y="2258568"/>
             <a:ext cx="1828800" cy="292608"/>
           </a:xfrm>
           <a:prstGeom prst="rect">
@@ -9873,11 +10202,11 @@
             </a:avLst>
           </a:prstGeom>
           <a:solidFill>
-            <a:srgbClr val="CCFBF1"/>
+            <a:srgbClr val="DDD6FE"/>
           </a:solidFill>
           <a:ln w="19050">
             <a:solidFill>
-              <a:srgbClr val="0D9488"/>
+              <a:srgbClr val="7C3AED"/>
             </a:solidFill>
             <a:prstDash val="solid"/>
           </a:ln>
@@ -9898,7 +10227,7 @@
         </p:nvSpPr>
         <p:spPr>
           <a:xfrm>
-            <a:off x="2938272" y="2258568"/>
+            <a:off x="2221992" y="2258568"/>
             <a:ext cx="1828800" cy="292608"/>
           </a:xfrm>
           <a:prstGeom prst="rect">
@@ -9917,13 +10246,13 @@
             <a:r>
               <a:rPr lang="en-US" sz="1300" b="1" dirty="0">
                 <a:solidFill>
-                  <a:srgbClr val="0F766E"/>
+                  <a:srgbClr val="4C1D95"/>
                 </a:solidFill>
                 <a:latin typeface="Trebuchet MS" pitchFamily="34" charset="0"/>
                 <a:ea typeface="Trebuchet MS" pitchFamily="34" charset="-122"/>
                 <a:cs typeface="Trebuchet MS" pitchFamily="34" charset="-120"/>
               </a:rPr>
-              <a:t>eat</a:t>
+              <a:t>un</a:t>
             </a:r>
             <a:endParaRPr lang="en-US" sz="1300" dirty="0"/>
           </a:p>
@@ -9937,7 +10266,7 @@
         </p:nvSpPr>
         <p:spPr>
           <a:xfrm>
-            <a:off x="2938272" y="2569464"/>
+            <a:off x="2221992" y="2569464"/>
             <a:ext cx="1828800" cy="201168"/>
           </a:xfrm>
           <a:prstGeom prst="rect">
@@ -9962,7 +10291,7 @@
                 <a:ea typeface="Calibri" pitchFamily="34" charset="-122"/>
                 <a:cs typeface="Calibri" pitchFamily="34" charset="-120"/>
               </a:rPr>
-              <a:t>to consume food</a:t>
+              <a:t>not</a:t>
             </a:r>
             <a:endParaRPr lang="en-US" sz="850" dirty="0"/>
           </a:p>
@@ -9976,7 +10305,7 @@
         </p:nvSpPr>
         <p:spPr>
           <a:xfrm>
-            <a:off x="5803392" y="2258568"/>
+            <a:off x="4370832" y="2258568"/>
             <a:ext cx="1828800" cy="292608"/>
           </a:xfrm>
           <a:prstGeom prst="rect">
@@ -9985,11 +10314,11 @@
             </a:avLst>
           </a:prstGeom>
           <a:solidFill>
-            <a:srgbClr val="FCE7F3"/>
+            <a:srgbClr val="CCFBF1"/>
           </a:solidFill>
           <a:ln w="19050">
             <a:solidFill>
-              <a:srgbClr val="DB2777"/>
+              <a:srgbClr val="0D9488"/>
             </a:solidFill>
             <a:prstDash val="solid"/>
           </a:ln>
@@ -10010,7 +10339,7 @@
         </p:nvSpPr>
         <p:spPr>
           <a:xfrm>
-            <a:off x="5803392" y="2258568"/>
+            <a:off x="4370832" y="2258568"/>
             <a:ext cx="1828800" cy="292608"/>
           </a:xfrm>
           <a:prstGeom prst="rect">
@@ -10029,13 +10358,13 @@
             <a:r>
               <a:rPr lang="en-US" sz="1300" b="1" dirty="0">
                 <a:solidFill>
-                  <a:srgbClr val="9D174D"/>
+                  <a:srgbClr val="0F766E"/>
                 </a:solidFill>
                 <a:latin typeface="Trebuchet MS" pitchFamily="34" charset="0"/>
                 <a:ea typeface="Trebuchet MS" pitchFamily="34" charset="-122"/>
                 <a:cs typeface="Trebuchet MS" pitchFamily="34" charset="-120"/>
               </a:rPr>
-              <a:t>er</a:t>
+              <a:t>eat</a:t>
             </a:r>
             <a:endParaRPr lang="en-US" sz="1300" dirty="0"/>
           </a:p>
@@ -10049,7 +10378,7 @@
         </p:nvSpPr>
         <p:spPr>
           <a:xfrm>
-            <a:off x="5803392" y="2569464"/>
+            <a:off x="4370832" y="2569464"/>
             <a:ext cx="1828800" cy="201168"/>
           </a:xfrm>
           <a:prstGeom prst="rect">
@@ -10074,7 +10403,7 @@
                 <a:ea typeface="Calibri" pitchFamily="34" charset="-122"/>
                 <a:cs typeface="Calibri" pitchFamily="34" charset="-120"/>
               </a:rPr>
-              <a:t>a person who does something</a:t>
+              <a:t>to consume food</a:t>
             </a:r>
             <a:endParaRPr lang="en-US" sz="850" dirty="0"/>
           </a:p>
@@ -10083,6 +10412,118 @@
       <p:sp>
         <p:nvSpPr>
           <p:cNvPr id="22" name="Shape 20"/>
+          <p:cNvSpPr/>
+          <p:nvPr/>
+        </p:nvSpPr>
+        <p:spPr>
+          <a:xfrm>
+            <a:off x="6519672" y="2258568"/>
+            <a:ext cx="1828800" cy="292608"/>
+          </a:xfrm>
+          <a:prstGeom prst="rect">
+            <a:avLst>
+              <a:gd name="adj" fmla="val 25000"/>
+            </a:avLst>
+          </a:prstGeom>
+          <a:solidFill>
+            <a:srgbClr val="FCE7F3"/>
+          </a:solidFill>
+          <a:ln w="19050">
+            <a:solidFill>
+              <a:srgbClr val="DB2777"/>
+            </a:solidFill>
+            <a:prstDash val="solid"/>
+          </a:ln>
+          <a:effectLst>
+            <a:outerShdw sx="100000" sy="100000" kx="0" ky="0" algn="bl" rotWithShape="0" blurRad="101600" dist="38100" dir="8100000">
+              <a:srgbClr val="000000">
+                <a:alpha val="12000"/>
+              </a:srgbClr>
+            </a:outerShdw>
+          </a:effectLst>
+        </p:spPr>
+      </p:sp>
+      <p:sp>
+        <p:nvSpPr>
+          <p:cNvPr id="23" name="Text 21"/>
+          <p:cNvSpPr/>
+          <p:nvPr/>
+        </p:nvSpPr>
+        <p:spPr>
+          <a:xfrm>
+            <a:off x="6519672" y="2258568"/>
+            <a:ext cx="1828800" cy="292608"/>
+          </a:xfrm>
+          <a:prstGeom prst="rect">
+            <a:avLst/>
+          </a:prstGeom>
+          <a:noFill/>
+          <a:ln/>
+        </p:spPr>
+        <p:txBody>
+          <a:bodyPr wrap="square" lIns="0" tIns="0" rIns="0" bIns="0" rtlCol="0" anchor="ctr"/>
+          <a:lstStyle/>
+          <a:p>
+            <a:pPr algn="ctr" indent="0" marL="0">
+              <a:buNone/>
+            </a:pPr>
+            <a:r>
+              <a:rPr lang="en-US" sz="1300" b="1" dirty="0">
+                <a:solidFill>
+                  <a:srgbClr val="9D174D"/>
+                </a:solidFill>
+                <a:latin typeface="Trebuchet MS" pitchFamily="34" charset="0"/>
+                <a:ea typeface="Trebuchet MS" pitchFamily="34" charset="-122"/>
+                <a:cs typeface="Trebuchet MS" pitchFamily="34" charset="-120"/>
+              </a:rPr>
+              <a:t>en</a:t>
+            </a:r>
+            <a:endParaRPr lang="en-US" sz="1300" dirty="0"/>
+          </a:p>
+        </p:txBody>
+      </p:sp>
+      <p:sp>
+        <p:nvSpPr>
+          <p:cNvPr id="24" name="Text 22"/>
+          <p:cNvSpPr/>
+          <p:nvPr/>
+        </p:nvSpPr>
+        <p:spPr>
+          <a:xfrm>
+            <a:off x="6519672" y="2569464"/>
+            <a:ext cx="1828800" cy="201168"/>
+          </a:xfrm>
+          <a:prstGeom prst="rect">
+            <a:avLst/>
+          </a:prstGeom>
+          <a:noFill/>
+          <a:ln/>
+        </p:spPr>
+        <p:txBody>
+          <a:bodyPr wrap="square" lIns="0" tIns="0" rIns="0" bIns="0" rtlCol="0" anchor="t"/>
+          <a:lstStyle/>
+          <a:p>
+            <a:pPr algn="ctr" indent="0" marL="0">
+              <a:buNone/>
+            </a:pPr>
+            <a:r>
+              <a:rPr lang="en-US" sz="850" dirty="0">
+                <a:solidFill>
+                  <a:srgbClr val="475569"/>
+                </a:solidFill>
+                <a:latin typeface="Calibri" pitchFamily="34" charset="0"/>
+                <a:ea typeface="Calibri" pitchFamily="34" charset="-122"/>
+                <a:cs typeface="Calibri" pitchFamily="34" charset="-120"/>
+              </a:rPr>
+              <a:t>past participle suffix</a:t>
+            </a:r>
+            <a:endParaRPr lang="en-US" sz="850" dirty="0"/>
+          </a:p>
+        </p:txBody>
+      </p:sp>
+      <p:sp>
+        <p:nvSpPr>
+          <p:cNvPr id="25" name="Shape 23"/>
           <p:cNvSpPr/>
           <p:nvPr/>
         </p:nvSpPr>
@@ -10109,7 +10550,7 @@
       </p:sp>
       <p:sp>
         <p:nvSpPr>
-          <p:cNvPr id="23" name="Text 21"/>
+          <p:cNvPr id="26" name="Text 24"/>
           <p:cNvSpPr/>
           <p:nvPr/>
         </p:nvSpPr>
@@ -10148,7 +10589,7 @@
       </p:sp>
       <p:sp>
         <p:nvSpPr>
-          <p:cNvPr id="24" name="Shape 22"/>
+          <p:cNvPr id="27" name="Shape 25"/>
           <p:cNvSpPr/>
           <p:nvPr/>
         </p:nvSpPr>
@@ -10175,13 +10616,13 @@
       </p:sp>
       <p:sp>
         <p:nvSpPr>
-          <p:cNvPr id="25" name="Shape 23"/>
-          <p:cNvSpPr/>
-          <p:nvPr/>
-        </p:nvSpPr>
-        <p:spPr>
-          <a:xfrm>
-            <a:off x="2999232" y="3364992"/>
+          <p:cNvPr id="28" name="Shape 26"/>
+          <p:cNvSpPr/>
+          <p:nvPr/>
+        </p:nvSpPr>
+        <p:spPr>
+          <a:xfrm>
+            <a:off x="2313432" y="3364992"/>
             <a:ext cx="1645920" cy="475488"/>
           </a:xfrm>
           <a:prstGeom prst="rect">
@@ -10202,13 +10643,13 @@
       </p:sp>
       <p:sp>
         <p:nvSpPr>
-          <p:cNvPr id="26" name="Text 24"/>
-          <p:cNvSpPr/>
-          <p:nvPr/>
-        </p:nvSpPr>
-        <p:spPr>
-          <a:xfrm>
-            <a:off x="2999232" y="3364992"/>
+          <p:cNvPr id="29" name="Text 27"/>
+          <p:cNvSpPr/>
+          <p:nvPr/>
+        </p:nvSpPr>
+        <p:spPr>
+          <a:xfrm>
+            <a:off x="2313432" y="3364992"/>
             <a:ext cx="1645920" cy="475488"/>
           </a:xfrm>
           <a:prstGeom prst="rect">
@@ -10233,7 +10674,7 @@
                 <a:ea typeface="Trebuchet MS" pitchFamily="34" charset="-122"/>
                 <a:cs typeface="Trebuchet MS" pitchFamily="34" charset="-120"/>
               </a:rPr>
-              <a:t>eat</a:t>
+              <a:t>un</a:t>
             </a:r>
             <a:endParaRPr lang="en-US" sz="1400" dirty="0"/>
           </a:p>
@@ -10241,14 +10682,14 @@
       </p:sp>
       <p:sp>
         <p:nvSpPr>
-          <p:cNvPr id="27" name="Text 25"/>
-          <p:cNvSpPr/>
-          <p:nvPr/>
-        </p:nvSpPr>
-        <p:spPr>
-          <a:xfrm>
-            <a:off x="4645152" y="3364992"/>
-            <a:ext cx="1097280" cy="475488"/>
+          <p:cNvPr id="30" name="Text 28"/>
+          <p:cNvSpPr/>
+          <p:nvPr/>
+        </p:nvSpPr>
+        <p:spPr>
+          <a:xfrm>
+            <a:off x="3959352" y="3364992"/>
+            <a:ext cx="411480" cy="475488"/>
           </a:xfrm>
           <a:prstGeom prst="rect">
             <a:avLst/>
@@ -10280,13 +10721,13 @@
       </p:sp>
       <p:sp>
         <p:nvSpPr>
-          <p:cNvPr id="28" name="Shape 26"/>
-          <p:cNvSpPr/>
-          <p:nvPr/>
-        </p:nvSpPr>
-        <p:spPr>
-          <a:xfrm>
-            <a:off x="5742432" y="3364992"/>
+          <p:cNvPr id="31" name="Shape 29"/>
+          <p:cNvSpPr/>
+          <p:nvPr/>
+        </p:nvSpPr>
+        <p:spPr>
+          <a:xfrm>
+            <a:off x="4370832" y="3364992"/>
             <a:ext cx="1645920" cy="475488"/>
           </a:xfrm>
           <a:prstGeom prst="rect">
@@ -10307,13 +10748,13 @@
       </p:sp>
       <p:sp>
         <p:nvSpPr>
-          <p:cNvPr id="29" name="Text 27"/>
-          <p:cNvSpPr/>
-          <p:nvPr/>
-        </p:nvSpPr>
-        <p:spPr>
-          <a:xfrm>
-            <a:off x="5742432" y="3364992"/>
+          <p:cNvPr id="32" name="Text 30"/>
+          <p:cNvSpPr/>
+          <p:nvPr/>
+        </p:nvSpPr>
+        <p:spPr>
+          <a:xfrm>
+            <a:off x="4370832" y="3364992"/>
             <a:ext cx="1645920" cy="475488"/>
           </a:xfrm>
           <a:prstGeom prst="rect">
@@ -10338,7 +10779,7 @@
                 <a:ea typeface="Trebuchet MS" pitchFamily="34" charset="-122"/>
                 <a:cs typeface="Trebuchet MS" pitchFamily="34" charset="-120"/>
               </a:rPr>
-              <a:t>er</a:t>
+              <a:t>eat</a:t>
             </a:r>
             <a:endParaRPr lang="en-US" sz="1400" dirty="0"/>
           </a:p>
@@ -10346,7 +10787,112 @@
       </p:sp>
       <p:sp>
         <p:nvSpPr>
-          <p:cNvPr id="30" name="Shape 28"/>
+          <p:cNvPr id="33" name="Text 31"/>
+          <p:cNvSpPr/>
+          <p:nvPr/>
+        </p:nvSpPr>
+        <p:spPr>
+          <a:xfrm>
+            <a:off x="6016752" y="3364992"/>
+            <a:ext cx="411480" cy="475488"/>
+          </a:xfrm>
+          <a:prstGeom prst="rect">
+            <a:avLst/>
+          </a:prstGeom>
+          <a:noFill/>
+          <a:ln/>
+        </p:spPr>
+        <p:txBody>
+          <a:bodyPr wrap="square" lIns="0" tIns="0" rIns="0" bIns="0" rtlCol="0" anchor="ctr"/>
+          <a:lstStyle/>
+          <a:p>
+            <a:pPr algn="ctr" indent="0" marL="0">
+              <a:buNone/>
+            </a:pPr>
+            <a:r>
+              <a:rPr lang="en-US" sz="1600" b="1" dirty="0">
+                <a:solidFill>
+                  <a:srgbClr val="0D9488"/>
+                </a:solidFill>
+                <a:latin typeface="Trebuchet MS" pitchFamily="34" charset="0"/>
+                <a:ea typeface="Trebuchet MS" pitchFamily="34" charset="-122"/>
+                <a:cs typeface="Trebuchet MS" pitchFamily="34" charset="-120"/>
+              </a:rPr>
+              <a:t>·</a:t>
+            </a:r>
+            <a:endParaRPr lang="en-US" sz="1600" dirty="0"/>
+          </a:p>
+        </p:txBody>
+      </p:sp>
+      <p:sp>
+        <p:nvSpPr>
+          <p:cNvPr id="34" name="Shape 32"/>
+          <p:cNvSpPr/>
+          <p:nvPr/>
+        </p:nvSpPr>
+        <p:spPr>
+          <a:xfrm>
+            <a:off x="6428232" y="3364992"/>
+            <a:ext cx="1645920" cy="475488"/>
+          </a:xfrm>
+          <a:prstGeom prst="rect">
+            <a:avLst>
+              <a:gd name="adj" fmla="val 9615"/>
+            </a:avLst>
+          </a:prstGeom>
+          <a:solidFill>
+            <a:srgbClr val="FFFFFF"/>
+          </a:solidFill>
+          <a:ln w="12700">
+            <a:solidFill>
+              <a:srgbClr val="0D9488"/>
+            </a:solidFill>
+            <a:prstDash val="solid"/>
+          </a:ln>
+        </p:spPr>
+      </p:sp>
+      <p:sp>
+        <p:nvSpPr>
+          <p:cNvPr id="35" name="Text 33"/>
+          <p:cNvSpPr/>
+          <p:nvPr/>
+        </p:nvSpPr>
+        <p:spPr>
+          <a:xfrm>
+            <a:off x="6428232" y="3364992"/>
+            <a:ext cx="1645920" cy="475488"/>
+          </a:xfrm>
+          <a:prstGeom prst="rect">
+            <a:avLst/>
+          </a:prstGeom>
+          <a:noFill/>
+          <a:ln/>
+        </p:spPr>
+        <p:txBody>
+          <a:bodyPr wrap="square" lIns="0" tIns="0" rIns="0" bIns="0" rtlCol="0" anchor="ctr"/>
+          <a:lstStyle/>
+          <a:p>
+            <a:pPr algn="ctr" indent="0" marL="0">
+              <a:buNone/>
+            </a:pPr>
+            <a:r>
+              <a:rPr lang="en-US" sz="1400" b="1" dirty="0">
+                <a:solidFill>
+                  <a:srgbClr val="0D9488"/>
+                </a:solidFill>
+                <a:latin typeface="Trebuchet MS" pitchFamily="34" charset="0"/>
+                <a:ea typeface="Trebuchet MS" pitchFamily="34" charset="-122"/>
+                <a:cs typeface="Trebuchet MS" pitchFamily="34" charset="-120"/>
+              </a:rPr>
+              <a:t>en</a:t>
+            </a:r>
+            <a:endParaRPr lang="en-US" sz="1400" dirty="0"/>
+          </a:p>
+        </p:txBody>
+      </p:sp>
+      <p:sp>
+        <p:nvSpPr>
+          <p:cNvPr id="36" name="Shape 34"/>
           <p:cNvSpPr/>
           <p:nvPr/>
         </p:nvSpPr>
@@ -10373,7 +10919,7 @@
       </p:sp>
       <p:sp>
         <p:nvSpPr>
-          <p:cNvPr id="31" name="Text 29"/>
+          <p:cNvPr id="37" name="Text 35"/>
           <p:cNvSpPr/>
           <p:nvPr/>
         </p:nvSpPr>
@@ -10412,7 +10958,7 @@
       </p:sp>
       <p:sp>
         <p:nvSpPr>
-          <p:cNvPr id="32" name="Shape 30"/>
+          <p:cNvPr id="38" name="Shape 36"/>
           <p:cNvSpPr/>
           <p:nvPr/>
         </p:nvSpPr>
@@ -10439,13 +10985,13 @@
       </p:sp>
       <p:sp>
         <p:nvSpPr>
-          <p:cNvPr id="33" name="Shape 31"/>
-          <p:cNvSpPr/>
-          <p:nvPr/>
-        </p:nvSpPr>
-        <p:spPr>
-          <a:xfrm>
-            <a:off x="3033522" y="4169664"/>
+          <p:cNvPr id="39" name="Shape 37"/>
+          <p:cNvSpPr/>
+          <p:nvPr/>
+        </p:nvSpPr>
+        <p:spPr>
+          <a:xfrm>
+            <a:off x="2254649" y="4169664"/>
             <a:ext cx="685800" cy="475488"/>
           </a:xfrm>
           <a:prstGeom prst="rect">
@@ -10466,13 +11012,13 @@
       </p:sp>
       <p:sp>
         <p:nvSpPr>
-          <p:cNvPr id="34" name="Text 32"/>
-          <p:cNvSpPr/>
-          <p:nvPr/>
-        </p:nvSpPr>
-        <p:spPr>
-          <a:xfrm>
-            <a:off x="3033522" y="4169664"/>
+          <p:cNvPr id="40" name="Text 38"/>
+          <p:cNvSpPr/>
+          <p:nvPr/>
+        </p:nvSpPr>
+        <p:spPr>
+          <a:xfrm>
+            <a:off x="2254649" y="4169664"/>
             <a:ext cx="685800" cy="475488"/>
           </a:xfrm>
           <a:prstGeom prst="rect">
@@ -10489,7 +11035,7 @@
               <a:buNone/>
             </a:pPr>
             <a:r>
-              <a:rPr lang="en-US" sz="1000" b="1" dirty="0">
+              <a:rPr lang="en-US" sz="900" b="1" dirty="0">
                 <a:solidFill>
                   <a:srgbClr val="9D174D"/>
                 </a:solidFill>
@@ -10497,21 +11043,21 @@
                 <a:ea typeface="Trebuchet MS" pitchFamily="34" charset="-122"/>
                 <a:cs typeface="Trebuchet MS" pitchFamily="34" charset="-120"/>
               </a:rPr>
-              <a:t>ea</a:t>
-            </a:r>
-            <a:endParaRPr lang="en-US" sz="1000" dirty="0"/>
-          </a:p>
-        </p:txBody>
-      </p:sp>
-      <p:sp>
-        <p:nvSpPr>
-          <p:cNvPr id="35" name="Shape 33"/>
-          <p:cNvSpPr/>
-          <p:nvPr/>
-        </p:nvSpPr>
-        <p:spPr>
-          <a:xfrm>
-            <a:off x="4850892" y="4169664"/>
+              <a:t>u</a:t>
+            </a:r>
+            <a:endParaRPr lang="en-US" sz="900" dirty="0"/>
+          </a:p>
+        </p:txBody>
+      </p:sp>
+      <p:sp>
+        <p:nvSpPr>
+          <p:cNvPr id="41" name="Shape 39"/>
+          <p:cNvSpPr/>
+          <p:nvPr/>
+        </p:nvSpPr>
+        <p:spPr>
+          <a:xfrm>
+            <a:off x="3293146" y="4169664"/>
             <a:ext cx="685800" cy="475488"/>
           </a:xfrm>
           <a:prstGeom prst="rect">
@@ -10532,13 +11078,13 @@
       </p:sp>
       <p:sp>
         <p:nvSpPr>
-          <p:cNvPr id="36" name="Text 34"/>
-          <p:cNvSpPr/>
-          <p:nvPr/>
-        </p:nvSpPr>
-        <p:spPr>
-          <a:xfrm>
-            <a:off x="4850892" y="4169664"/>
+          <p:cNvPr id="42" name="Text 40"/>
+          <p:cNvSpPr/>
+          <p:nvPr/>
+        </p:nvSpPr>
+        <p:spPr>
+          <a:xfrm>
+            <a:off x="3293146" y="4169664"/>
             <a:ext cx="685800" cy="475488"/>
           </a:xfrm>
           <a:prstGeom prst="rect">
@@ -10555,7 +11101,7 @@
               <a:buNone/>
             </a:pPr>
             <a:r>
-              <a:rPr lang="en-US" sz="1000" b="1" dirty="0">
+              <a:rPr lang="en-US" sz="900" b="1" dirty="0">
                 <a:solidFill>
                   <a:srgbClr val="9D174D"/>
                 </a:solidFill>
@@ -10563,21 +11109,21 @@
                 <a:ea typeface="Trebuchet MS" pitchFamily="34" charset="-122"/>
                 <a:cs typeface="Trebuchet MS" pitchFamily="34" charset="-120"/>
               </a:rPr>
-              <a:t>t</a:t>
-            </a:r>
-            <a:endParaRPr lang="en-US" sz="1000" dirty="0"/>
-          </a:p>
-        </p:txBody>
-      </p:sp>
-      <p:sp>
-        <p:nvSpPr>
-          <p:cNvPr id="37" name="Shape 35"/>
-          <p:cNvSpPr/>
-          <p:nvPr/>
-        </p:nvSpPr>
-        <p:spPr>
-          <a:xfrm>
-            <a:off x="6668262" y="4169664"/>
+              <a:t>n</a:t>
+            </a:r>
+            <a:endParaRPr lang="en-US" sz="900" dirty="0"/>
+          </a:p>
+        </p:txBody>
+      </p:sp>
+      <p:sp>
+        <p:nvSpPr>
+          <p:cNvPr id="43" name="Shape 41"/>
+          <p:cNvSpPr/>
+          <p:nvPr/>
+        </p:nvSpPr>
+        <p:spPr>
+          <a:xfrm>
+            <a:off x="4331643" y="4169664"/>
             <a:ext cx="685800" cy="475488"/>
           </a:xfrm>
           <a:prstGeom prst="rect">
@@ -10598,13 +11144,13 @@
       </p:sp>
       <p:sp>
         <p:nvSpPr>
-          <p:cNvPr id="38" name="Text 36"/>
-          <p:cNvSpPr/>
-          <p:nvPr/>
-        </p:nvSpPr>
-        <p:spPr>
-          <a:xfrm>
-            <a:off x="6668262" y="4169664"/>
+          <p:cNvPr id="44" name="Text 42"/>
+          <p:cNvSpPr/>
+          <p:nvPr/>
+        </p:nvSpPr>
+        <p:spPr>
+          <a:xfrm>
+            <a:off x="4331643" y="4169664"/>
             <a:ext cx="685800" cy="475488"/>
           </a:xfrm>
           <a:prstGeom prst="rect">
@@ -10621,7 +11167,7 @@
               <a:buNone/>
             </a:pPr>
             <a:r>
-              <a:rPr lang="en-US" sz="1000" b="1" dirty="0">
+              <a:rPr lang="en-US" sz="900" b="1" dirty="0">
                 <a:solidFill>
                   <a:srgbClr val="9D174D"/>
                 </a:solidFill>
@@ -10629,9 +11175,207 @@
                 <a:ea typeface="Trebuchet MS" pitchFamily="34" charset="-122"/>
                 <a:cs typeface="Trebuchet MS" pitchFamily="34" charset="-120"/>
               </a:rPr>
-              <a:t>er</a:t>
-            </a:r>
-            <a:endParaRPr lang="en-US" sz="1000" dirty="0"/>
+              <a:t>ea</a:t>
+            </a:r>
+            <a:endParaRPr lang="en-US" sz="900" dirty="0"/>
+          </a:p>
+        </p:txBody>
+      </p:sp>
+      <p:sp>
+        <p:nvSpPr>
+          <p:cNvPr id="45" name="Shape 43"/>
+          <p:cNvSpPr/>
+          <p:nvPr/>
+        </p:nvSpPr>
+        <p:spPr>
+          <a:xfrm>
+            <a:off x="5370141" y="4169664"/>
+            <a:ext cx="685800" cy="475488"/>
+          </a:xfrm>
+          <a:prstGeom prst="rect">
+            <a:avLst>
+              <a:gd name="adj" fmla="val 7692"/>
+            </a:avLst>
+          </a:prstGeom>
+          <a:solidFill>
+            <a:srgbClr val="FFFFFF"/>
+          </a:solidFill>
+          <a:ln w="12700">
+            <a:solidFill>
+              <a:srgbClr val="DB2777"/>
+            </a:solidFill>
+            <a:prstDash val="solid"/>
+          </a:ln>
+        </p:spPr>
+      </p:sp>
+      <p:sp>
+        <p:nvSpPr>
+          <p:cNvPr id="46" name="Text 44"/>
+          <p:cNvSpPr/>
+          <p:nvPr/>
+        </p:nvSpPr>
+        <p:spPr>
+          <a:xfrm>
+            <a:off x="5370141" y="4169664"/>
+            <a:ext cx="685800" cy="475488"/>
+          </a:xfrm>
+          <a:prstGeom prst="rect">
+            <a:avLst/>
+          </a:prstGeom>
+          <a:noFill/>
+          <a:ln/>
+        </p:spPr>
+        <p:txBody>
+          <a:bodyPr wrap="square" lIns="0" tIns="0" rIns="0" bIns="0" rtlCol="0" anchor="ctr"/>
+          <a:lstStyle/>
+          <a:p>
+            <a:pPr algn="ctr" indent="0" marL="0">
+              <a:buNone/>
+            </a:pPr>
+            <a:r>
+              <a:rPr lang="en-US" sz="900" b="1" dirty="0">
+                <a:solidFill>
+                  <a:srgbClr val="9D174D"/>
+                </a:solidFill>
+                <a:latin typeface="Trebuchet MS" pitchFamily="34" charset="0"/>
+                <a:ea typeface="Trebuchet MS" pitchFamily="34" charset="-122"/>
+                <a:cs typeface="Trebuchet MS" pitchFamily="34" charset="-120"/>
+              </a:rPr>
+              <a:t>t</a:t>
+            </a:r>
+            <a:endParaRPr lang="en-US" sz="900" dirty="0"/>
+          </a:p>
+        </p:txBody>
+      </p:sp>
+      <p:sp>
+        <p:nvSpPr>
+          <p:cNvPr id="47" name="Shape 45"/>
+          <p:cNvSpPr/>
+          <p:nvPr/>
+        </p:nvSpPr>
+        <p:spPr>
+          <a:xfrm>
+            <a:off x="6408638" y="4169664"/>
+            <a:ext cx="685800" cy="475488"/>
+          </a:xfrm>
+          <a:prstGeom prst="rect">
+            <a:avLst>
+              <a:gd name="adj" fmla="val 7692"/>
+            </a:avLst>
+          </a:prstGeom>
+          <a:solidFill>
+            <a:srgbClr val="FFFFFF"/>
+          </a:solidFill>
+          <a:ln w="12700">
+            <a:solidFill>
+              <a:srgbClr val="DB2777"/>
+            </a:solidFill>
+            <a:prstDash val="solid"/>
+          </a:ln>
+        </p:spPr>
+      </p:sp>
+      <p:sp>
+        <p:nvSpPr>
+          <p:cNvPr id="48" name="Text 46"/>
+          <p:cNvSpPr/>
+          <p:nvPr/>
+        </p:nvSpPr>
+        <p:spPr>
+          <a:xfrm>
+            <a:off x="6408638" y="4169664"/>
+            <a:ext cx="685800" cy="475488"/>
+          </a:xfrm>
+          <a:prstGeom prst="rect">
+            <a:avLst/>
+          </a:prstGeom>
+          <a:noFill/>
+          <a:ln/>
+        </p:spPr>
+        <p:txBody>
+          <a:bodyPr wrap="square" lIns="0" tIns="0" rIns="0" bIns="0" rtlCol="0" anchor="ctr"/>
+          <a:lstStyle/>
+          <a:p>
+            <a:pPr algn="ctr" indent="0" marL="0">
+              <a:buNone/>
+            </a:pPr>
+            <a:r>
+              <a:rPr lang="en-US" sz="900" b="1" dirty="0">
+                <a:solidFill>
+                  <a:srgbClr val="9D174D"/>
+                </a:solidFill>
+                <a:latin typeface="Trebuchet MS" pitchFamily="34" charset="0"/>
+                <a:ea typeface="Trebuchet MS" pitchFamily="34" charset="-122"/>
+                <a:cs typeface="Trebuchet MS" pitchFamily="34" charset="-120"/>
+              </a:rPr>
+              <a:t>e</a:t>
+            </a:r>
+            <a:endParaRPr lang="en-US" sz="900" dirty="0"/>
+          </a:p>
+        </p:txBody>
+      </p:sp>
+      <p:sp>
+        <p:nvSpPr>
+          <p:cNvPr id="49" name="Shape 47"/>
+          <p:cNvSpPr/>
+          <p:nvPr/>
+        </p:nvSpPr>
+        <p:spPr>
+          <a:xfrm>
+            <a:off x="7447135" y="4169664"/>
+            <a:ext cx="685800" cy="475488"/>
+          </a:xfrm>
+          <a:prstGeom prst="rect">
+            <a:avLst>
+              <a:gd name="adj" fmla="val 7692"/>
+            </a:avLst>
+          </a:prstGeom>
+          <a:solidFill>
+            <a:srgbClr val="FFFFFF"/>
+          </a:solidFill>
+          <a:ln w="12700">
+            <a:solidFill>
+              <a:srgbClr val="DB2777"/>
+            </a:solidFill>
+            <a:prstDash val="solid"/>
+          </a:ln>
+        </p:spPr>
+      </p:sp>
+      <p:sp>
+        <p:nvSpPr>
+          <p:cNvPr id="50" name="Text 48"/>
+          <p:cNvSpPr/>
+          <p:nvPr/>
+        </p:nvSpPr>
+        <p:spPr>
+          <a:xfrm>
+            <a:off x="7447135" y="4169664"/>
+            <a:ext cx="685800" cy="475488"/>
+          </a:xfrm>
+          <a:prstGeom prst="rect">
+            <a:avLst/>
+          </a:prstGeom>
+          <a:noFill/>
+          <a:ln/>
+        </p:spPr>
+        <p:txBody>
+          <a:bodyPr wrap="square" lIns="0" tIns="0" rIns="0" bIns="0" rtlCol="0" anchor="ctr"/>
+          <a:lstStyle/>
+          <a:p>
+            <a:pPr algn="ctr" indent="0" marL="0">
+              <a:buNone/>
+            </a:pPr>
+            <a:r>
+              <a:rPr lang="en-US" sz="900" b="1" dirty="0">
+                <a:solidFill>
+                  <a:srgbClr val="9D174D"/>
+                </a:solidFill>
+                <a:latin typeface="Trebuchet MS" pitchFamily="34" charset="0"/>
+                <a:ea typeface="Trebuchet MS" pitchFamily="34" charset="-122"/>
+                <a:cs typeface="Trebuchet MS" pitchFamily="34" charset="-120"/>
+              </a:rPr>
+              <a:t>n</a:t>
+            </a:r>
+            <a:endParaRPr lang="en-US" sz="900" dirty="0"/>
           </a:p>
         </p:txBody>
       </p:sp>
@@ -11060,7 +11804,7 @@
                 <a:ea typeface="Trebuchet MS" pitchFamily="34" charset="-122"/>
                 <a:cs typeface="Trebuchet MS" pitchFamily="34" charset="-120"/>
               </a:rPr>
-              <a:t>uneaten</a:t>
+              <a:t>eater</a:t>
             </a:r>
             <a:endParaRPr lang="en-US" sz="2800" dirty="0"/>
           </a:p>
@@ -11887,7 +12631,7 @@
                 <a:ea typeface="Trebuchet MS" pitchFamily="34" charset="-122"/>
                 <a:cs typeface="Trebuchet MS" pitchFamily="34" charset="-120"/>
               </a:rPr>
-              <a:t>uneaten</a:t>
+              <a:t>eater</a:t>
             </a:r>
             <a:endParaRPr lang="en-US" sz="2800" dirty="0"/>
           </a:p>
@@ -11967,7 +12711,7 @@
         </p:nvSpPr>
         <p:spPr>
           <a:xfrm>
-            <a:off x="2221992" y="2258568"/>
+            <a:off x="2938272" y="2258568"/>
             <a:ext cx="1828800" cy="292608"/>
           </a:xfrm>
           <a:prstGeom prst="rect">
@@ -11976,11 +12720,11 @@
             </a:avLst>
           </a:prstGeom>
           <a:solidFill>
-            <a:srgbClr val="DDD6FE"/>
+            <a:srgbClr val="CCFBF1"/>
           </a:solidFill>
           <a:ln w="19050">
             <a:solidFill>
-              <a:srgbClr val="7C3AED"/>
+              <a:srgbClr val="0D9488"/>
             </a:solidFill>
             <a:prstDash val="solid"/>
           </a:ln>
@@ -12001,7 +12745,7 @@
         </p:nvSpPr>
         <p:spPr>
           <a:xfrm>
-            <a:off x="2221992" y="2258568"/>
+            <a:off x="2938272" y="2258568"/>
             <a:ext cx="1828800" cy="292608"/>
           </a:xfrm>
           <a:prstGeom prst="rect">
@@ -12020,13 +12764,13 @@
             <a:r>
               <a:rPr lang="en-US" sz="1300" b="1" dirty="0">
                 <a:solidFill>
-                  <a:srgbClr val="4C1D95"/>
+                  <a:srgbClr val="0F766E"/>
                 </a:solidFill>
                 <a:latin typeface="Trebuchet MS" pitchFamily="34" charset="0"/>
                 <a:ea typeface="Trebuchet MS" pitchFamily="34" charset="-122"/>
                 <a:cs typeface="Trebuchet MS" pitchFamily="34" charset="-120"/>
               </a:rPr>
-              <a:t>un</a:t>
+              <a:t>eat</a:t>
             </a:r>
             <a:endParaRPr lang="en-US" sz="1300" dirty="0"/>
           </a:p>
@@ -12040,7 +12784,7 @@
         </p:nvSpPr>
         <p:spPr>
           <a:xfrm>
-            <a:off x="2221992" y="2569464"/>
+            <a:off x="2938272" y="2569464"/>
             <a:ext cx="1828800" cy="201168"/>
           </a:xfrm>
           <a:prstGeom prst="rect">
@@ -12065,7 +12809,7 @@
                 <a:ea typeface="Calibri" pitchFamily="34" charset="-122"/>
                 <a:cs typeface="Calibri" pitchFamily="34" charset="-120"/>
               </a:rPr>
-              <a:t>not</a:t>
+              <a:t>to consume food</a:t>
             </a:r>
             <a:endParaRPr lang="en-US" sz="850" dirty="0"/>
           </a:p>
@@ -12079,7 +12823,7 @@
         </p:nvSpPr>
         <p:spPr>
           <a:xfrm>
-            <a:off x="4370832" y="2258568"/>
+            <a:off x="5803392" y="2258568"/>
             <a:ext cx="1828800" cy="292608"/>
           </a:xfrm>
           <a:prstGeom prst="rect">
@@ -12088,11 +12832,11 @@
             </a:avLst>
           </a:prstGeom>
           <a:solidFill>
-            <a:srgbClr val="CCFBF1"/>
+            <a:srgbClr val="FCE7F3"/>
           </a:solidFill>
           <a:ln w="19050">
             <a:solidFill>
-              <a:srgbClr val="0D9488"/>
+              <a:srgbClr val="DB2777"/>
             </a:solidFill>
             <a:prstDash val="solid"/>
           </a:ln>
@@ -12113,7 +12857,7 @@
         </p:nvSpPr>
         <p:spPr>
           <a:xfrm>
-            <a:off x="4370832" y="2258568"/>
+            <a:off x="5803392" y="2258568"/>
             <a:ext cx="1828800" cy="292608"/>
           </a:xfrm>
           <a:prstGeom prst="rect">
@@ -12132,13 +12876,13 @@
             <a:r>
               <a:rPr lang="en-US" sz="1300" b="1" dirty="0">
                 <a:solidFill>
-                  <a:srgbClr val="0F766E"/>
+                  <a:srgbClr val="9D174D"/>
                 </a:solidFill>
                 <a:latin typeface="Trebuchet MS" pitchFamily="34" charset="0"/>
                 <a:ea typeface="Trebuchet MS" pitchFamily="34" charset="-122"/>
                 <a:cs typeface="Trebuchet MS" pitchFamily="34" charset="-120"/>
               </a:rPr>
-              <a:t>eat</a:t>
+              <a:t>er</a:t>
             </a:r>
             <a:endParaRPr lang="en-US" sz="1300" dirty="0"/>
           </a:p>
@@ -12152,7 +12896,7 @@
         </p:nvSpPr>
         <p:spPr>
           <a:xfrm>
-            <a:off x="4370832" y="2569464"/>
+            <a:off x="5803392" y="2569464"/>
             <a:ext cx="1828800" cy="201168"/>
           </a:xfrm>
           <a:prstGeom prst="rect">
@@ -12177,7 +12921,7 @@
                 <a:ea typeface="Calibri" pitchFamily="34" charset="-122"/>
                 <a:cs typeface="Calibri" pitchFamily="34" charset="-120"/>
               </a:rPr>
-              <a:t>to consume food</a:t>
+              <a:t>a person or thing that does something</a:t>
             </a:r>
             <a:endParaRPr lang="en-US" sz="850" dirty="0"/>
           </a:p>
@@ -12191,30 +12935,23 @@
         </p:nvSpPr>
         <p:spPr>
           <a:xfrm>
-            <a:off x="6519672" y="2258568"/>
-            <a:ext cx="1828800" cy="292608"/>
+            <a:off x="365760" y="3273552"/>
+            <a:ext cx="1371600" cy="658368"/>
           </a:xfrm>
           <a:prstGeom prst="rect">
             <a:avLst>
-              <a:gd name="adj" fmla="val 25000"/>
+              <a:gd name="adj" fmla="val 8333"/>
             </a:avLst>
           </a:prstGeom>
           <a:solidFill>
-            <a:srgbClr val="FCE7F3"/>
-          </a:solidFill>
-          <a:ln w="19050">
-            <a:solidFill>
-              <a:srgbClr val="DB2777"/>
-            </a:solidFill>
-            <a:prstDash val="solid"/>
-          </a:ln>
-          <a:effectLst>
-            <a:outerShdw sx="100000" sy="100000" kx="0" ky="0" algn="bl" rotWithShape="0" blurRad="101600" dist="38100" dir="8100000">
-              <a:srgbClr val="000000">
-                <a:alpha val="12000"/>
-              </a:srgbClr>
-            </a:outerShdw>
-          </a:effectLst>
+            <a:srgbClr val="E2E8F0"/>
+          </a:solidFill>
+          <a:ln w="12700">
+            <a:solidFill>
+              <a:srgbClr val="E2E8F0"/>
+            </a:solidFill>
+            <a:prstDash val="solid"/>
+          </a:ln>
         </p:spPr>
       </p:sp>
       <p:sp>
@@ -12225,90 +12962,117 @@
         </p:nvSpPr>
         <p:spPr>
           <a:xfrm>
-            <a:off x="6519672" y="2258568"/>
-            <a:ext cx="1828800" cy="292608"/>
-          </a:xfrm>
-          <a:prstGeom prst="rect">
-            <a:avLst/>
-          </a:prstGeom>
-          <a:noFill/>
-          <a:ln/>
-        </p:spPr>
-        <p:txBody>
-          <a:bodyPr wrap="square" lIns="0" tIns="0" rIns="0" bIns="0" rtlCol="0" anchor="ctr"/>
-          <a:lstStyle/>
-          <a:p>
-            <a:pPr algn="ctr" indent="0" marL="0">
-              <a:buNone/>
-            </a:pPr>
-            <a:r>
-              <a:rPr lang="en-US" sz="1300" b="1" dirty="0">
-                <a:solidFill>
-                  <a:srgbClr val="9D174D"/>
+            <a:off x="365760" y="3273552"/>
+            <a:ext cx="1371600" cy="658368"/>
+          </a:xfrm>
+          <a:prstGeom prst="rect">
+            <a:avLst/>
+          </a:prstGeom>
+          <a:noFill/>
+          <a:ln/>
+        </p:spPr>
+        <p:txBody>
+          <a:bodyPr wrap="square" lIns="0" tIns="0" rIns="0" bIns="0" rtlCol="0" anchor="ctr"/>
+          <a:lstStyle/>
+          <a:p>
+            <a:pPr algn="ctr" indent="0" marL="0">
+              <a:buNone/>
+            </a:pPr>
+            <a:r>
+              <a:rPr lang="en-US" sz="1100" b="1" dirty="0">
+                <a:solidFill>
+                  <a:srgbClr val="475569"/>
                 </a:solidFill>
                 <a:latin typeface="Trebuchet MS" pitchFamily="34" charset="0"/>
                 <a:ea typeface="Trebuchet MS" pitchFamily="34" charset="-122"/>
                 <a:cs typeface="Trebuchet MS" pitchFamily="34" charset="-120"/>
               </a:rPr>
-              <a:t>en</a:t>
-            </a:r>
-            <a:endParaRPr lang="en-US" sz="1300" dirty="0"/>
-          </a:p>
-        </p:txBody>
-      </p:sp>
-      <p:sp>
-        <p:nvSpPr>
-          <p:cNvPr id="24" name="Text 22"/>
-          <p:cNvSpPr/>
-          <p:nvPr/>
-        </p:nvSpPr>
-        <p:spPr>
-          <a:xfrm>
-            <a:off x="6519672" y="2569464"/>
-            <a:ext cx="1828800" cy="201168"/>
-          </a:xfrm>
-          <a:prstGeom prst="rect">
-            <a:avLst/>
-          </a:prstGeom>
-          <a:noFill/>
-          <a:ln/>
-        </p:spPr>
-        <p:txBody>
-          <a:bodyPr wrap="square" lIns="0" tIns="0" rIns="0" bIns="0" rtlCol="0" anchor="t"/>
-          <a:lstStyle/>
-          <a:p>
-            <a:pPr algn="ctr" indent="0" marL="0">
-              <a:buNone/>
-            </a:pPr>
-            <a:r>
-              <a:rPr lang="en-US" sz="850" dirty="0">
-                <a:solidFill>
-                  <a:srgbClr val="475569"/>
+              <a:t>Syllables</a:t>
+            </a:r>
+            <a:endParaRPr lang="en-US" sz="1100" dirty="0"/>
+          </a:p>
+        </p:txBody>
+      </p:sp>
+      <p:sp>
+        <p:nvSpPr>
+          <p:cNvPr id="24" name="Shape 22"/>
+          <p:cNvSpPr/>
+          <p:nvPr/>
+        </p:nvSpPr>
+        <p:spPr>
+          <a:xfrm>
+            <a:off x="1874520" y="3273552"/>
+            <a:ext cx="6903720" cy="658368"/>
+          </a:xfrm>
+          <a:prstGeom prst="rect">
+            <a:avLst>
+              <a:gd name="adj" fmla="val 8333"/>
+            </a:avLst>
+          </a:prstGeom>
+          <a:solidFill>
+            <a:srgbClr val="F8FAFC"/>
+          </a:solidFill>
+          <a:ln w="12700">
+            <a:solidFill>
+              <a:srgbClr val="E2E8F0"/>
+            </a:solidFill>
+            <a:prstDash val="dash"/>
+          </a:ln>
+        </p:spPr>
+      </p:sp>
+      <p:sp>
+        <p:nvSpPr>
+          <p:cNvPr id="25" name="Text 23"/>
+          <p:cNvSpPr/>
+          <p:nvPr/>
+        </p:nvSpPr>
+        <p:spPr>
+          <a:xfrm>
+            <a:off x="1874520" y="3273552"/>
+            <a:ext cx="6903720" cy="658368"/>
+          </a:xfrm>
+          <a:prstGeom prst="rect">
+            <a:avLst/>
+          </a:prstGeom>
+          <a:noFill/>
+          <a:ln/>
+        </p:spPr>
+        <p:txBody>
+          <a:bodyPr wrap="square" rtlCol="0" anchor="ctr"/>
+          <a:lstStyle/>
+          <a:p>
+            <a:pPr algn="ctr" indent="0" marL="0">
+              <a:buNone/>
+            </a:pPr>
+            <a:r>
+              <a:rPr lang="en-US" sz="1100" i="1" dirty="0">
+                <a:solidFill>
+                  <a:srgbClr val="CBD5E1"/>
                 </a:solidFill>
                 <a:latin typeface="Calibri" pitchFamily="34" charset="0"/>
                 <a:ea typeface="Calibri" pitchFamily="34" charset="-122"/>
                 <a:cs typeface="Calibri" pitchFamily="34" charset="-120"/>
               </a:rPr>
-              <a:t>done to, past participle</a:t>
-            </a:r>
-            <a:endParaRPr lang="en-US" sz="850" dirty="0"/>
-          </a:p>
-        </p:txBody>
-      </p:sp>
-      <p:sp>
-        <p:nvSpPr>
-          <p:cNvPr id="25" name="Shape 23"/>
-          <p:cNvSpPr/>
-          <p:nvPr/>
-        </p:nvSpPr>
-        <p:spPr>
-          <a:xfrm>
-            <a:off x="365760" y="3273552"/>
-            <a:ext cx="1371600" cy="658368"/>
+              <a:t>Write here...</a:t>
+            </a:r>
+            <a:endParaRPr lang="en-US" sz="1100" dirty="0"/>
+          </a:p>
+        </p:txBody>
+      </p:sp>
+      <p:sp>
+        <p:nvSpPr>
+          <p:cNvPr id="26" name="Shape 24"/>
+          <p:cNvSpPr/>
+          <p:nvPr/>
+        </p:nvSpPr>
+        <p:spPr>
+          <a:xfrm>
+            <a:off x="365760" y="4096512"/>
+            <a:ext cx="1371600" cy="804672"/>
           </a:xfrm>
           <a:prstGeom prst="rect">
             <a:avLst>
-              <a:gd name="adj" fmla="val 8333"/>
+              <a:gd name="adj" fmla="val 6818"/>
             </a:avLst>
           </a:prstGeom>
           <a:solidFill>
@@ -12324,14 +13088,14 @@
       </p:sp>
       <p:sp>
         <p:nvSpPr>
-          <p:cNvPr id="26" name="Text 24"/>
-          <p:cNvSpPr/>
-          <p:nvPr/>
-        </p:nvSpPr>
-        <p:spPr>
-          <a:xfrm>
-            <a:off x="365760" y="3273552"/>
-            <a:ext cx="1371600" cy="658368"/>
+          <p:cNvPr id="27" name="Text 25"/>
+          <p:cNvSpPr/>
+          <p:nvPr/>
+        </p:nvSpPr>
+        <p:spPr>
+          <a:xfrm>
+            <a:off x="365760" y="4096512"/>
+            <a:ext cx="1371600" cy="804672"/>
           </a:xfrm>
           <a:prstGeom prst="rect">
             <a:avLst/>
@@ -12355,7 +13119,7 @@
                 <a:ea typeface="Trebuchet MS" pitchFamily="34" charset="-122"/>
                 <a:cs typeface="Trebuchet MS" pitchFamily="34" charset="-120"/>
               </a:rPr>
-              <a:t>Syllables</a:t>
+              <a:t>Phonemes</a:t>
             </a:r>
             <a:endParaRPr lang="en-US" sz="1100" dirty="0"/>
           </a:p>
@@ -12363,80 +13127,14 @@
       </p:sp>
       <p:sp>
         <p:nvSpPr>
-          <p:cNvPr id="27" name="Shape 25"/>
-          <p:cNvSpPr/>
-          <p:nvPr/>
-        </p:nvSpPr>
-        <p:spPr>
-          <a:xfrm>
-            <a:off x="1874520" y="3273552"/>
-            <a:ext cx="6903720" cy="658368"/>
-          </a:xfrm>
-          <a:prstGeom prst="rect">
-            <a:avLst>
-              <a:gd name="adj" fmla="val 8333"/>
-            </a:avLst>
-          </a:prstGeom>
-          <a:solidFill>
-            <a:srgbClr val="F8FAFC"/>
-          </a:solidFill>
-          <a:ln w="12700">
-            <a:solidFill>
-              <a:srgbClr val="E2E8F0"/>
-            </a:solidFill>
-            <a:prstDash val="dash"/>
-          </a:ln>
-        </p:spPr>
-      </p:sp>
-      <p:sp>
-        <p:nvSpPr>
-          <p:cNvPr id="28" name="Text 26"/>
-          <p:cNvSpPr/>
-          <p:nvPr/>
-        </p:nvSpPr>
-        <p:spPr>
-          <a:xfrm>
-            <a:off x="1874520" y="3273552"/>
-            <a:ext cx="6903720" cy="658368"/>
-          </a:xfrm>
-          <a:prstGeom prst="rect">
-            <a:avLst/>
-          </a:prstGeom>
-          <a:noFill/>
-          <a:ln/>
-        </p:spPr>
-        <p:txBody>
-          <a:bodyPr wrap="square" rtlCol="0" anchor="ctr"/>
-          <a:lstStyle/>
-          <a:p>
-            <a:pPr algn="ctr" indent="0" marL="0">
-              <a:buNone/>
-            </a:pPr>
-            <a:r>
-              <a:rPr lang="en-US" sz="1100" i="1" dirty="0">
-                <a:solidFill>
-                  <a:srgbClr val="CBD5E1"/>
-                </a:solidFill>
-                <a:latin typeface="Calibri" pitchFamily="34" charset="0"/>
-                <a:ea typeface="Calibri" pitchFamily="34" charset="-122"/>
-                <a:cs typeface="Calibri" pitchFamily="34" charset="-120"/>
-              </a:rPr>
-              <a:t>Write here...</a:t>
-            </a:r>
-            <a:endParaRPr lang="en-US" sz="1100" dirty="0"/>
-          </a:p>
-        </p:txBody>
-      </p:sp>
-      <p:sp>
-        <p:nvSpPr>
-          <p:cNvPr id="29" name="Shape 27"/>
-          <p:cNvSpPr/>
-          <p:nvPr/>
-        </p:nvSpPr>
-        <p:spPr>
-          <a:xfrm>
-            <a:off x="365760" y="4096512"/>
-            <a:ext cx="1371600" cy="804672"/>
+          <p:cNvPr id="28" name="Shape 26"/>
+          <p:cNvSpPr/>
+          <p:nvPr/>
+        </p:nvSpPr>
+        <p:spPr>
+          <a:xfrm>
+            <a:off x="1874520" y="4096512"/>
+            <a:ext cx="6903720" cy="804672"/>
           </a:xfrm>
           <a:prstGeom prst="rect">
             <a:avLst>
@@ -12444,85 +13142,19 @@
             </a:avLst>
           </a:prstGeom>
           <a:solidFill>
-            <a:srgbClr val="E2E8F0"/>
+            <a:srgbClr val="F8FAFC"/>
           </a:solidFill>
           <a:ln w="12700">
             <a:solidFill>
               <a:srgbClr val="E2E8F0"/>
             </a:solidFill>
-            <a:prstDash val="solid"/>
-          </a:ln>
-        </p:spPr>
-      </p:sp>
-      <p:sp>
-        <p:nvSpPr>
-          <p:cNvPr id="30" name="Text 28"/>
-          <p:cNvSpPr/>
-          <p:nvPr/>
-        </p:nvSpPr>
-        <p:spPr>
-          <a:xfrm>
-            <a:off x="365760" y="4096512"/>
-            <a:ext cx="1371600" cy="804672"/>
-          </a:xfrm>
-          <a:prstGeom prst="rect">
-            <a:avLst/>
-          </a:prstGeom>
-          <a:noFill/>
-          <a:ln/>
-        </p:spPr>
-        <p:txBody>
-          <a:bodyPr wrap="square" lIns="0" tIns="0" rIns="0" bIns="0" rtlCol="0" anchor="ctr"/>
-          <a:lstStyle/>
-          <a:p>
-            <a:pPr algn="ctr" indent="0" marL="0">
-              <a:buNone/>
-            </a:pPr>
-            <a:r>
-              <a:rPr lang="en-US" sz="1100" b="1" dirty="0">
-                <a:solidFill>
-                  <a:srgbClr val="475569"/>
-                </a:solidFill>
-                <a:latin typeface="Trebuchet MS" pitchFamily="34" charset="0"/>
-                <a:ea typeface="Trebuchet MS" pitchFamily="34" charset="-122"/>
-                <a:cs typeface="Trebuchet MS" pitchFamily="34" charset="-120"/>
-              </a:rPr>
-              <a:t>Phonemes</a:t>
-            </a:r>
-            <a:endParaRPr lang="en-US" sz="1100" dirty="0"/>
-          </a:p>
-        </p:txBody>
-      </p:sp>
-      <p:sp>
-        <p:nvSpPr>
-          <p:cNvPr id="31" name="Shape 29"/>
-          <p:cNvSpPr/>
-          <p:nvPr/>
-        </p:nvSpPr>
-        <p:spPr>
-          <a:xfrm>
-            <a:off x="1874520" y="4096512"/>
-            <a:ext cx="6903720" cy="804672"/>
-          </a:xfrm>
-          <a:prstGeom prst="rect">
-            <a:avLst>
-              <a:gd name="adj" fmla="val 6818"/>
-            </a:avLst>
-          </a:prstGeom>
-          <a:solidFill>
-            <a:srgbClr val="F8FAFC"/>
-          </a:solidFill>
-          <a:ln w="12700">
-            <a:solidFill>
-              <a:srgbClr val="E2E8F0"/>
-            </a:solidFill>
             <a:prstDash val="dash"/>
           </a:ln>
         </p:spPr>
       </p:sp>
       <p:sp>
         <p:nvSpPr>
-          <p:cNvPr id="32" name="Text 30"/>
+          <p:cNvPr id="29" name="Text 27"/>
           <p:cNvSpPr/>
           <p:nvPr/>
         </p:nvSpPr>
@@ -12984,7 +13616,7 @@
                 <a:ea typeface="Trebuchet MS" pitchFamily="34" charset="-122"/>
                 <a:cs typeface="Trebuchet MS" pitchFamily="34" charset="-120"/>
               </a:rPr>
-              <a:t>uneaten</a:t>
+              <a:t>eater</a:t>
             </a:r>
             <a:endParaRPr lang="en-US" sz="2800" dirty="0"/>
           </a:p>
@@ -13064,7 +13696,7 @@
         </p:nvSpPr>
         <p:spPr>
           <a:xfrm>
-            <a:off x="2221992" y="2258568"/>
+            <a:off x="2938272" y="2258568"/>
             <a:ext cx="1828800" cy="292608"/>
           </a:xfrm>
           <a:prstGeom prst="rect">
@@ -13073,11 +13705,11 @@
             </a:avLst>
           </a:prstGeom>
           <a:solidFill>
-            <a:srgbClr val="DDD6FE"/>
+            <a:srgbClr val="CCFBF1"/>
           </a:solidFill>
           <a:ln w="19050">
             <a:solidFill>
-              <a:srgbClr val="7C3AED"/>
+              <a:srgbClr val="0D9488"/>
             </a:solidFill>
             <a:prstDash val="solid"/>
           </a:ln>
@@ -13098,7 +13730,7 @@
         </p:nvSpPr>
         <p:spPr>
           <a:xfrm>
-            <a:off x="2221992" y="2258568"/>
+            <a:off x="2938272" y="2258568"/>
             <a:ext cx="1828800" cy="292608"/>
           </a:xfrm>
           <a:prstGeom prst="rect">
@@ -13117,13 +13749,13 @@
             <a:r>
               <a:rPr lang="en-US" sz="1300" b="1" dirty="0">
                 <a:solidFill>
-                  <a:srgbClr val="4C1D95"/>
+                  <a:srgbClr val="0F766E"/>
                 </a:solidFill>
                 <a:latin typeface="Trebuchet MS" pitchFamily="34" charset="0"/>
                 <a:ea typeface="Trebuchet MS" pitchFamily="34" charset="-122"/>
                 <a:cs typeface="Trebuchet MS" pitchFamily="34" charset="-120"/>
               </a:rPr>
-              <a:t>un</a:t>
+              <a:t>eat</a:t>
             </a:r>
             <a:endParaRPr lang="en-US" sz="1300" dirty="0"/>
           </a:p>
@@ -13137,7 +13769,7 @@
         </p:nvSpPr>
         <p:spPr>
           <a:xfrm>
-            <a:off x="2221992" y="2569464"/>
+            <a:off x="2938272" y="2569464"/>
             <a:ext cx="1828800" cy="201168"/>
           </a:xfrm>
           <a:prstGeom prst="rect">
@@ -13162,7 +13794,7 @@
                 <a:ea typeface="Calibri" pitchFamily="34" charset="-122"/>
                 <a:cs typeface="Calibri" pitchFamily="34" charset="-120"/>
               </a:rPr>
-              <a:t>not</a:t>
+              <a:t>to consume food</a:t>
             </a:r>
             <a:endParaRPr lang="en-US" sz="850" dirty="0"/>
           </a:p>
@@ -13176,7 +13808,7 @@
         </p:nvSpPr>
         <p:spPr>
           <a:xfrm>
-            <a:off x="4370832" y="2258568"/>
+            <a:off x="5803392" y="2258568"/>
             <a:ext cx="1828800" cy="292608"/>
           </a:xfrm>
           <a:prstGeom prst="rect">
@@ -13185,11 +13817,11 @@
             </a:avLst>
           </a:prstGeom>
           <a:solidFill>
-            <a:srgbClr val="CCFBF1"/>
+            <a:srgbClr val="FCE7F3"/>
           </a:solidFill>
           <a:ln w="19050">
             <a:solidFill>
-              <a:srgbClr val="0D9488"/>
+              <a:srgbClr val="DB2777"/>
             </a:solidFill>
             <a:prstDash val="solid"/>
           </a:ln>
@@ -13210,7 +13842,7 @@
         </p:nvSpPr>
         <p:spPr>
           <a:xfrm>
-            <a:off x="4370832" y="2258568"/>
+            <a:off x="5803392" y="2258568"/>
             <a:ext cx="1828800" cy="292608"/>
           </a:xfrm>
           <a:prstGeom prst="rect">
@@ -13229,13 +13861,13 @@
             <a:r>
               <a:rPr lang="en-US" sz="1300" b="1" dirty="0">
                 <a:solidFill>
-                  <a:srgbClr val="0F766E"/>
+                  <a:srgbClr val="9D174D"/>
                 </a:solidFill>
                 <a:latin typeface="Trebuchet MS" pitchFamily="34" charset="0"/>
                 <a:ea typeface="Trebuchet MS" pitchFamily="34" charset="-122"/>
                 <a:cs typeface="Trebuchet MS" pitchFamily="34" charset="-120"/>
               </a:rPr>
-              <a:t>eat</a:t>
+              <a:t>er</a:t>
             </a:r>
             <a:endParaRPr lang="en-US" sz="1300" dirty="0"/>
           </a:p>
@@ -13249,7 +13881,7 @@
         </p:nvSpPr>
         <p:spPr>
           <a:xfrm>
-            <a:off x="4370832" y="2569464"/>
+            <a:off x="5803392" y="2569464"/>
             <a:ext cx="1828800" cy="201168"/>
           </a:xfrm>
           <a:prstGeom prst="rect">
@@ -13274,7 +13906,7 @@
                 <a:ea typeface="Calibri" pitchFamily="34" charset="-122"/>
                 <a:cs typeface="Calibri" pitchFamily="34" charset="-120"/>
               </a:rPr>
-              <a:t>to consume food</a:t>
+              <a:t>a person or thing that does something</a:t>
             </a:r>
             <a:endParaRPr lang="en-US" sz="850" dirty="0"/>
           </a:p>
@@ -13288,30 +13920,23 @@
         </p:nvSpPr>
         <p:spPr>
           <a:xfrm>
-            <a:off x="6519672" y="2258568"/>
-            <a:ext cx="1828800" cy="292608"/>
+            <a:off x="365760" y="3273552"/>
+            <a:ext cx="1371600" cy="658368"/>
           </a:xfrm>
           <a:prstGeom prst="rect">
             <a:avLst>
-              <a:gd name="adj" fmla="val 25000"/>
+              <a:gd name="adj" fmla="val 8333"/>
             </a:avLst>
           </a:prstGeom>
           <a:solidFill>
-            <a:srgbClr val="FCE7F3"/>
-          </a:solidFill>
-          <a:ln w="19050">
-            <a:solidFill>
-              <a:srgbClr val="DB2777"/>
-            </a:solidFill>
-            <a:prstDash val="solid"/>
-          </a:ln>
-          <a:effectLst>
-            <a:outerShdw sx="100000" sy="100000" kx="0" ky="0" algn="bl" rotWithShape="0" blurRad="101600" dist="38100" dir="8100000">
-              <a:srgbClr val="000000">
-                <a:alpha val="12000"/>
-              </a:srgbClr>
-            </a:outerShdw>
-          </a:effectLst>
+            <a:srgbClr val="E2E8F0"/>
+          </a:solidFill>
+          <a:ln w="12700">
+            <a:solidFill>
+              <a:srgbClr val="E2E8F0"/>
+            </a:solidFill>
+            <a:prstDash val="solid"/>
+          </a:ln>
         </p:spPr>
       </p:sp>
       <p:sp>
@@ -13322,86 +13947,47 @@
         </p:nvSpPr>
         <p:spPr>
           <a:xfrm>
-            <a:off x="6519672" y="2258568"/>
-            <a:ext cx="1828800" cy="292608"/>
-          </a:xfrm>
-          <a:prstGeom prst="rect">
-            <a:avLst/>
-          </a:prstGeom>
-          <a:noFill/>
-          <a:ln/>
-        </p:spPr>
-        <p:txBody>
-          <a:bodyPr wrap="square" lIns="0" tIns="0" rIns="0" bIns="0" rtlCol="0" anchor="ctr"/>
-          <a:lstStyle/>
-          <a:p>
-            <a:pPr algn="ctr" indent="0" marL="0">
-              <a:buNone/>
-            </a:pPr>
-            <a:r>
-              <a:rPr lang="en-US" sz="1300" b="1" dirty="0">
-                <a:solidFill>
-                  <a:srgbClr val="9D174D"/>
+            <a:off x="365760" y="3273552"/>
+            <a:ext cx="1371600" cy="658368"/>
+          </a:xfrm>
+          <a:prstGeom prst="rect">
+            <a:avLst/>
+          </a:prstGeom>
+          <a:noFill/>
+          <a:ln/>
+        </p:spPr>
+        <p:txBody>
+          <a:bodyPr wrap="square" lIns="0" tIns="0" rIns="0" bIns="0" rtlCol="0" anchor="ctr"/>
+          <a:lstStyle/>
+          <a:p>
+            <a:pPr algn="ctr" indent="0" marL="0">
+              <a:buNone/>
+            </a:pPr>
+            <a:r>
+              <a:rPr lang="en-US" sz="1100" b="1" dirty="0">
+                <a:solidFill>
+                  <a:srgbClr val="475569"/>
                 </a:solidFill>
                 <a:latin typeface="Trebuchet MS" pitchFamily="34" charset="0"/>
                 <a:ea typeface="Trebuchet MS" pitchFamily="34" charset="-122"/>
                 <a:cs typeface="Trebuchet MS" pitchFamily="34" charset="-120"/>
               </a:rPr>
-              <a:t>en</a:t>
-            </a:r>
-            <a:endParaRPr lang="en-US" sz="1300" dirty="0"/>
-          </a:p>
-        </p:txBody>
-      </p:sp>
-      <p:sp>
-        <p:nvSpPr>
-          <p:cNvPr id="24" name="Text 22"/>
-          <p:cNvSpPr/>
-          <p:nvPr/>
-        </p:nvSpPr>
-        <p:spPr>
-          <a:xfrm>
-            <a:off x="6519672" y="2569464"/>
-            <a:ext cx="1828800" cy="201168"/>
-          </a:xfrm>
-          <a:prstGeom prst="rect">
-            <a:avLst/>
-          </a:prstGeom>
-          <a:noFill/>
-          <a:ln/>
-        </p:spPr>
-        <p:txBody>
-          <a:bodyPr wrap="square" lIns="0" tIns="0" rIns="0" bIns="0" rtlCol="0" anchor="t"/>
-          <a:lstStyle/>
-          <a:p>
-            <a:pPr algn="ctr" indent="0" marL="0">
-              <a:buNone/>
-            </a:pPr>
-            <a:r>
-              <a:rPr lang="en-US" sz="850" dirty="0">
-                <a:solidFill>
-                  <a:srgbClr val="475569"/>
-                </a:solidFill>
-                <a:latin typeface="Calibri" pitchFamily="34" charset="0"/>
-                <a:ea typeface="Calibri" pitchFamily="34" charset="-122"/>
-                <a:cs typeface="Calibri" pitchFamily="34" charset="-120"/>
-              </a:rPr>
-              <a:t>done to, past participle</a:t>
-            </a:r>
-            <a:endParaRPr lang="en-US" sz="850" dirty="0"/>
-          </a:p>
-        </p:txBody>
-      </p:sp>
-      <p:sp>
-        <p:nvSpPr>
-          <p:cNvPr id="25" name="Shape 23"/>
-          <p:cNvSpPr/>
-          <p:nvPr/>
-        </p:nvSpPr>
-        <p:spPr>
-          <a:xfrm>
-            <a:off x="365760" y="3273552"/>
-            <a:ext cx="1371600" cy="658368"/>
+              <a:t>Syllables</a:t>
+            </a:r>
+            <a:endParaRPr lang="en-US" sz="1100" dirty="0"/>
+          </a:p>
+        </p:txBody>
+      </p:sp>
+      <p:sp>
+        <p:nvSpPr>
+          <p:cNvPr id="24" name="Shape 22"/>
+          <p:cNvSpPr/>
+          <p:nvPr/>
+        </p:nvSpPr>
+        <p:spPr>
+          <a:xfrm>
+            <a:off x="1874520" y="3273552"/>
+            <a:ext cx="6903720" cy="658368"/>
           </a:xfrm>
           <a:prstGeom prst="rect">
             <a:avLst>
@@ -13409,11 +13995,38 @@
             </a:avLst>
           </a:prstGeom>
           <a:solidFill>
-            <a:srgbClr val="E2E8F0"/>
-          </a:solidFill>
-          <a:ln w="12700">
-            <a:solidFill>
-              <a:srgbClr val="E2E8F0"/>
+            <a:srgbClr val="CCFBF1"/>
+          </a:solidFill>
+          <a:ln w="12700">
+            <a:solidFill>
+              <a:srgbClr val="0D9488"/>
+            </a:solidFill>
+            <a:prstDash val="solid"/>
+          </a:ln>
+        </p:spPr>
+      </p:sp>
+      <p:sp>
+        <p:nvSpPr>
+          <p:cNvPr id="25" name="Shape 23"/>
+          <p:cNvSpPr/>
+          <p:nvPr/>
+        </p:nvSpPr>
+        <p:spPr>
+          <a:xfrm>
+            <a:off x="2999232" y="3364992"/>
+            <a:ext cx="1645920" cy="475488"/>
+          </a:xfrm>
+          <a:prstGeom prst="rect">
+            <a:avLst>
+              <a:gd name="adj" fmla="val 9615"/>
+            </a:avLst>
+          </a:prstGeom>
+          <a:solidFill>
+            <a:srgbClr val="FFFFFF"/>
+          </a:solidFill>
+          <a:ln w="12700">
+            <a:solidFill>
+              <a:srgbClr val="0D9488"/>
             </a:solidFill>
             <a:prstDash val="solid"/>
           </a:ln>
@@ -13427,63 +14040,75 @@
         </p:nvSpPr>
         <p:spPr>
           <a:xfrm>
-            <a:off x="365760" y="3273552"/>
-            <a:ext cx="1371600" cy="658368"/>
-          </a:xfrm>
-          <a:prstGeom prst="rect">
-            <a:avLst/>
-          </a:prstGeom>
-          <a:noFill/>
-          <a:ln/>
-        </p:spPr>
-        <p:txBody>
-          <a:bodyPr wrap="square" lIns="0" tIns="0" rIns="0" bIns="0" rtlCol="0" anchor="ctr"/>
-          <a:lstStyle/>
-          <a:p>
-            <a:pPr algn="ctr" indent="0" marL="0">
-              <a:buNone/>
-            </a:pPr>
-            <a:r>
-              <a:rPr lang="en-US" sz="1100" b="1" dirty="0">
-                <a:solidFill>
-                  <a:srgbClr val="475569"/>
+            <a:off x="2999232" y="3364992"/>
+            <a:ext cx="1645920" cy="475488"/>
+          </a:xfrm>
+          <a:prstGeom prst="rect">
+            <a:avLst/>
+          </a:prstGeom>
+          <a:noFill/>
+          <a:ln/>
+        </p:spPr>
+        <p:txBody>
+          <a:bodyPr wrap="square" lIns="0" tIns="0" rIns="0" bIns="0" rtlCol="0" anchor="ctr"/>
+          <a:lstStyle/>
+          <a:p>
+            <a:pPr algn="ctr" indent="0" marL="0">
+              <a:buNone/>
+            </a:pPr>
+            <a:r>
+              <a:rPr lang="en-US" sz="1400" b="1" dirty="0">
+                <a:solidFill>
+                  <a:srgbClr val="0D9488"/>
                 </a:solidFill>
                 <a:latin typeface="Trebuchet MS" pitchFamily="34" charset="0"/>
                 <a:ea typeface="Trebuchet MS" pitchFamily="34" charset="-122"/>
                 <a:cs typeface="Trebuchet MS" pitchFamily="34" charset="-120"/>
               </a:rPr>
-              <a:t>Syllables</a:t>
-            </a:r>
-            <a:endParaRPr lang="en-US" sz="1100" dirty="0"/>
-          </a:p>
-        </p:txBody>
-      </p:sp>
-      <p:sp>
-        <p:nvSpPr>
-          <p:cNvPr id="27" name="Shape 25"/>
-          <p:cNvSpPr/>
-          <p:nvPr/>
-        </p:nvSpPr>
-        <p:spPr>
-          <a:xfrm>
-            <a:off x="1874520" y="3273552"/>
-            <a:ext cx="6903720" cy="658368"/>
-          </a:xfrm>
-          <a:prstGeom prst="rect">
-            <a:avLst>
-              <a:gd name="adj" fmla="val 8333"/>
-            </a:avLst>
-          </a:prstGeom>
-          <a:solidFill>
-            <a:srgbClr val="CCFBF1"/>
-          </a:solidFill>
-          <a:ln w="12700">
-            <a:solidFill>
-              <a:srgbClr val="0D9488"/>
-            </a:solidFill>
-            <a:prstDash val="solid"/>
-          </a:ln>
-        </p:spPr>
+              <a:t>eat</a:t>
+            </a:r>
+            <a:endParaRPr lang="en-US" sz="1400" dirty="0"/>
+          </a:p>
+        </p:txBody>
+      </p:sp>
+      <p:sp>
+        <p:nvSpPr>
+          <p:cNvPr id="27" name="Text 25"/>
+          <p:cNvSpPr/>
+          <p:nvPr/>
+        </p:nvSpPr>
+        <p:spPr>
+          <a:xfrm>
+            <a:off x="4645152" y="3364992"/>
+            <a:ext cx="1097280" cy="475488"/>
+          </a:xfrm>
+          <a:prstGeom prst="rect">
+            <a:avLst/>
+          </a:prstGeom>
+          <a:noFill/>
+          <a:ln/>
+        </p:spPr>
+        <p:txBody>
+          <a:bodyPr wrap="square" lIns="0" tIns="0" rIns="0" bIns="0" rtlCol="0" anchor="ctr"/>
+          <a:lstStyle/>
+          <a:p>
+            <a:pPr algn="ctr" indent="0" marL="0">
+              <a:buNone/>
+            </a:pPr>
+            <a:r>
+              <a:rPr lang="en-US" sz="1600" b="1" dirty="0">
+                <a:solidFill>
+                  <a:srgbClr val="0D9488"/>
+                </a:solidFill>
+                <a:latin typeface="Trebuchet MS" pitchFamily="34" charset="0"/>
+                <a:ea typeface="Trebuchet MS" pitchFamily="34" charset="-122"/>
+                <a:cs typeface="Trebuchet MS" pitchFamily="34" charset="-120"/>
+              </a:rPr>
+              <a:t>·</a:t>
+            </a:r>
+            <a:endParaRPr lang="en-US" sz="1600" dirty="0"/>
+          </a:p>
+        </p:txBody>
       </p:sp>
       <p:sp>
         <p:nvSpPr>
@@ -13493,7 +14118,7 @@
         </p:nvSpPr>
         <p:spPr>
           <a:xfrm>
-            <a:off x="2313432" y="3364992"/>
+            <a:off x="5742432" y="3364992"/>
             <a:ext cx="1645920" cy="475488"/>
           </a:xfrm>
           <a:prstGeom prst="rect">
@@ -13520,7 +14145,7 @@
         </p:nvSpPr>
         <p:spPr>
           <a:xfrm>
-            <a:off x="2313432" y="3364992"/>
+            <a:off x="5742432" y="3364992"/>
             <a:ext cx="1645920" cy="475488"/>
           </a:xfrm>
           <a:prstGeom prst="rect">
@@ -13545,7 +14170,7 @@
                 <a:ea typeface="Trebuchet MS" pitchFamily="34" charset="-122"/>
                 <a:cs typeface="Trebuchet MS" pitchFamily="34" charset="-120"/>
               </a:rPr>
-              <a:t>un</a:t>
+              <a:t>er</a:t>
             </a:r>
             <a:endParaRPr lang="en-US" sz="1400" dirty="0"/>
           </a:p>
@@ -13553,224 +14178,80 @@
       </p:sp>
       <p:sp>
         <p:nvSpPr>
-          <p:cNvPr id="30" name="Text 28"/>
-          <p:cNvSpPr/>
-          <p:nvPr/>
-        </p:nvSpPr>
-        <p:spPr>
-          <a:xfrm>
-            <a:off x="3959352" y="3364992"/>
-            <a:ext cx="411480" cy="475488"/>
-          </a:xfrm>
-          <a:prstGeom prst="rect">
-            <a:avLst/>
-          </a:prstGeom>
-          <a:noFill/>
-          <a:ln/>
-        </p:spPr>
-        <p:txBody>
-          <a:bodyPr wrap="square" lIns="0" tIns="0" rIns="0" bIns="0" rtlCol="0" anchor="ctr"/>
-          <a:lstStyle/>
-          <a:p>
-            <a:pPr algn="ctr" indent="0" marL="0">
-              <a:buNone/>
-            </a:pPr>
-            <a:r>
-              <a:rPr lang="en-US" sz="1600" b="1" dirty="0">
-                <a:solidFill>
-                  <a:srgbClr val="0D9488"/>
+          <p:cNvPr id="30" name="Shape 28"/>
+          <p:cNvSpPr/>
+          <p:nvPr/>
+        </p:nvSpPr>
+        <p:spPr>
+          <a:xfrm>
+            <a:off x="365760" y="4096512"/>
+            <a:ext cx="1371600" cy="804672"/>
+          </a:xfrm>
+          <a:prstGeom prst="rect">
+            <a:avLst>
+              <a:gd name="adj" fmla="val 6818"/>
+            </a:avLst>
+          </a:prstGeom>
+          <a:solidFill>
+            <a:srgbClr val="E2E8F0"/>
+          </a:solidFill>
+          <a:ln w="12700">
+            <a:solidFill>
+              <a:srgbClr val="E2E8F0"/>
+            </a:solidFill>
+            <a:prstDash val="solid"/>
+          </a:ln>
+        </p:spPr>
+      </p:sp>
+      <p:sp>
+        <p:nvSpPr>
+          <p:cNvPr id="31" name="Text 29"/>
+          <p:cNvSpPr/>
+          <p:nvPr/>
+        </p:nvSpPr>
+        <p:spPr>
+          <a:xfrm>
+            <a:off x="365760" y="4096512"/>
+            <a:ext cx="1371600" cy="804672"/>
+          </a:xfrm>
+          <a:prstGeom prst="rect">
+            <a:avLst/>
+          </a:prstGeom>
+          <a:noFill/>
+          <a:ln/>
+        </p:spPr>
+        <p:txBody>
+          <a:bodyPr wrap="square" lIns="0" tIns="0" rIns="0" bIns="0" rtlCol="0" anchor="ctr"/>
+          <a:lstStyle/>
+          <a:p>
+            <a:pPr algn="ctr" indent="0" marL="0">
+              <a:buNone/>
+            </a:pPr>
+            <a:r>
+              <a:rPr lang="en-US" sz="1100" b="1" dirty="0">
+                <a:solidFill>
+                  <a:srgbClr val="475569"/>
                 </a:solidFill>
                 <a:latin typeface="Trebuchet MS" pitchFamily="34" charset="0"/>
                 <a:ea typeface="Trebuchet MS" pitchFamily="34" charset="-122"/>
                 <a:cs typeface="Trebuchet MS" pitchFamily="34" charset="-120"/>
               </a:rPr>
-              <a:t>·</a:t>
-            </a:r>
-            <a:endParaRPr lang="en-US" sz="1600" dirty="0"/>
-          </a:p>
-        </p:txBody>
-      </p:sp>
-      <p:sp>
-        <p:nvSpPr>
-          <p:cNvPr id="31" name="Shape 29"/>
-          <p:cNvSpPr/>
-          <p:nvPr/>
-        </p:nvSpPr>
-        <p:spPr>
-          <a:xfrm>
-            <a:off x="4370832" y="3364992"/>
-            <a:ext cx="1645920" cy="475488"/>
-          </a:xfrm>
-          <a:prstGeom prst="rect">
-            <a:avLst>
-              <a:gd name="adj" fmla="val 9615"/>
-            </a:avLst>
-          </a:prstGeom>
-          <a:solidFill>
-            <a:srgbClr val="FFFFFF"/>
-          </a:solidFill>
-          <a:ln w="12700">
-            <a:solidFill>
-              <a:srgbClr val="0D9488"/>
-            </a:solidFill>
-            <a:prstDash val="solid"/>
-          </a:ln>
-        </p:spPr>
-      </p:sp>
-      <p:sp>
-        <p:nvSpPr>
-          <p:cNvPr id="32" name="Text 30"/>
-          <p:cNvSpPr/>
-          <p:nvPr/>
-        </p:nvSpPr>
-        <p:spPr>
-          <a:xfrm>
-            <a:off x="4370832" y="3364992"/>
-            <a:ext cx="1645920" cy="475488"/>
-          </a:xfrm>
-          <a:prstGeom prst="rect">
-            <a:avLst/>
-          </a:prstGeom>
-          <a:noFill/>
-          <a:ln/>
-        </p:spPr>
-        <p:txBody>
-          <a:bodyPr wrap="square" lIns="0" tIns="0" rIns="0" bIns="0" rtlCol="0" anchor="ctr"/>
-          <a:lstStyle/>
-          <a:p>
-            <a:pPr algn="ctr" indent="0" marL="0">
-              <a:buNone/>
-            </a:pPr>
-            <a:r>
-              <a:rPr lang="en-US" sz="1400" b="1" dirty="0">
-                <a:solidFill>
-                  <a:srgbClr val="0D9488"/>
-                </a:solidFill>
-                <a:latin typeface="Trebuchet MS" pitchFamily="34" charset="0"/>
-                <a:ea typeface="Trebuchet MS" pitchFamily="34" charset="-122"/>
-                <a:cs typeface="Trebuchet MS" pitchFamily="34" charset="-120"/>
-              </a:rPr>
-              <a:t>eat</a:t>
-            </a:r>
-            <a:endParaRPr lang="en-US" sz="1400" dirty="0"/>
-          </a:p>
-        </p:txBody>
-      </p:sp>
-      <p:sp>
-        <p:nvSpPr>
-          <p:cNvPr id="33" name="Text 31"/>
-          <p:cNvSpPr/>
-          <p:nvPr/>
-        </p:nvSpPr>
-        <p:spPr>
-          <a:xfrm>
-            <a:off x="6016752" y="3364992"/>
-            <a:ext cx="411480" cy="475488"/>
-          </a:xfrm>
-          <a:prstGeom prst="rect">
-            <a:avLst/>
-          </a:prstGeom>
-          <a:noFill/>
-          <a:ln/>
-        </p:spPr>
-        <p:txBody>
-          <a:bodyPr wrap="square" lIns="0" tIns="0" rIns="0" bIns="0" rtlCol="0" anchor="ctr"/>
-          <a:lstStyle/>
-          <a:p>
-            <a:pPr algn="ctr" indent="0" marL="0">
-              <a:buNone/>
-            </a:pPr>
-            <a:r>
-              <a:rPr lang="en-US" sz="1600" b="1" dirty="0">
-                <a:solidFill>
-                  <a:srgbClr val="0D9488"/>
-                </a:solidFill>
-                <a:latin typeface="Trebuchet MS" pitchFamily="34" charset="0"/>
-                <a:ea typeface="Trebuchet MS" pitchFamily="34" charset="-122"/>
-                <a:cs typeface="Trebuchet MS" pitchFamily="34" charset="-120"/>
-              </a:rPr>
-              <a:t>·</a:t>
-            </a:r>
-            <a:endParaRPr lang="en-US" sz="1600" dirty="0"/>
-          </a:p>
-        </p:txBody>
-      </p:sp>
-      <p:sp>
-        <p:nvSpPr>
-          <p:cNvPr id="34" name="Shape 32"/>
-          <p:cNvSpPr/>
-          <p:nvPr/>
-        </p:nvSpPr>
-        <p:spPr>
-          <a:xfrm>
-            <a:off x="6428232" y="3364992"/>
-            <a:ext cx="1645920" cy="475488"/>
-          </a:xfrm>
-          <a:prstGeom prst="rect">
-            <a:avLst>
-              <a:gd name="adj" fmla="val 9615"/>
-            </a:avLst>
-          </a:prstGeom>
-          <a:solidFill>
-            <a:srgbClr val="FFFFFF"/>
-          </a:solidFill>
-          <a:ln w="12700">
-            <a:solidFill>
-              <a:srgbClr val="0D9488"/>
-            </a:solidFill>
-            <a:prstDash val="solid"/>
-          </a:ln>
-        </p:spPr>
-      </p:sp>
-      <p:sp>
-        <p:nvSpPr>
-          <p:cNvPr id="35" name="Text 33"/>
-          <p:cNvSpPr/>
-          <p:nvPr/>
-        </p:nvSpPr>
-        <p:spPr>
-          <a:xfrm>
-            <a:off x="6428232" y="3364992"/>
-            <a:ext cx="1645920" cy="475488"/>
-          </a:xfrm>
-          <a:prstGeom prst="rect">
-            <a:avLst/>
-          </a:prstGeom>
-          <a:noFill/>
-          <a:ln/>
-        </p:spPr>
-        <p:txBody>
-          <a:bodyPr wrap="square" lIns="0" tIns="0" rIns="0" bIns="0" rtlCol="0" anchor="ctr"/>
-          <a:lstStyle/>
-          <a:p>
-            <a:pPr algn="ctr" indent="0" marL="0">
-              <a:buNone/>
-            </a:pPr>
-            <a:r>
-              <a:rPr lang="en-US" sz="1400" b="1" dirty="0">
-                <a:solidFill>
-                  <a:srgbClr val="0D9488"/>
-                </a:solidFill>
-                <a:latin typeface="Trebuchet MS" pitchFamily="34" charset="0"/>
-                <a:ea typeface="Trebuchet MS" pitchFamily="34" charset="-122"/>
-                <a:cs typeface="Trebuchet MS" pitchFamily="34" charset="-120"/>
-              </a:rPr>
-              <a:t>en</a:t>
-            </a:r>
-            <a:endParaRPr lang="en-US" sz="1400" dirty="0"/>
-          </a:p>
-        </p:txBody>
-      </p:sp>
-      <p:sp>
-        <p:nvSpPr>
-          <p:cNvPr id="36" name="Shape 34"/>
-          <p:cNvSpPr/>
-          <p:nvPr/>
-        </p:nvSpPr>
-        <p:spPr>
-          <a:xfrm>
-            <a:off x="365760" y="4096512"/>
-            <a:ext cx="1371600" cy="804672"/>
+              <a:t>Phonemes</a:t>
+            </a:r>
+            <a:endParaRPr lang="en-US" sz="1100" dirty="0"/>
+          </a:p>
+        </p:txBody>
+      </p:sp>
+      <p:sp>
+        <p:nvSpPr>
+          <p:cNvPr id="32" name="Shape 30"/>
+          <p:cNvSpPr/>
+          <p:nvPr/>
+        </p:nvSpPr>
+        <p:spPr>
+          <a:xfrm>
+            <a:off x="1874520" y="4096512"/>
+            <a:ext cx="6903720" cy="804672"/>
           </a:xfrm>
           <a:prstGeom prst="rect">
             <a:avLst>
@@ -13778,85 +14259,19 @@
             </a:avLst>
           </a:prstGeom>
           <a:solidFill>
-            <a:srgbClr val="E2E8F0"/>
+            <a:srgbClr val="F8FAFC"/>
           </a:solidFill>
           <a:ln w="12700">
             <a:solidFill>
               <a:srgbClr val="E2E8F0"/>
             </a:solidFill>
-            <a:prstDash val="solid"/>
-          </a:ln>
-        </p:spPr>
-      </p:sp>
-      <p:sp>
-        <p:nvSpPr>
-          <p:cNvPr id="37" name="Text 35"/>
-          <p:cNvSpPr/>
-          <p:nvPr/>
-        </p:nvSpPr>
-        <p:spPr>
-          <a:xfrm>
-            <a:off x="365760" y="4096512"/>
-            <a:ext cx="1371600" cy="804672"/>
-          </a:xfrm>
-          <a:prstGeom prst="rect">
-            <a:avLst/>
-          </a:prstGeom>
-          <a:noFill/>
-          <a:ln/>
-        </p:spPr>
-        <p:txBody>
-          <a:bodyPr wrap="square" lIns="0" tIns="0" rIns="0" bIns="0" rtlCol="0" anchor="ctr"/>
-          <a:lstStyle/>
-          <a:p>
-            <a:pPr algn="ctr" indent="0" marL="0">
-              <a:buNone/>
-            </a:pPr>
-            <a:r>
-              <a:rPr lang="en-US" sz="1100" b="1" dirty="0">
-                <a:solidFill>
-                  <a:srgbClr val="475569"/>
-                </a:solidFill>
-                <a:latin typeface="Trebuchet MS" pitchFamily="34" charset="0"/>
-                <a:ea typeface="Trebuchet MS" pitchFamily="34" charset="-122"/>
-                <a:cs typeface="Trebuchet MS" pitchFamily="34" charset="-120"/>
-              </a:rPr>
-              <a:t>Phonemes</a:t>
-            </a:r>
-            <a:endParaRPr lang="en-US" sz="1100" dirty="0"/>
-          </a:p>
-        </p:txBody>
-      </p:sp>
-      <p:sp>
-        <p:nvSpPr>
-          <p:cNvPr id="38" name="Shape 36"/>
-          <p:cNvSpPr/>
-          <p:nvPr/>
-        </p:nvSpPr>
-        <p:spPr>
-          <a:xfrm>
-            <a:off x="1874520" y="4096512"/>
-            <a:ext cx="6903720" cy="804672"/>
-          </a:xfrm>
-          <a:prstGeom prst="rect">
-            <a:avLst>
-              <a:gd name="adj" fmla="val 6818"/>
-            </a:avLst>
-          </a:prstGeom>
-          <a:solidFill>
-            <a:srgbClr val="F8FAFC"/>
-          </a:solidFill>
-          <a:ln w="12700">
-            <a:solidFill>
-              <a:srgbClr val="E2E8F0"/>
-            </a:solidFill>
             <a:prstDash val="dash"/>
           </a:ln>
         </p:spPr>
       </p:sp>
       <p:sp>
         <p:nvSpPr>
-          <p:cNvPr id="39" name="Text 37"/>
+          <p:cNvPr id="33" name="Text 31"/>
           <p:cNvSpPr/>
           <p:nvPr/>
         </p:nvSpPr>
@@ -14583,7 +14998,7 @@
                 <a:ea typeface="Trebuchet MS" pitchFamily="34" charset="-122"/>
                 <a:cs typeface="Trebuchet MS" pitchFamily="34" charset="-120"/>
               </a:rPr>
-              <a:t>uneaten</a:t>
+              <a:t>eater</a:t>
             </a:r>
             <a:endParaRPr lang="en-US" sz="2800" dirty="0"/>
           </a:p>
@@ -14663,7 +15078,7 @@
         </p:nvSpPr>
         <p:spPr>
           <a:xfrm>
-            <a:off x="2221992" y="2258568"/>
+            <a:off x="2938272" y="2258568"/>
             <a:ext cx="1828800" cy="292608"/>
           </a:xfrm>
           <a:prstGeom prst="rect">
@@ -14672,11 +15087,11 @@
             </a:avLst>
           </a:prstGeom>
           <a:solidFill>
-            <a:srgbClr val="DDD6FE"/>
+            <a:srgbClr val="CCFBF1"/>
           </a:solidFill>
           <a:ln w="19050">
             <a:solidFill>
-              <a:srgbClr val="7C3AED"/>
+              <a:srgbClr val="0D9488"/>
             </a:solidFill>
             <a:prstDash val="solid"/>
           </a:ln>
@@ -14697,7 +15112,7 @@
         </p:nvSpPr>
         <p:spPr>
           <a:xfrm>
-            <a:off x="2221992" y="2258568"/>
+            <a:off x="2938272" y="2258568"/>
             <a:ext cx="1828800" cy="292608"/>
           </a:xfrm>
           <a:prstGeom prst="rect">
@@ -14716,13 +15131,13 @@
             <a:r>
               <a:rPr lang="en-US" sz="1300" b="1" dirty="0">
                 <a:solidFill>
-                  <a:srgbClr val="4C1D95"/>
+                  <a:srgbClr val="0F766E"/>
                 </a:solidFill>
                 <a:latin typeface="Trebuchet MS" pitchFamily="34" charset="0"/>
                 <a:ea typeface="Trebuchet MS" pitchFamily="34" charset="-122"/>
                 <a:cs typeface="Trebuchet MS" pitchFamily="34" charset="-120"/>
               </a:rPr>
-              <a:t>un</a:t>
+              <a:t>eat</a:t>
             </a:r>
             <a:endParaRPr lang="en-US" sz="1300" dirty="0"/>
           </a:p>
@@ -14736,7 +15151,7 @@
         </p:nvSpPr>
         <p:spPr>
           <a:xfrm>
-            <a:off x="2221992" y="2569464"/>
+            <a:off x="2938272" y="2569464"/>
             <a:ext cx="1828800" cy="201168"/>
           </a:xfrm>
           <a:prstGeom prst="rect">
@@ -14761,7 +15176,7 @@
                 <a:ea typeface="Calibri" pitchFamily="34" charset="-122"/>
                 <a:cs typeface="Calibri" pitchFamily="34" charset="-120"/>
               </a:rPr>
-              <a:t>not</a:t>
+              <a:t>to consume food</a:t>
             </a:r>
             <a:endParaRPr lang="en-US" sz="850" dirty="0"/>
           </a:p>
@@ -14775,7 +15190,7 @@
         </p:nvSpPr>
         <p:spPr>
           <a:xfrm>
-            <a:off x="4370832" y="2258568"/>
+            <a:off x="5803392" y="2258568"/>
             <a:ext cx="1828800" cy="292608"/>
           </a:xfrm>
           <a:prstGeom prst="rect">
@@ -14784,11 +15199,11 @@
             </a:avLst>
           </a:prstGeom>
           <a:solidFill>
-            <a:srgbClr val="CCFBF1"/>
+            <a:srgbClr val="FCE7F3"/>
           </a:solidFill>
           <a:ln w="19050">
             <a:solidFill>
-              <a:srgbClr val="0D9488"/>
+              <a:srgbClr val="DB2777"/>
             </a:solidFill>
             <a:prstDash val="solid"/>
           </a:ln>
@@ -14809,7 +15224,7 @@
         </p:nvSpPr>
         <p:spPr>
           <a:xfrm>
-            <a:off x="4370832" y="2258568"/>
+            <a:off x="5803392" y="2258568"/>
             <a:ext cx="1828800" cy="292608"/>
           </a:xfrm>
           <a:prstGeom prst="rect">
@@ -14828,13 +15243,13 @@
             <a:r>
               <a:rPr lang="en-US" sz="1300" b="1" dirty="0">
                 <a:solidFill>
-                  <a:srgbClr val="0F766E"/>
+                  <a:srgbClr val="9D174D"/>
                 </a:solidFill>
                 <a:latin typeface="Trebuchet MS" pitchFamily="34" charset="0"/>
                 <a:ea typeface="Trebuchet MS" pitchFamily="34" charset="-122"/>
                 <a:cs typeface="Trebuchet MS" pitchFamily="34" charset="-120"/>
               </a:rPr>
-              <a:t>eat</a:t>
+              <a:t>er</a:t>
             </a:r>
             <a:endParaRPr lang="en-US" sz="1300" dirty="0"/>
           </a:p>
@@ -14848,7 +15263,7 @@
         </p:nvSpPr>
         <p:spPr>
           <a:xfrm>
-            <a:off x="4370832" y="2569464"/>
+            <a:off x="5803392" y="2569464"/>
             <a:ext cx="1828800" cy="201168"/>
           </a:xfrm>
           <a:prstGeom prst="rect">
@@ -14873,7 +15288,7 @@
                 <a:ea typeface="Calibri" pitchFamily="34" charset="-122"/>
                 <a:cs typeface="Calibri" pitchFamily="34" charset="-120"/>
               </a:rPr>
-              <a:t>to consume food</a:t>
+              <a:t>a person or thing that does something</a:t>
             </a:r>
             <a:endParaRPr lang="en-US" sz="850" dirty="0"/>
           </a:p>
@@ -14887,30 +15302,23 @@
         </p:nvSpPr>
         <p:spPr>
           <a:xfrm>
-            <a:off x="6519672" y="2258568"/>
-            <a:ext cx="1828800" cy="292608"/>
+            <a:off x="365760" y="3273552"/>
+            <a:ext cx="1371600" cy="658368"/>
           </a:xfrm>
           <a:prstGeom prst="rect">
             <a:avLst>
-              <a:gd name="adj" fmla="val 25000"/>
+              <a:gd name="adj" fmla="val 8333"/>
             </a:avLst>
           </a:prstGeom>
           <a:solidFill>
-            <a:srgbClr val="FCE7F3"/>
-          </a:solidFill>
-          <a:ln w="19050">
-            <a:solidFill>
-              <a:srgbClr val="DB2777"/>
-            </a:solidFill>
-            <a:prstDash val="solid"/>
-          </a:ln>
-          <a:effectLst>
-            <a:outerShdw sx="100000" sy="100000" kx="0" ky="0" algn="bl" rotWithShape="0" blurRad="101600" dist="38100" dir="8100000">
-              <a:srgbClr val="000000">
-                <a:alpha val="12000"/>
-              </a:srgbClr>
-            </a:outerShdw>
-          </a:effectLst>
+            <a:srgbClr val="E2E8F0"/>
+          </a:solidFill>
+          <a:ln w="12700">
+            <a:solidFill>
+              <a:srgbClr val="E2E8F0"/>
+            </a:solidFill>
+            <a:prstDash val="solid"/>
+          </a:ln>
         </p:spPr>
       </p:sp>
       <p:sp>
@@ -14921,86 +15329,47 @@
         </p:nvSpPr>
         <p:spPr>
           <a:xfrm>
-            <a:off x="6519672" y="2258568"/>
-            <a:ext cx="1828800" cy="292608"/>
-          </a:xfrm>
-          <a:prstGeom prst="rect">
-            <a:avLst/>
-          </a:prstGeom>
-          <a:noFill/>
-          <a:ln/>
-        </p:spPr>
-        <p:txBody>
-          <a:bodyPr wrap="square" lIns="0" tIns="0" rIns="0" bIns="0" rtlCol="0" anchor="ctr"/>
-          <a:lstStyle/>
-          <a:p>
-            <a:pPr algn="ctr" indent="0" marL="0">
-              <a:buNone/>
-            </a:pPr>
-            <a:r>
-              <a:rPr lang="en-US" sz="1300" b="1" dirty="0">
-                <a:solidFill>
-                  <a:srgbClr val="9D174D"/>
+            <a:off x="365760" y="3273552"/>
+            <a:ext cx="1371600" cy="658368"/>
+          </a:xfrm>
+          <a:prstGeom prst="rect">
+            <a:avLst/>
+          </a:prstGeom>
+          <a:noFill/>
+          <a:ln/>
+        </p:spPr>
+        <p:txBody>
+          <a:bodyPr wrap="square" lIns="0" tIns="0" rIns="0" bIns="0" rtlCol="0" anchor="ctr"/>
+          <a:lstStyle/>
+          <a:p>
+            <a:pPr algn="ctr" indent="0" marL="0">
+              <a:buNone/>
+            </a:pPr>
+            <a:r>
+              <a:rPr lang="en-US" sz="1100" b="1" dirty="0">
+                <a:solidFill>
+                  <a:srgbClr val="475569"/>
                 </a:solidFill>
                 <a:latin typeface="Trebuchet MS" pitchFamily="34" charset="0"/>
                 <a:ea typeface="Trebuchet MS" pitchFamily="34" charset="-122"/>
                 <a:cs typeface="Trebuchet MS" pitchFamily="34" charset="-120"/>
               </a:rPr>
-              <a:t>en</a:t>
-            </a:r>
-            <a:endParaRPr lang="en-US" sz="1300" dirty="0"/>
-          </a:p>
-        </p:txBody>
-      </p:sp>
-      <p:sp>
-        <p:nvSpPr>
-          <p:cNvPr id="24" name="Text 22"/>
-          <p:cNvSpPr/>
-          <p:nvPr/>
-        </p:nvSpPr>
-        <p:spPr>
-          <a:xfrm>
-            <a:off x="6519672" y="2569464"/>
-            <a:ext cx="1828800" cy="201168"/>
-          </a:xfrm>
-          <a:prstGeom prst="rect">
-            <a:avLst/>
-          </a:prstGeom>
-          <a:noFill/>
-          <a:ln/>
-        </p:spPr>
-        <p:txBody>
-          <a:bodyPr wrap="square" lIns="0" tIns="0" rIns="0" bIns="0" rtlCol="0" anchor="t"/>
-          <a:lstStyle/>
-          <a:p>
-            <a:pPr algn="ctr" indent="0" marL="0">
-              <a:buNone/>
-            </a:pPr>
-            <a:r>
-              <a:rPr lang="en-US" sz="850" dirty="0">
-                <a:solidFill>
-                  <a:srgbClr val="475569"/>
-                </a:solidFill>
-                <a:latin typeface="Calibri" pitchFamily="34" charset="0"/>
-                <a:ea typeface="Calibri" pitchFamily="34" charset="-122"/>
-                <a:cs typeface="Calibri" pitchFamily="34" charset="-120"/>
-              </a:rPr>
-              <a:t>done to, past participle</a:t>
-            </a:r>
-            <a:endParaRPr lang="en-US" sz="850" dirty="0"/>
-          </a:p>
-        </p:txBody>
-      </p:sp>
-      <p:sp>
-        <p:nvSpPr>
-          <p:cNvPr id="25" name="Shape 23"/>
-          <p:cNvSpPr/>
-          <p:nvPr/>
-        </p:nvSpPr>
-        <p:spPr>
-          <a:xfrm>
-            <a:off x="365760" y="3273552"/>
-            <a:ext cx="1371600" cy="658368"/>
+              <a:t>Syllables</a:t>
+            </a:r>
+            <a:endParaRPr lang="en-US" sz="1100" dirty="0"/>
+          </a:p>
+        </p:txBody>
+      </p:sp>
+      <p:sp>
+        <p:nvSpPr>
+          <p:cNvPr id="24" name="Shape 22"/>
+          <p:cNvSpPr/>
+          <p:nvPr/>
+        </p:nvSpPr>
+        <p:spPr>
+          <a:xfrm>
+            <a:off x="1874520" y="3273552"/>
+            <a:ext cx="6903720" cy="658368"/>
           </a:xfrm>
           <a:prstGeom prst="rect">
             <a:avLst>
@@ -15008,11 +15377,38 @@
             </a:avLst>
           </a:prstGeom>
           <a:solidFill>
-            <a:srgbClr val="E2E8F0"/>
-          </a:solidFill>
-          <a:ln w="12700">
-            <a:solidFill>
-              <a:srgbClr val="E2E8F0"/>
+            <a:srgbClr val="CCFBF1"/>
+          </a:solidFill>
+          <a:ln w="12700">
+            <a:solidFill>
+              <a:srgbClr val="0D9488"/>
+            </a:solidFill>
+            <a:prstDash val="solid"/>
+          </a:ln>
+        </p:spPr>
+      </p:sp>
+      <p:sp>
+        <p:nvSpPr>
+          <p:cNvPr id="25" name="Shape 23"/>
+          <p:cNvSpPr/>
+          <p:nvPr/>
+        </p:nvSpPr>
+        <p:spPr>
+          <a:xfrm>
+            <a:off x="2999232" y="3364992"/>
+            <a:ext cx="1645920" cy="475488"/>
+          </a:xfrm>
+          <a:prstGeom prst="rect">
+            <a:avLst>
+              <a:gd name="adj" fmla="val 9615"/>
+            </a:avLst>
+          </a:prstGeom>
+          <a:solidFill>
+            <a:srgbClr val="FFFFFF"/>
+          </a:solidFill>
+          <a:ln w="12700">
+            <a:solidFill>
+              <a:srgbClr val="0D9488"/>
             </a:solidFill>
             <a:prstDash val="solid"/>
           </a:ln>
@@ -15026,32 +15422,203 @@
         </p:nvSpPr>
         <p:spPr>
           <a:xfrm>
-            <a:off x="365760" y="3273552"/>
-            <a:ext cx="1371600" cy="658368"/>
-          </a:xfrm>
-          <a:prstGeom prst="rect">
-            <a:avLst/>
-          </a:prstGeom>
-          <a:noFill/>
-          <a:ln/>
-        </p:spPr>
-        <p:txBody>
-          <a:bodyPr wrap="square" lIns="0" tIns="0" rIns="0" bIns="0" rtlCol="0" anchor="ctr"/>
-          <a:lstStyle/>
-          <a:p>
-            <a:pPr algn="ctr" indent="0" marL="0">
-              <a:buNone/>
-            </a:pPr>
-            <a:r>
-              <a:rPr lang="en-US" sz="1100" b="1" dirty="0">
-                <a:solidFill>
-                  <a:srgbClr val="475569"/>
+            <a:off x="2999232" y="3364992"/>
+            <a:ext cx="1645920" cy="475488"/>
+          </a:xfrm>
+          <a:prstGeom prst="rect">
+            <a:avLst/>
+          </a:prstGeom>
+          <a:noFill/>
+          <a:ln/>
+        </p:spPr>
+        <p:txBody>
+          <a:bodyPr wrap="square" lIns="0" tIns="0" rIns="0" bIns="0" rtlCol="0" anchor="ctr"/>
+          <a:lstStyle/>
+          <a:p>
+            <a:pPr algn="ctr" indent="0" marL="0">
+              <a:buNone/>
+            </a:pPr>
+            <a:r>
+              <a:rPr lang="en-US" sz="1400" b="1" dirty="0">
+                <a:solidFill>
+                  <a:srgbClr val="0D9488"/>
                 </a:solidFill>
                 <a:latin typeface="Trebuchet MS" pitchFamily="34" charset="0"/>
                 <a:ea typeface="Trebuchet MS" pitchFamily="34" charset="-122"/>
                 <a:cs typeface="Trebuchet MS" pitchFamily="34" charset="-120"/>
               </a:rPr>
-              <a:t>Syllables</a:t>
+              <a:t>eat</a:t>
+            </a:r>
+            <a:endParaRPr lang="en-US" sz="1400" dirty="0"/>
+          </a:p>
+        </p:txBody>
+      </p:sp>
+      <p:sp>
+        <p:nvSpPr>
+          <p:cNvPr id="27" name="Text 25"/>
+          <p:cNvSpPr/>
+          <p:nvPr/>
+        </p:nvSpPr>
+        <p:spPr>
+          <a:xfrm>
+            <a:off x="4645152" y="3364992"/>
+            <a:ext cx="1097280" cy="475488"/>
+          </a:xfrm>
+          <a:prstGeom prst="rect">
+            <a:avLst/>
+          </a:prstGeom>
+          <a:noFill/>
+          <a:ln/>
+        </p:spPr>
+        <p:txBody>
+          <a:bodyPr wrap="square" lIns="0" tIns="0" rIns="0" bIns="0" rtlCol="0" anchor="ctr"/>
+          <a:lstStyle/>
+          <a:p>
+            <a:pPr algn="ctr" indent="0" marL="0">
+              <a:buNone/>
+            </a:pPr>
+            <a:r>
+              <a:rPr lang="en-US" sz="1600" b="1" dirty="0">
+                <a:solidFill>
+                  <a:srgbClr val="0D9488"/>
+                </a:solidFill>
+                <a:latin typeface="Trebuchet MS" pitchFamily="34" charset="0"/>
+                <a:ea typeface="Trebuchet MS" pitchFamily="34" charset="-122"/>
+                <a:cs typeface="Trebuchet MS" pitchFamily="34" charset="-120"/>
+              </a:rPr>
+              <a:t>·</a:t>
+            </a:r>
+            <a:endParaRPr lang="en-US" sz="1600" dirty="0"/>
+          </a:p>
+        </p:txBody>
+      </p:sp>
+      <p:sp>
+        <p:nvSpPr>
+          <p:cNvPr id="28" name="Shape 26"/>
+          <p:cNvSpPr/>
+          <p:nvPr/>
+        </p:nvSpPr>
+        <p:spPr>
+          <a:xfrm>
+            <a:off x="5742432" y="3364992"/>
+            <a:ext cx="1645920" cy="475488"/>
+          </a:xfrm>
+          <a:prstGeom prst="rect">
+            <a:avLst>
+              <a:gd name="adj" fmla="val 9615"/>
+            </a:avLst>
+          </a:prstGeom>
+          <a:solidFill>
+            <a:srgbClr val="FFFFFF"/>
+          </a:solidFill>
+          <a:ln w="12700">
+            <a:solidFill>
+              <a:srgbClr val="0D9488"/>
+            </a:solidFill>
+            <a:prstDash val="solid"/>
+          </a:ln>
+        </p:spPr>
+      </p:sp>
+      <p:sp>
+        <p:nvSpPr>
+          <p:cNvPr id="29" name="Text 27"/>
+          <p:cNvSpPr/>
+          <p:nvPr/>
+        </p:nvSpPr>
+        <p:spPr>
+          <a:xfrm>
+            <a:off x="5742432" y="3364992"/>
+            <a:ext cx="1645920" cy="475488"/>
+          </a:xfrm>
+          <a:prstGeom prst="rect">
+            <a:avLst/>
+          </a:prstGeom>
+          <a:noFill/>
+          <a:ln/>
+        </p:spPr>
+        <p:txBody>
+          <a:bodyPr wrap="square" lIns="0" tIns="0" rIns="0" bIns="0" rtlCol="0" anchor="ctr"/>
+          <a:lstStyle/>
+          <a:p>
+            <a:pPr algn="ctr" indent="0" marL="0">
+              <a:buNone/>
+            </a:pPr>
+            <a:r>
+              <a:rPr lang="en-US" sz="1400" b="1" dirty="0">
+                <a:solidFill>
+                  <a:srgbClr val="0D9488"/>
+                </a:solidFill>
+                <a:latin typeface="Trebuchet MS" pitchFamily="34" charset="0"/>
+                <a:ea typeface="Trebuchet MS" pitchFamily="34" charset="-122"/>
+                <a:cs typeface="Trebuchet MS" pitchFamily="34" charset="-120"/>
+              </a:rPr>
+              <a:t>er</a:t>
+            </a:r>
+            <a:endParaRPr lang="en-US" sz="1400" dirty="0"/>
+          </a:p>
+        </p:txBody>
+      </p:sp>
+      <p:sp>
+        <p:nvSpPr>
+          <p:cNvPr id="30" name="Shape 28"/>
+          <p:cNvSpPr/>
+          <p:nvPr/>
+        </p:nvSpPr>
+        <p:spPr>
+          <a:xfrm>
+            <a:off x="365760" y="4096512"/>
+            <a:ext cx="1371600" cy="804672"/>
+          </a:xfrm>
+          <a:prstGeom prst="rect">
+            <a:avLst>
+              <a:gd name="adj" fmla="val 6818"/>
+            </a:avLst>
+          </a:prstGeom>
+          <a:solidFill>
+            <a:srgbClr val="E2E8F0"/>
+          </a:solidFill>
+          <a:ln w="12700">
+            <a:solidFill>
+              <a:srgbClr val="E2E8F0"/>
+            </a:solidFill>
+            <a:prstDash val="solid"/>
+          </a:ln>
+        </p:spPr>
+      </p:sp>
+      <p:sp>
+        <p:nvSpPr>
+          <p:cNvPr id="31" name="Text 29"/>
+          <p:cNvSpPr/>
+          <p:nvPr/>
+        </p:nvSpPr>
+        <p:spPr>
+          <a:xfrm>
+            <a:off x="365760" y="4096512"/>
+            <a:ext cx="1371600" cy="804672"/>
+          </a:xfrm>
+          <a:prstGeom prst="rect">
+            <a:avLst/>
+          </a:prstGeom>
+          <a:noFill/>
+          <a:ln/>
+        </p:spPr>
+        <p:txBody>
+          <a:bodyPr wrap="square" lIns="0" tIns="0" rIns="0" bIns="0" rtlCol="0" anchor="ctr"/>
+          <a:lstStyle/>
+          <a:p>
+            <a:pPr algn="ctr" indent="0" marL="0">
+              <a:buNone/>
+            </a:pPr>
+            <a:r>
+              <a:rPr lang="en-US" sz="1100" b="1" dirty="0">
+                <a:solidFill>
+                  <a:srgbClr val="475569"/>
+                </a:solidFill>
+                <a:latin typeface="Trebuchet MS" pitchFamily="34" charset="0"/>
+                <a:ea typeface="Trebuchet MS" pitchFamily="34" charset="-122"/>
+                <a:cs typeface="Trebuchet MS" pitchFamily="34" charset="-120"/>
+              </a:rPr>
+              <a:t>Phonemes</a:t>
             </a:r>
             <a:endParaRPr lang="en-US" sz="1100" dirty="0"/>
           </a:p>
@@ -15059,13 +15626,13 @@
       </p:sp>
       <p:sp>
         <p:nvSpPr>
-          <p:cNvPr id="27" name="Shape 25"/>
-          <p:cNvSpPr/>
-          <p:nvPr/>
-        </p:nvSpPr>
-        <p:spPr>
-          <a:xfrm>
-            <a:off x="1874520" y="3273552"/>
+          <p:cNvPr id="32" name="Shape 30"/>
+          <p:cNvSpPr/>
+          <p:nvPr/>
+        </p:nvSpPr>
+        <p:spPr>
+          <a:xfrm>
+            <a:off x="1874520" y="4096512"/>
             <a:ext cx="6903720" cy="658368"/>
           </a:xfrm>
           <a:prstGeom prst="rect">
@@ -15074,30 +15641,30 @@
             </a:avLst>
           </a:prstGeom>
           <a:solidFill>
-            <a:srgbClr val="CCFBF1"/>
-          </a:solidFill>
-          <a:ln w="12700">
-            <a:solidFill>
-              <a:srgbClr val="0D9488"/>
-            </a:solidFill>
-            <a:prstDash val="solid"/>
-          </a:ln>
-        </p:spPr>
-      </p:sp>
-      <p:sp>
-        <p:nvSpPr>
-          <p:cNvPr id="28" name="Shape 26"/>
-          <p:cNvSpPr/>
-          <p:nvPr/>
-        </p:nvSpPr>
-        <p:spPr>
-          <a:xfrm>
-            <a:off x="2313432" y="3364992"/>
-            <a:ext cx="1645920" cy="475488"/>
+            <a:srgbClr val="FCE7F3"/>
+          </a:solidFill>
+          <a:ln w="12700">
+            <a:solidFill>
+              <a:srgbClr val="DB2777"/>
+            </a:solidFill>
+            <a:prstDash val="solid"/>
+          </a:ln>
+        </p:spPr>
+      </p:sp>
+      <p:sp>
+        <p:nvSpPr>
+          <p:cNvPr id="33" name="Shape 31"/>
+          <p:cNvSpPr/>
+          <p:nvPr/>
+        </p:nvSpPr>
+        <p:spPr>
+          <a:xfrm>
+            <a:off x="3033522" y="4169664"/>
+            <a:ext cx="685800" cy="475488"/>
           </a:xfrm>
           <a:prstGeom prst="rect">
             <a:avLst>
-              <a:gd name="adj" fmla="val 9615"/>
+              <a:gd name="adj" fmla="val 7692"/>
             </a:avLst>
           </a:prstGeom>
           <a:solidFill>
@@ -15105,104 +15672,131 @@
           </a:solidFill>
           <a:ln w="12700">
             <a:solidFill>
-              <a:srgbClr val="0D9488"/>
-            </a:solidFill>
-            <a:prstDash val="solid"/>
-          </a:ln>
-        </p:spPr>
-      </p:sp>
-      <p:sp>
-        <p:nvSpPr>
-          <p:cNvPr id="29" name="Text 27"/>
-          <p:cNvSpPr/>
-          <p:nvPr/>
-        </p:nvSpPr>
-        <p:spPr>
-          <a:xfrm>
-            <a:off x="2313432" y="3364992"/>
-            <a:ext cx="1645920" cy="475488"/>
-          </a:xfrm>
-          <a:prstGeom prst="rect">
-            <a:avLst/>
-          </a:prstGeom>
-          <a:noFill/>
-          <a:ln/>
-        </p:spPr>
-        <p:txBody>
-          <a:bodyPr wrap="square" lIns="0" tIns="0" rIns="0" bIns="0" rtlCol="0" anchor="ctr"/>
-          <a:lstStyle/>
-          <a:p>
-            <a:pPr algn="ctr" indent="0" marL="0">
-              <a:buNone/>
-            </a:pPr>
-            <a:r>
-              <a:rPr lang="en-US" sz="1400" b="1" dirty="0">
-                <a:solidFill>
-                  <a:srgbClr val="0D9488"/>
+              <a:srgbClr val="DB2777"/>
+            </a:solidFill>
+            <a:prstDash val="solid"/>
+          </a:ln>
+        </p:spPr>
+      </p:sp>
+      <p:sp>
+        <p:nvSpPr>
+          <p:cNvPr id="34" name="Text 32"/>
+          <p:cNvSpPr/>
+          <p:nvPr/>
+        </p:nvSpPr>
+        <p:spPr>
+          <a:xfrm>
+            <a:off x="3033522" y="4169664"/>
+            <a:ext cx="685800" cy="475488"/>
+          </a:xfrm>
+          <a:prstGeom prst="rect">
+            <a:avLst/>
+          </a:prstGeom>
+          <a:noFill/>
+          <a:ln/>
+        </p:spPr>
+        <p:txBody>
+          <a:bodyPr wrap="square" lIns="0" tIns="0" rIns="0" bIns="0" rtlCol="0" anchor="ctr"/>
+          <a:lstStyle/>
+          <a:p>
+            <a:pPr algn="ctr" indent="0" marL="0">
+              <a:buNone/>
+            </a:pPr>
+            <a:r>
+              <a:rPr lang="en-US" sz="1000" b="1" dirty="0">
+                <a:solidFill>
+                  <a:srgbClr val="9D174D"/>
                 </a:solidFill>
                 <a:latin typeface="Trebuchet MS" pitchFamily="34" charset="0"/>
                 <a:ea typeface="Trebuchet MS" pitchFamily="34" charset="-122"/>
                 <a:cs typeface="Trebuchet MS" pitchFamily="34" charset="-120"/>
               </a:rPr>
-              <a:t>un</a:t>
-            </a:r>
-            <a:endParaRPr lang="en-US" sz="1400" dirty="0"/>
-          </a:p>
-        </p:txBody>
-      </p:sp>
-      <p:sp>
-        <p:nvSpPr>
-          <p:cNvPr id="30" name="Text 28"/>
-          <p:cNvSpPr/>
-          <p:nvPr/>
-        </p:nvSpPr>
-        <p:spPr>
-          <a:xfrm>
-            <a:off x="3959352" y="3364992"/>
-            <a:ext cx="411480" cy="475488"/>
-          </a:xfrm>
-          <a:prstGeom prst="rect">
-            <a:avLst/>
-          </a:prstGeom>
-          <a:noFill/>
-          <a:ln/>
-        </p:spPr>
-        <p:txBody>
-          <a:bodyPr wrap="square" lIns="0" tIns="0" rIns="0" bIns="0" rtlCol="0" anchor="ctr"/>
-          <a:lstStyle/>
-          <a:p>
-            <a:pPr algn="ctr" indent="0" marL="0">
-              <a:buNone/>
-            </a:pPr>
-            <a:r>
-              <a:rPr lang="en-US" sz="1600" b="1" dirty="0">
-                <a:solidFill>
-                  <a:srgbClr val="0D9488"/>
+              <a:t>ea</a:t>
+            </a:r>
+            <a:endParaRPr lang="en-US" sz="1000" dirty="0"/>
+          </a:p>
+        </p:txBody>
+      </p:sp>
+      <p:sp>
+        <p:nvSpPr>
+          <p:cNvPr id="35" name="Shape 33"/>
+          <p:cNvSpPr/>
+          <p:nvPr/>
+        </p:nvSpPr>
+        <p:spPr>
+          <a:xfrm>
+            <a:off x="4850892" y="4169664"/>
+            <a:ext cx="685800" cy="475488"/>
+          </a:xfrm>
+          <a:prstGeom prst="rect">
+            <a:avLst>
+              <a:gd name="adj" fmla="val 7692"/>
+            </a:avLst>
+          </a:prstGeom>
+          <a:solidFill>
+            <a:srgbClr val="FFFFFF"/>
+          </a:solidFill>
+          <a:ln w="12700">
+            <a:solidFill>
+              <a:srgbClr val="DB2777"/>
+            </a:solidFill>
+            <a:prstDash val="solid"/>
+          </a:ln>
+        </p:spPr>
+      </p:sp>
+      <p:sp>
+        <p:nvSpPr>
+          <p:cNvPr id="36" name="Text 34"/>
+          <p:cNvSpPr/>
+          <p:nvPr/>
+        </p:nvSpPr>
+        <p:spPr>
+          <a:xfrm>
+            <a:off x="4850892" y="4169664"/>
+            <a:ext cx="685800" cy="475488"/>
+          </a:xfrm>
+          <a:prstGeom prst="rect">
+            <a:avLst/>
+          </a:prstGeom>
+          <a:noFill/>
+          <a:ln/>
+        </p:spPr>
+        <p:txBody>
+          <a:bodyPr wrap="square" lIns="0" tIns="0" rIns="0" bIns="0" rtlCol="0" anchor="ctr"/>
+          <a:lstStyle/>
+          <a:p>
+            <a:pPr algn="ctr" indent="0" marL="0">
+              <a:buNone/>
+            </a:pPr>
+            <a:r>
+              <a:rPr lang="en-US" sz="1000" b="1" dirty="0">
+                <a:solidFill>
+                  <a:srgbClr val="9D174D"/>
                 </a:solidFill>
                 <a:latin typeface="Trebuchet MS" pitchFamily="34" charset="0"/>
                 <a:ea typeface="Trebuchet MS" pitchFamily="34" charset="-122"/>
                 <a:cs typeface="Trebuchet MS" pitchFamily="34" charset="-120"/>
               </a:rPr>
-              <a:t>·</a:t>
-            </a:r>
-            <a:endParaRPr lang="en-US" sz="1600" dirty="0"/>
-          </a:p>
-        </p:txBody>
-      </p:sp>
-      <p:sp>
-        <p:nvSpPr>
-          <p:cNvPr id="31" name="Shape 29"/>
-          <p:cNvSpPr/>
-          <p:nvPr/>
-        </p:nvSpPr>
-        <p:spPr>
-          <a:xfrm>
-            <a:off x="4370832" y="3364992"/>
-            <a:ext cx="1645920" cy="475488"/>
+              <a:t>t</a:t>
+            </a:r>
+            <a:endParaRPr lang="en-US" sz="1000" dirty="0"/>
+          </a:p>
+        </p:txBody>
+      </p:sp>
+      <p:sp>
+        <p:nvSpPr>
+          <p:cNvPr id="37" name="Shape 35"/>
+          <p:cNvSpPr/>
+          <p:nvPr/>
+        </p:nvSpPr>
+        <p:spPr>
+          <a:xfrm>
+            <a:off x="6668262" y="4169664"/>
+            <a:ext cx="685800" cy="475488"/>
           </a:xfrm>
           <a:prstGeom prst="rect">
             <a:avLst>
-              <a:gd name="adj" fmla="val 9615"/>
+              <a:gd name="adj" fmla="val 7692"/>
             </a:avLst>
           </a:prstGeom>
           <a:solidFill>
@@ -15210,576 +15804,48 @@
           </a:solidFill>
           <a:ln w="12700">
             <a:solidFill>
-              <a:srgbClr val="0D9488"/>
-            </a:solidFill>
-            <a:prstDash val="solid"/>
-          </a:ln>
-        </p:spPr>
-      </p:sp>
-      <p:sp>
-        <p:nvSpPr>
-          <p:cNvPr id="32" name="Text 30"/>
-          <p:cNvSpPr/>
-          <p:nvPr/>
-        </p:nvSpPr>
-        <p:spPr>
-          <a:xfrm>
-            <a:off x="4370832" y="3364992"/>
-            <a:ext cx="1645920" cy="475488"/>
-          </a:xfrm>
-          <a:prstGeom prst="rect">
-            <a:avLst/>
-          </a:prstGeom>
-          <a:noFill/>
-          <a:ln/>
-        </p:spPr>
-        <p:txBody>
-          <a:bodyPr wrap="square" lIns="0" tIns="0" rIns="0" bIns="0" rtlCol="0" anchor="ctr"/>
-          <a:lstStyle/>
-          <a:p>
-            <a:pPr algn="ctr" indent="0" marL="0">
-              <a:buNone/>
-            </a:pPr>
-            <a:r>
-              <a:rPr lang="en-US" sz="1400" b="1" dirty="0">
-                <a:solidFill>
-                  <a:srgbClr val="0D9488"/>
+              <a:srgbClr val="DB2777"/>
+            </a:solidFill>
+            <a:prstDash val="solid"/>
+          </a:ln>
+        </p:spPr>
+      </p:sp>
+      <p:sp>
+        <p:nvSpPr>
+          <p:cNvPr id="38" name="Text 36"/>
+          <p:cNvSpPr/>
+          <p:nvPr/>
+        </p:nvSpPr>
+        <p:spPr>
+          <a:xfrm>
+            <a:off x="6668262" y="4169664"/>
+            <a:ext cx="685800" cy="475488"/>
+          </a:xfrm>
+          <a:prstGeom prst="rect">
+            <a:avLst/>
+          </a:prstGeom>
+          <a:noFill/>
+          <a:ln/>
+        </p:spPr>
+        <p:txBody>
+          <a:bodyPr wrap="square" lIns="0" tIns="0" rIns="0" bIns="0" rtlCol="0" anchor="ctr"/>
+          <a:lstStyle/>
+          <a:p>
+            <a:pPr algn="ctr" indent="0" marL="0">
+              <a:buNone/>
+            </a:pPr>
+            <a:r>
+              <a:rPr lang="en-US" sz="1000" b="1" dirty="0">
+                <a:solidFill>
+                  <a:srgbClr val="9D174D"/>
                 </a:solidFill>
                 <a:latin typeface="Trebuchet MS" pitchFamily="34" charset="0"/>
                 <a:ea typeface="Trebuchet MS" pitchFamily="34" charset="-122"/>
                 <a:cs typeface="Trebuchet MS" pitchFamily="34" charset="-120"/>
               </a:rPr>
-              <a:t>eat</a:t>
-            </a:r>
-            <a:endParaRPr lang="en-US" sz="1400" dirty="0"/>
-          </a:p>
-        </p:txBody>
-      </p:sp>
-      <p:sp>
-        <p:nvSpPr>
-          <p:cNvPr id="33" name="Text 31"/>
-          <p:cNvSpPr/>
-          <p:nvPr/>
-        </p:nvSpPr>
-        <p:spPr>
-          <a:xfrm>
-            <a:off x="6016752" y="3364992"/>
-            <a:ext cx="411480" cy="475488"/>
-          </a:xfrm>
-          <a:prstGeom prst="rect">
-            <a:avLst/>
-          </a:prstGeom>
-          <a:noFill/>
-          <a:ln/>
-        </p:spPr>
-        <p:txBody>
-          <a:bodyPr wrap="square" lIns="0" tIns="0" rIns="0" bIns="0" rtlCol="0" anchor="ctr"/>
-          <a:lstStyle/>
-          <a:p>
-            <a:pPr algn="ctr" indent="0" marL="0">
-              <a:buNone/>
-            </a:pPr>
-            <a:r>
-              <a:rPr lang="en-US" sz="1600" b="1" dirty="0">
-                <a:solidFill>
-                  <a:srgbClr val="0D9488"/>
-                </a:solidFill>
-                <a:latin typeface="Trebuchet MS" pitchFamily="34" charset="0"/>
-                <a:ea typeface="Trebuchet MS" pitchFamily="34" charset="-122"/>
-                <a:cs typeface="Trebuchet MS" pitchFamily="34" charset="-120"/>
-              </a:rPr>
-              <a:t>·</a:t>
-            </a:r>
-            <a:endParaRPr lang="en-US" sz="1600" dirty="0"/>
-          </a:p>
-        </p:txBody>
-      </p:sp>
-      <p:sp>
-        <p:nvSpPr>
-          <p:cNvPr id="34" name="Shape 32"/>
-          <p:cNvSpPr/>
-          <p:nvPr/>
-        </p:nvSpPr>
-        <p:spPr>
-          <a:xfrm>
-            <a:off x="6428232" y="3364992"/>
-            <a:ext cx="1645920" cy="475488"/>
-          </a:xfrm>
-          <a:prstGeom prst="rect">
-            <a:avLst>
-              <a:gd name="adj" fmla="val 9615"/>
-            </a:avLst>
-          </a:prstGeom>
-          <a:solidFill>
-            <a:srgbClr val="FFFFFF"/>
-          </a:solidFill>
-          <a:ln w="12700">
-            <a:solidFill>
-              <a:srgbClr val="0D9488"/>
-            </a:solidFill>
-            <a:prstDash val="solid"/>
-          </a:ln>
-        </p:spPr>
-      </p:sp>
-      <p:sp>
-        <p:nvSpPr>
-          <p:cNvPr id="35" name="Text 33"/>
-          <p:cNvSpPr/>
-          <p:nvPr/>
-        </p:nvSpPr>
-        <p:spPr>
-          <a:xfrm>
-            <a:off x="6428232" y="3364992"/>
-            <a:ext cx="1645920" cy="475488"/>
-          </a:xfrm>
-          <a:prstGeom prst="rect">
-            <a:avLst/>
-          </a:prstGeom>
-          <a:noFill/>
-          <a:ln/>
-        </p:spPr>
-        <p:txBody>
-          <a:bodyPr wrap="square" lIns="0" tIns="0" rIns="0" bIns="0" rtlCol="0" anchor="ctr"/>
-          <a:lstStyle/>
-          <a:p>
-            <a:pPr algn="ctr" indent="0" marL="0">
-              <a:buNone/>
-            </a:pPr>
-            <a:r>
-              <a:rPr lang="en-US" sz="1400" b="1" dirty="0">
-                <a:solidFill>
-                  <a:srgbClr val="0D9488"/>
-                </a:solidFill>
-                <a:latin typeface="Trebuchet MS" pitchFamily="34" charset="0"/>
-                <a:ea typeface="Trebuchet MS" pitchFamily="34" charset="-122"/>
-                <a:cs typeface="Trebuchet MS" pitchFamily="34" charset="-120"/>
-              </a:rPr>
-              <a:t>en</a:t>
-            </a:r>
-            <a:endParaRPr lang="en-US" sz="1400" dirty="0"/>
-          </a:p>
-        </p:txBody>
-      </p:sp>
-      <p:sp>
-        <p:nvSpPr>
-          <p:cNvPr id="36" name="Shape 34"/>
-          <p:cNvSpPr/>
-          <p:nvPr/>
-        </p:nvSpPr>
-        <p:spPr>
-          <a:xfrm>
-            <a:off x="365760" y="4096512"/>
-            <a:ext cx="1371600" cy="804672"/>
-          </a:xfrm>
-          <a:prstGeom prst="rect">
-            <a:avLst>
-              <a:gd name="adj" fmla="val 6818"/>
-            </a:avLst>
-          </a:prstGeom>
-          <a:solidFill>
-            <a:srgbClr val="E2E8F0"/>
-          </a:solidFill>
-          <a:ln w="12700">
-            <a:solidFill>
-              <a:srgbClr val="E2E8F0"/>
-            </a:solidFill>
-            <a:prstDash val="solid"/>
-          </a:ln>
-        </p:spPr>
-      </p:sp>
-      <p:sp>
-        <p:nvSpPr>
-          <p:cNvPr id="37" name="Text 35"/>
-          <p:cNvSpPr/>
-          <p:nvPr/>
-        </p:nvSpPr>
-        <p:spPr>
-          <a:xfrm>
-            <a:off x="365760" y="4096512"/>
-            <a:ext cx="1371600" cy="804672"/>
-          </a:xfrm>
-          <a:prstGeom prst="rect">
-            <a:avLst/>
-          </a:prstGeom>
-          <a:noFill/>
-          <a:ln/>
-        </p:spPr>
-        <p:txBody>
-          <a:bodyPr wrap="square" lIns="0" tIns="0" rIns="0" bIns="0" rtlCol="0" anchor="ctr"/>
-          <a:lstStyle/>
-          <a:p>
-            <a:pPr algn="ctr" indent="0" marL="0">
-              <a:buNone/>
-            </a:pPr>
-            <a:r>
-              <a:rPr lang="en-US" sz="1100" b="1" dirty="0">
-                <a:solidFill>
-                  <a:srgbClr val="475569"/>
-                </a:solidFill>
-                <a:latin typeface="Trebuchet MS" pitchFamily="34" charset="0"/>
-                <a:ea typeface="Trebuchet MS" pitchFamily="34" charset="-122"/>
-                <a:cs typeface="Trebuchet MS" pitchFamily="34" charset="-120"/>
-              </a:rPr>
-              <a:t>Phonemes</a:t>
-            </a:r>
-            <a:endParaRPr lang="en-US" sz="1100" dirty="0"/>
-          </a:p>
-        </p:txBody>
-      </p:sp>
-      <p:sp>
-        <p:nvSpPr>
-          <p:cNvPr id="38" name="Shape 36"/>
-          <p:cNvSpPr/>
-          <p:nvPr/>
-        </p:nvSpPr>
-        <p:spPr>
-          <a:xfrm>
-            <a:off x="1874520" y="4096512"/>
-            <a:ext cx="6903720" cy="658368"/>
-          </a:xfrm>
-          <a:prstGeom prst="rect">
-            <a:avLst>
-              <a:gd name="adj" fmla="val 8333"/>
-            </a:avLst>
-          </a:prstGeom>
-          <a:solidFill>
-            <a:srgbClr val="FCE7F3"/>
-          </a:solidFill>
-          <a:ln w="12700">
-            <a:solidFill>
-              <a:srgbClr val="DB2777"/>
-            </a:solidFill>
-            <a:prstDash val="solid"/>
-          </a:ln>
-        </p:spPr>
-      </p:sp>
-      <p:sp>
-        <p:nvSpPr>
-          <p:cNvPr id="39" name="Shape 37"/>
-          <p:cNvSpPr/>
-          <p:nvPr/>
-        </p:nvSpPr>
-        <p:spPr>
-          <a:xfrm>
-            <a:off x="2427732" y="4169664"/>
-            <a:ext cx="685800" cy="475488"/>
-          </a:xfrm>
-          <a:prstGeom prst="rect">
-            <a:avLst>
-              <a:gd name="adj" fmla="val 7692"/>
-            </a:avLst>
-          </a:prstGeom>
-          <a:solidFill>
-            <a:srgbClr val="FFFFFF"/>
-          </a:solidFill>
-          <a:ln w="12700">
-            <a:solidFill>
-              <a:srgbClr val="DB2777"/>
-            </a:solidFill>
-            <a:prstDash val="solid"/>
-          </a:ln>
-        </p:spPr>
-      </p:sp>
-      <p:sp>
-        <p:nvSpPr>
-          <p:cNvPr id="40" name="Text 38"/>
-          <p:cNvSpPr/>
-          <p:nvPr/>
-        </p:nvSpPr>
-        <p:spPr>
-          <a:xfrm>
-            <a:off x="2427732" y="4169664"/>
-            <a:ext cx="685800" cy="475488"/>
-          </a:xfrm>
-          <a:prstGeom prst="rect">
-            <a:avLst/>
-          </a:prstGeom>
-          <a:noFill/>
-          <a:ln/>
-        </p:spPr>
-        <p:txBody>
-          <a:bodyPr wrap="square" lIns="0" tIns="0" rIns="0" bIns="0" rtlCol="0" anchor="ctr"/>
-          <a:lstStyle/>
-          <a:p>
-            <a:pPr algn="ctr" indent="0" marL="0">
-              <a:buNone/>
-            </a:pPr>
-            <a:r>
-              <a:rPr lang="en-US" sz="900" b="1" dirty="0">
-                <a:solidFill>
-                  <a:srgbClr val="9D174D"/>
-                </a:solidFill>
-                <a:latin typeface="Trebuchet MS" pitchFamily="34" charset="0"/>
-                <a:ea typeface="Trebuchet MS" pitchFamily="34" charset="-122"/>
-                <a:cs typeface="Trebuchet MS" pitchFamily="34" charset="-120"/>
-              </a:rPr>
-              <a:t>u</a:t>
-            </a:r>
-            <a:endParaRPr lang="en-US" sz="900" dirty="0"/>
-          </a:p>
-        </p:txBody>
-      </p:sp>
-      <p:sp>
-        <p:nvSpPr>
-          <p:cNvPr id="41" name="Shape 39"/>
-          <p:cNvSpPr/>
-          <p:nvPr/>
-        </p:nvSpPr>
-        <p:spPr>
-          <a:xfrm>
-            <a:off x="3639312" y="4169664"/>
-            <a:ext cx="685800" cy="475488"/>
-          </a:xfrm>
-          <a:prstGeom prst="rect">
-            <a:avLst>
-              <a:gd name="adj" fmla="val 7692"/>
-            </a:avLst>
-          </a:prstGeom>
-          <a:solidFill>
-            <a:srgbClr val="FFFFFF"/>
-          </a:solidFill>
-          <a:ln w="12700">
-            <a:solidFill>
-              <a:srgbClr val="DB2777"/>
-            </a:solidFill>
-            <a:prstDash val="solid"/>
-          </a:ln>
-        </p:spPr>
-      </p:sp>
-      <p:sp>
-        <p:nvSpPr>
-          <p:cNvPr id="42" name="Text 40"/>
-          <p:cNvSpPr/>
-          <p:nvPr/>
-        </p:nvSpPr>
-        <p:spPr>
-          <a:xfrm>
-            <a:off x="3639312" y="4169664"/>
-            <a:ext cx="685800" cy="475488"/>
-          </a:xfrm>
-          <a:prstGeom prst="rect">
-            <a:avLst/>
-          </a:prstGeom>
-          <a:noFill/>
-          <a:ln/>
-        </p:spPr>
-        <p:txBody>
-          <a:bodyPr wrap="square" lIns="0" tIns="0" rIns="0" bIns="0" rtlCol="0" anchor="ctr"/>
-          <a:lstStyle/>
-          <a:p>
-            <a:pPr algn="ctr" indent="0" marL="0">
-              <a:buNone/>
-            </a:pPr>
-            <a:r>
-              <a:rPr lang="en-US" sz="900" b="1" dirty="0">
-                <a:solidFill>
-                  <a:srgbClr val="9D174D"/>
-                </a:solidFill>
-                <a:latin typeface="Trebuchet MS" pitchFamily="34" charset="0"/>
-                <a:ea typeface="Trebuchet MS" pitchFamily="34" charset="-122"/>
-                <a:cs typeface="Trebuchet MS" pitchFamily="34" charset="-120"/>
-              </a:rPr>
-              <a:t>n</a:t>
-            </a:r>
-            <a:endParaRPr lang="en-US" sz="900" dirty="0"/>
-          </a:p>
-        </p:txBody>
-      </p:sp>
-      <p:sp>
-        <p:nvSpPr>
-          <p:cNvPr id="43" name="Shape 41"/>
-          <p:cNvSpPr/>
-          <p:nvPr/>
-        </p:nvSpPr>
-        <p:spPr>
-          <a:xfrm>
-            <a:off x="4850892" y="4169664"/>
-            <a:ext cx="685800" cy="475488"/>
-          </a:xfrm>
-          <a:prstGeom prst="rect">
-            <a:avLst>
-              <a:gd name="adj" fmla="val 7692"/>
-            </a:avLst>
-          </a:prstGeom>
-          <a:solidFill>
-            <a:srgbClr val="FFFFFF"/>
-          </a:solidFill>
-          <a:ln w="12700">
-            <a:solidFill>
-              <a:srgbClr val="DB2777"/>
-            </a:solidFill>
-            <a:prstDash val="solid"/>
-          </a:ln>
-        </p:spPr>
-      </p:sp>
-      <p:sp>
-        <p:nvSpPr>
-          <p:cNvPr id="44" name="Text 42"/>
-          <p:cNvSpPr/>
-          <p:nvPr/>
-        </p:nvSpPr>
-        <p:spPr>
-          <a:xfrm>
-            <a:off x="4850892" y="4169664"/>
-            <a:ext cx="685800" cy="475488"/>
-          </a:xfrm>
-          <a:prstGeom prst="rect">
-            <a:avLst/>
-          </a:prstGeom>
-          <a:noFill/>
-          <a:ln/>
-        </p:spPr>
-        <p:txBody>
-          <a:bodyPr wrap="square" lIns="0" tIns="0" rIns="0" bIns="0" rtlCol="0" anchor="ctr"/>
-          <a:lstStyle/>
-          <a:p>
-            <a:pPr algn="ctr" indent="0" marL="0">
-              <a:buNone/>
-            </a:pPr>
-            <a:r>
-              <a:rPr lang="en-US" sz="900" b="1" dirty="0">
-                <a:solidFill>
-                  <a:srgbClr val="9D174D"/>
-                </a:solidFill>
-                <a:latin typeface="Trebuchet MS" pitchFamily="34" charset="0"/>
-                <a:ea typeface="Trebuchet MS" pitchFamily="34" charset="-122"/>
-                <a:cs typeface="Trebuchet MS" pitchFamily="34" charset="-120"/>
-              </a:rPr>
-              <a:t>ea</a:t>
-            </a:r>
-            <a:endParaRPr lang="en-US" sz="900" dirty="0"/>
-          </a:p>
-        </p:txBody>
-      </p:sp>
-      <p:sp>
-        <p:nvSpPr>
-          <p:cNvPr id="45" name="Shape 43"/>
-          <p:cNvSpPr/>
-          <p:nvPr/>
-        </p:nvSpPr>
-        <p:spPr>
-          <a:xfrm>
-            <a:off x="6062472" y="4169664"/>
-            <a:ext cx="685800" cy="475488"/>
-          </a:xfrm>
-          <a:prstGeom prst="rect">
-            <a:avLst>
-              <a:gd name="adj" fmla="val 7692"/>
-            </a:avLst>
-          </a:prstGeom>
-          <a:solidFill>
-            <a:srgbClr val="FFFFFF"/>
-          </a:solidFill>
-          <a:ln w="12700">
-            <a:solidFill>
-              <a:srgbClr val="DB2777"/>
-            </a:solidFill>
-            <a:prstDash val="solid"/>
-          </a:ln>
-        </p:spPr>
-      </p:sp>
-      <p:sp>
-        <p:nvSpPr>
-          <p:cNvPr id="46" name="Text 44"/>
-          <p:cNvSpPr/>
-          <p:nvPr/>
-        </p:nvSpPr>
-        <p:spPr>
-          <a:xfrm>
-            <a:off x="6062472" y="4169664"/>
-            <a:ext cx="685800" cy="475488"/>
-          </a:xfrm>
-          <a:prstGeom prst="rect">
-            <a:avLst/>
-          </a:prstGeom>
-          <a:noFill/>
-          <a:ln/>
-        </p:spPr>
-        <p:txBody>
-          <a:bodyPr wrap="square" lIns="0" tIns="0" rIns="0" bIns="0" rtlCol="0" anchor="ctr"/>
-          <a:lstStyle/>
-          <a:p>
-            <a:pPr algn="ctr" indent="0" marL="0">
-              <a:buNone/>
-            </a:pPr>
-            <a:r>
-              <a:rPr lang="en-US" sz="900" b="1" dirty="0">
-                <a:solidFill>
-                  <a:srgbClr val="9D174D"/>
-                </a:solidFill>
-                <a:latin typeface="Trebuchet MS" pitchFamily="34" charset="0"/>
-                <a:ea typeface="Trebuchet MS" pitchFamily="34" charset="-122"/>
-                <a:cs typeface="Trebuchet MS" pitchFamily="34" charset="-120"/>
-              </a:rPr>
-              <a:t>t</a:t>
-            </a:r>
-            <a:endParaRPr lang="en-US" sz="900" dirty="0"/>
-          </a:p>
-        </p:txBody>
-      </p:sp>
-      <p:sp>
-        <p:nvSpPr>
-          <p:cNvPr id="47" name="Shape 45"/>
-          <p:cNvSpPr/>
-          <p:nvPr/>
-        </p:nvSpPr>
-        <p:spPr>
-          <a:xfrm>
-            <a:off x="7274052" y="4169664"/>
-            <a:ext cx="685800" cy="475488"/>
-          </a:xfrm>
-          <a:prstGeom prst="rect">
-            <a:avLst>
-              <a:gd name="adj" fmla="val 7692"/>
-            </a:avLst>
-          </a:prstGeom>
-          <a:solidFill>
-            <a:srgbClr val="FFFFFF"/>
-          </a:solidFill>
-          <a:ln w="12700">
-            <a:solidFill>
-              <a:srgbClr val="DB2777"/>
-            </a:solidFill>
-            <a:prstDash val="solid"/>
-          </a:ln>
-        </p:spPr>
-      </p:sp>
-      <p:sp>
-        <p:nvSpPr>
-          <p:cNvPr id="48" name="Text 46"/>
-          <p:cNvSpPr/>
-          <p:nvPr/>
-        </p:nvSpPr>
-        <p:spPr>
-          <a:xfrm>
-            <a:off x="7274052" y="4169664"/>
-            <a:ext cx="685800" cy="475488"/>
-          </a:xfrm>
-          <a:prstGeom prst="rect">
-            <a:avLst/>
-          </a:prstGeom>
-          <a:noFill/>
-          <a:ln/>
-        </p:spPr>
-        <p:txBody>
-          <a:bodyPr wrap="square" lIns="0" tIns="0" rIns="0" bIns="0" rtlCol="0" anchor="ctr"/>
-          <a:lstStyle/>
-          <a:p>
-            <a:pPr algn="ctr" indent="0" marL="0">
-              <a:buNone/>
-            </a:pPr>
-            <a:r>
-              <a:rPr lang="en-US" sz="900" b="1" dirty="0">
-                <a:solidFill>
-                  <a:srgbClr val="9D174D"/>
-                </a:solidFill>
-                <a:latin typeface="Trebuchet MS" pitchFamily="34" charset="0"/>
-                <a:ea typeface="Trebuchet MS" pitchFamily="34" charset="-122"/>
-                <a:cs typeface="Trebuchet MS" pitchFamily="34" charset="-120"/>
-              </a:rPr>
-              <a:t>en</a:t>
-            </a:r>
-            <a:endParaRPr lang="en-US" sz="900" dirty="0"/>
+              <a:t>er</a:t>
+            </a:r>
+            <a:endParaRPr lang="en-US" sz="1000" dirty="0"/>
           </a:p>
         </p:txBody>
       </p:sp>
@@ -16685,7 +16751,7 @@
                 <a:ea typeface="Trebuchet MS" pitchFamily="34" charset="-122"/>
                 <a:cs typeface="Trebuchet MS" pitchFamily="34" charset="-120"/>
               </a:rPr>
-              <a:t>1</a:t>
+              <a:t>2</a:t>
             </a:r>
             <a:pPr algn="ctr" indent="0" marL="0">
               <a:buNone/>
@@ -16699,7 +16765,7 @@
                 <a:ea typeface="Trebuchet MS" pitchFamily="34" charset="-122"/>
                 <a:cs typeface="Trebuchet MS" pitchFamily="34" charset="-120"/>
               </a:rPr>
-              <a:t>  punctuation mark</a:t>
+              <a:t>  punctuation marks</a:t>
             </a:r>
             <a:endParaRPr lang="en-US" sz="2800" dirty="0"/>
           </a:p>
@@ -17095,20 +17161,6 @@
               <a:buNone/>
             </a:pPr>
             <a:r>
-              <a:rPr lang="en-US" sz="1800" dirty="0">
-                <a:solidFill>
-                  <a:srgbClr val="0F172A"/>
-                </a:solidFill>
-                <a:latin typeface="Calibri" pitchFamily="34" charset="0"/>
-                <a:ea typeface="Calibri" pitchFamily="34" charset="-122"/>
-                <a:cs typeface="Calibri" pitchFamily="34" charset="-120"/>
-              </a:rPr>
-              <a:t>The </a:t>
-            </a:r>
-            <a:pPr algn="l" indent="0" marL="0">
-              <a:buNone/>
-            </a:pPr>
-            <a:r>
               <a:rPr lang="en-US" sz="1800" b="1" dirty="0">
                 <a:solidFill>
                   <a:srgbClr val="0D9488"/>
@@ -17120,7 +17172,7 @@
                 <a:ea typeface="Calibri" pitchFamily="34" charset="-122"/>
                 <a:cs typeface="Calibri" pitchFamily="34" charset="-120"/>
               </a:rPr>
-              <a:t>overeater</a:t>
+              <a:t>Overeating</a:t>
             </a:r>
             <a:pPr algn="l" indent="0" marL="0">
               <a:buNone/>
@@ -17134,7 +17186,7 @@
                 <a:ea typeface="Calibri" pitchFamily="34" charset="-122"/>
                 <a:cs typeface="Calibri" pitchFamily="34" charset="-120"/>
               </a:rPr>
-              <a:t> felt sick, but the </a:t>
+              <a:t> at dinner is unhealthy, but </a:t>
             </a:r>
             <a:pPr algn="l" indent="0" marL="0">
               <a:buNone/>
@@ -17151,7 +17203,7 @@
                 <a:ea typeface="Calibri" pitchFamily="34" charset="-122"/>
                 <a:cs typeface="Calibri" pitchFamily="34" charset="-120"/>
               </a:rPr>
-              <a:t>uneaten</a:t>
+              <a:t>reheating</a:t>
             </a:r>
             <a:pPr algn="l" indent="0" marL="0">
               <a:buNone/>
@@ -17165,7 +17217,7 @@
                 <a:ea typeface="Calibri" pitchFamily="34" charset="-122"/>
                 <a:cs typeface="Calibri" pitchFamily="34" charset="-120"/>
               </a:rPr>
-              <a:t> food was saved for the hungriest </a:t>
+              <a:t> your leftovers the next day makes you an </a:t>
             </a:r>
             <a:pPr algn="l" indent="0" marL="0">
               <a:buNone/>
@@ -17182,7 +17234,7 @@
                 <a:ea typeface="Calibri" pitchFamily="34" charset="-122"/>
                 <a:cs typeface="Calibri" pitchFamily="34" charset="-120"/>
               </a:rPr>
-              <a:t>eater</a:t>
+              <a:t>eating</a:t>
             </a:r>
             <a:pPr algn="l" indent="0" marL="0">
               <a:buNone/>
@@ -17196,7 +17248,7 @@
                 <a:ea typeface="Calibri" pitchFamily="34" charset="-122"/>
                 <a:cs typeface="Calibri" pitchFamily="34" charset="-120"/>
               </a:rPr>
-              <a:t> at the table.</a:t>
+              <a:t> champion!</a:t>
             </a:r>
             <a:endParaRPr lang="en-US" sz="1800" dirty="0"/>
           </a:p>
@@ -17351,7 +17403,7 @@
                 <a:ea typeface="Trebuchet MS" pitchFamily="34" charset="-122"/>
                 <a:cs typeface="Trebuchet MS" pitchFamily="34" charset="-120"/>
               </a:rPr>
-              <a:t>overeater</a:t>
+              <a:t>Overeating</a:t>
             </a:r>
             <a:endParaRPr lang="en-US" sz="1400" dirty="0"/>
           </a:p>
@@ -17479,7 +17531,7 @@
                 <a:ea typeface="Trebuchet MS" pitchFamily="34" charset="-122"/>
                 <a:cs typeface="Trebuchet MS" pitchFamily="34" charset="-120"/>
               </a:rPr>
-              <a:t>uneaten</a:t>
+              <a:t>reheating</a:t>
             </a:r>
             <a:endParaRPr lang="en-US" sz="1400" dirty="0"/>
           </a:p>
@@ -17607,7 +17659,7 @@
                 <a:ea typeface="Trebuchet MS" pitchFamily="34" charset="-122"/>
                 <a:cs typeface="Trebuchet MS" pitchFamily="34" charset="-120"/>
               </a:rPr>
-              <a:t>eater</a:t>
+              <a:t>eating</a:t>
             </a:r>
             <a:endParaRPr lang="en-US" sz="1400" dirty="0"/>
           </a:p>
@@ -18077,7 +18129,7 @@
                 <a:ea typeface="Trebuchet MS" pitchFamily="34" charset="-122"/>
                 <a:cs typeface="Trebuchet MS" pitchFamily="34" charset="-120"/>
               </a:rPr>
-              <a:t>overeater</a:t>
+              <a:t>Overeating</a:t>
             </a:r>
             <a:endParaRPr lang="en-US" sz="2800" dirty="0"/>
           </a:p>
@@ -18904,7 +18956,7 @@
                 <a:ea typeface="Trebuchet MS" pitchFamily="34" charset="-122"/>
                 <a:cs typeface="Trebuchet MS" pitchFamily="34" charset="-120"/>
               </a:rPr>
-              <a:t>overeater</a:t>
+              <a:t>Overeating</a:t>
             </a:r>
             <a:endParaRPr lang="en-US" sz="2800" dirty="0"/>
           </a:p>
@@ -19082,7 +19134,7 @@
                 <a:ea typeface="Calibri" pitchFamily="34" charset="-122"/>
                 <a:cs typeface="Calibri" pitchFamily="34" charset="-120"/>
               </a:rPr>
-              <a:t>too much, excessive</a:t>
+              <a:t>too much</a:t>
             </a:r>
             <a:endParaRPr lang="en-US" sz="850" dirty="0"/>
           </a:p>
@@ -19267,7 +19319,7 @@
                 <a:ea typeface="Trebuchet MS" pitchFamily="34" charset="-122"/>
                 <a:cs typeface="Trebuchet MS" pitchFamily="34" charset="-120"/>
               </a:rPr>
-              <a:t>er</a:t>
+              <a:t>ing</a:t>
             </a:r>
             <a:endParaRPr lang="en-US" sz="1300" dirty="0"/>
           </a:p>
@@ -19306,7 +19358,7 @@
                 <a:ea typeface="Calibri" pitchFamily="34" charset="-122"/>
                 <a:cs typeface="Calibri" pitchFamily="34" charset="-120"/>
               </a:rPr>
-              <a:t>a person who does something</a:t>
+              <a:t>ongoing action</a:t>
             </a:r>
             <a:endParaRPr lang="en-US" sz="850" dirty="0"/>
           </a:p>
@@ -20001,7 +20053,7 @@
                 <a:ea typeface="Trebuchet MS" pitchFamily="34" charset="-122"/>
                 <a:cs typeface="Trebuchet MS" pitchFamily="34" charset="-120"/>
               </a:rPr>
-              <a:t>overeater</a:t>
+              <a:t>Overeating</a:t>
             </a:r>
             <a:endParaRPr lang="en-US" sz="2800" dirty="0"/>
           </a:p>
@@ -20179,7 +20231,7 @@
                 <a:ea typeface="Calibri" pitchFamily="34" charset="-122"/>
                 <a:cs typeface="Calibri" pitchFamily="34" charset="-120"/>
               </a:rPr>
-              <a:t>too much, excessive</a:t>
+              <a:t>too much</a:t>
             </a:r>
             <a:endParaRPr lang="en-US" sz="850" dirty="0"/>
           </a:p>
@@ -20364,7 +20416,7 @@
                 <a:ea typeface="Trebuchet MS" pitchFamily="34" charset="-122"/>
                 <a:cs typeface="Trebuchet MS" pitchFamily="34" charset="-120"/>
               </a:rPr>
-              <a:t>er</a:t>
+              <a:t>ing</a:t>
             </a:r>
             <a:endParaRPr lang="en-US" sz="1300" dirty="0"/>
           </a:p>
@@ -20403,7 +20455,7 @@
                 <a:ea typeface="Calibri" pitchFamily="34" charset="-122"/>
                 <a:cs typeface="Calibri" pitchFamily="34" charset="-120"/>
               </a:rPr>
-              <a:t>a person who does something</a:t>
+              <a:t>ongoing action</a:t>
             </a:r>
             <a:endParaRPr lang="en-US" sz="850" dirty="0"/>
           </a:p>
@@ -20877,7 +20929,7 @@
                 <a:ea typeface="Trebuchet MS" pitchFamily="34" charset="-122"/>
                 <a:cs typeface="Trebuchet MS" pitchFamily="34" charset="-120"/>
               </a:rPr>
-              <a:t>er</a:t>
+              <a:t>ing</a:t>
             </a:r>
             <a:endParaRPr lang="en-US" sz="1400" dirty="0"/>
           </a:p>
@@ -21440,7 +21492,7 @@
                 <a:ea typeface="Trebuchet MS" pitchFamily="34" charset="-122"/>
                 <a:cs typeface="Trebuchet MS" pitchFamily="34" charset="-120"/>
               </a:rPr>
-              <a:t>overeater</a:t>
+              <a:t>Overeating</a:t>
             </a:r>
             <a:endParaRPr lang="en-US" sz="2800" dirty="0"/>
           </a:p>
@@ -21618,7 +21670,7 @@
                 <a:ea typeface="Calibri" pitchFamily="34" charset="-122"/>
                 <a:cs typeface="Calibri" pitchFamily="34" charset="-120"/>
               </a:rPr>
-              <a:t>too much, excessive</a:t>
+              <a:t>too much</a:t>
             </a:r>
             <a:endParaRPr lang="en-US" sz="850" dirty="0"/>
           </a:p>
@@ -21803,7 +21855,7 @@
                 <a:ea typeface="Trebuchet MS" pitchFamily="34" charset="-122"/>
                 <a:cs typeface="Trebuchet MS" pitchFamily="34" charset="-120"/>
               </a:rPr>
-              <a:t>er</a:t>
+              <a:t>ing</a:t>
             </a:r>
             <a:endParaRPr lang="en-US" sz="1300" dirty="0"/>
           </a:p>
@@ -21842,7 +21894,7 @@
                 <a:ea typeface="Calibri" pitchFamily="34" charset="-122"/>
                 <a:cs typeface="Calibri" pitchFamily="34" charset="-120"/>
               </a:rPr>
-              <a:t>a person who does something</a:t>
+              <a:t>ongoing action</a:t>
             </a:r>
             <a:endParaRPr lang="en-US" sz="850" dirty="0"/>
           </a:p>
@@ -22316,7 +22368,7 @@
                 <a:ea typeface="Trebuchet MS" pitchFamily="34" charset="-122"/>
                 <a:cs typeface="Trebuchet MS" pitchFamily="34" charset="-120"/>
               </a:rPr>
-              <a:t>er</a:t>
+              <a:t>ing</a:t>
             </a:r>
             <a:endParaRPr lang="en-US" sz="1400" dirty="0"/>
           </a:p>
@@ -22423,7 +22475,7 @@
         </p:nvSpPr>
         <p:spPr>
           <a:xfrm>
-            <a:off x="2254649" y="4169664"/>
+            <a:off x="2124837" y="4169664"/>
             <a:ext cx="685800" cy="475488"/>
           </a:xfrm>
           <a:prstGeom prst="rect">
@@ -22450,7 +22502,7 @@
         </p:nvSpPr>
         <p:spPr>
           <a:xfrm>
-            <a:off x="2254649" y="4169664"/>
+            <a:off x="2124837" y="4169664"/>
             <a:ext cx="685800" cy="475488"/>
           </a:xfrm>
           <a:prstGeom prst="rect">
@@ -22489,7 +22541,7 @@
         </p:nvSpPr>
         <p:spPr>
           <a:xfrm>
-            <a:off x="3293146" y="4169664"/>
+            <a:off x="3033522" y="4169664"/>
             <a:ext cx="685800" cy="475488"/>
           </a:xfrm>
           <a:prstGeom prst="rect">
@@ -22516,7 +22568,7 @@
         </p:nvSpPr>
         <p:spPr>
           <a:xfrm>
-            <a:off x="3293146" y="4169664"/>
+            <a:off x="3033522" y="4169664"/>
             <a:ext cx="685800" cy="475488"/>
           </a:xfrm>
           <a:prstGeom prst="rect">
@@ -22555,7 +22607,7 @@
         </p:nvSpPr>
         <p:spPr>
           <a:xfrm>
-            <a:off x="4331643" y="4169664"/>
+            <a:off x="3942207" y="4169664"/>
             <a:ext cx="685800" cy="475488"/>
           </a:xfrm>
           <a:prstGeom prst="rect">
@@ -22582,7 +22634,7 @@
         </p:nvSpPr>
         <p:spPr>
           <a:xfrm>
-            <a:off x="4331643" y="4169664"/>
+            <a:off x="3942207" y="4169664"/>
             <a:ext cx="685800" cy="475488"/>
           </a:xfrm>
           <a:prstGeom prst="rect">
@@ -22621,7 +22673,7 @@
         </p:nvSpPr>
         <p:spPr>
           <a:xfrm>
-            <a:off x="5370141" y="4169664"/>
+            <a:off x="4850892" y="4169664"/>
             <a:ext cx="685800" cy="475488"/>
           </a:xfrm>
           <a:prstGeom prst="rect">
@@ -22648,7 +22700,7 @@
         </p:nvSpPr>
         <p:spPr>
           <a:xfrm>
-            <a:off x="5370141" y="4169664"/>
+            <a:off x="4850892" y="4169664"/>
             <a:ext cx="685800" cy="475488"/>
           </a:xfrm>
           <a:prstGeom prst="rect">
@@ -22687,7 +22739,7 @@
         </p:nvSpPr>
         <p:spPr>
           <a:xfrm>
-            <a:off x="6408638" y="4169664"/>
+            <a:off x="5759577" y="4169664"/>
             <a:ext cx="685800" cy="475488"/>
           </a:xfrm>
           <a:prstGeom prst="rect">
@@ -22714,7 +22766,7 @@
         </p:nvSpPr>
         <p:spPr>
           <a:xfrm>
-            <a:off x="6408638" y="4169664"/>
+            <a:off x="5759577" y="4169664"/>
             <a:ext cx="685800" cy="475488"/>
           </a:xfrm>
           <a:prstGeom prst="rect">
@@ -22753,7 +22805,7 @@
         </p:nvSpPr>
         <p:spPr>
           <a:xfrm>
-            <a:off x="7447135" y="4169664"/>
+            <a:off x="6668262" y="4169664"/>
             <a:ext cx="685800" cy="475488"/>
           </a:xfrm>
           <a:prstGeom prst="rect">
@@ -22780,7 +22832,7 @@
         </p:nvSpPr>
         <p:spPr>
           <a:xfrm>
-            <a:off x="7447135" y="4169664"/>
+            <a:off x="6668262" y="4169664"/>
             <a:ext cx="685800" cy="475488"/>
           </a:xfrm>
           <a:prstGeom prst="rect">
@@ -22805,7 +22857,73 @@
                 <a:ea typeface="Trebuchet MS" pitchFamily="34" charset="-122"/>
                 <a:cs typeface="Trebuchet MS" pitchFamily="34" charset="-120"/>
               </a:rPr>
-              <a:t>er</a:t>
+              <a:t>i</a:t>
+            </a:r>
+            <a:endParaRPr lang="en-US" sz="900" dirty="0"/>
+          </a:p>
+        </p:txBody>
+      </p:sp>
+      <p:sp>
+        <p:nvSpPr>
+          <p:cNvPr id="54" name="Shape 52"/>
+          <p:cNvSpPr/>
+          <p:nvPr/>
+        </p:nvSpPr>
+        <p:spPr>
+          <a:xfrm>
+            <a:off x="7576947" y="4169664"/>
+            <a:ext cx="685800" cy="475488"/>
+          </a:xfrm>
+          <a:prstGeom prst="rect">
+            <a:avLst>
+              <a:gd name="adj" fmla="val 7692"/>
+            </a:avLst>
+          </a:prstGeom>
+          <a:solidFill>
+            <a:srgbClr val="FFFFFF"/>
+          </a:solidFill>
+          <a:ln w="12700">
+            <a:solidFill>
+              <a:srgbClr val="DB2777"/>
+            </a:solidFill>
+            <a:prstDash val="solid"/>
+          </a:ln>
+        </p:spPr>
+      </p:sp>
+      <p:sp>
+        <p:nvSpPr>
+          <p:cNvPr id="55" name="Text 53"/>
+          <p:cNvSpPr/>
+          <p:nvPr/>
+        </p:nvSpPr>
+        <p:spPr>
+          <a:xfrm>
+            <a:off x="7576947" y="4169664"/>
+            <a:ext cx="685800" cy="475488"/>
+          </a:xfrm>
+          <a:prstGeom prst="rect">
+            <a:avLst/>
+          </a:prstGeom>
+          <a:noFill/>
+          <a:ln/>
+        </p:spPr>
+        <p:txBody>
+          <a:bodyPr wrap="square" lIns="0" tIns="0" rIns="0" bIns="0" rtlCol="0" anchor="ctr"/>
+          <a:lstStyle/>
+          <a:p>
+            <a:pPr algn="ctr" indent="0" marL="0">
+              <a:buNone/>
+            </a:pPr>
+            <a:r>
+              <a:rPr lang="en-US" sz="900" b="1" dirty="0">
+                <a:solidFill>
+                  <a:srgbClr val="9D174D"/>
+                </a:solidFill>
+                <a:latin typeface="Trebuchet MS" pitchFamily="34" charset="0"/>
+                <a:ea typeface="Trebuchet MS" pitchFamily="34" charset="-122"/>
+                <a:cs typeface="Trebuchet MS" pitchFamily="34" charset="-120"/>
+              </a:rPr>
+              <a:t>ng</a:t>
             </a:r>
             <a:endParaRPr lang="en-US" sz="900" dirty="0"/>
           </a:p>
@@ -23236,7 +23354,7 @@
                 <a:ea typeface="Trebuchet MS" pitchFamily="34" charset="-122"/>
                 <a:cs typeface="Trebuchet MS" pitchFamily="34" charset="-120"/>
               </a:rPr>
-              <a:t>uneaten</a:t>
+              <a:t>reheating</a:t>
             </a:r>
             <a:endParaRPr lang="en-US" sz="2800" dirty="0"/>
           </a:p>
@@ -24063,7 +24181,7 @@
                 <a:ea typeface="Trebuchet MS" pitchFamily="34" charset="-122"/>
                 <a:cs typeface="Trebuchet MS" pitchFamily="34" charset="-120"/>
               </a:rPr>
-              <a:t>uneaten</a:t>
+              <a:t>reheating</a:t>
             </a:r>
             <a:endParaRPr lang="en-US" sz="2800" dirty="0"/>
           </a:p>
@@ -24202,7 +24320,7 @@
                 <a:ea typeface="Trebuchet MS" pitchFamily="34" charset="-122"/>
                 <a:cs typeface="Trebuchet MS" pitchFamily="34" charset="-120"/>
               </a:rPr>
-              <a:t>un</a:t>
+              <a:t>re</a:t>
             </a:r>
             <a:endParaRPr lang="en-US" sz="1300" dirty="0"/>
           </a:p>
@@ -24241,7 +24359,7 @@
                 <a:ea typeface="Calibri" pitchFamily="34" charset="-122"/>
                 <a:cs typeface="Calibri" pitchFamily="34" charset="-120"/>
               </a:rPr>
-              <a:t>not</a:t>
+              <a:t>again</a:t>
             </a:r>
             <a:endParaRPr lang="en-US" sz="850" dirty="0"/>
           </a:p>
@@ -24264,11 +24382,11 @@
             </a:avLst>
           </a:prstGeom>
           <a:solidFill>
-            <a:srgbClr val="CCFBF1"/>
+            <a:srgbClr val="FCE7F3"/>
           </a:solidFill>
           <a:ln w="19050">
             <a:solidFill>
-              <a:srgbClr val="0D9488"/>
+              <a:srgbClr val="DB2777"/>
             </a:solidFill>
             <a:prstDash val="solid"/>
           </a:ln>
@@ -24308,13 +24426,13 @@
             <a:r>
               <a:rPr lang="en-US" sz="1300" b="1" dirty="0">
                 <a:solidFill>
-                  <a:srgbClr val="0F766E"/>
+                  <a:srgbClr val="9D174D"/>
                 </a:solidFill>
                 <a:latin typeface="Trebuchet MS" pitchFamily="34" charset="0"/>
                 <a:ea typeface="Trebuchet MS" pitchFamily="34" charset="-122"/>
                 <a:cs typeface="Trebuchet MS" pitchFamily="34" charset="-120"/>
               </a:rPr>
-              <a:t>eat</a:t>
+              <a:t>heat</a:t>
             </a:r>
             <a:endParaRPr lang="en-US" sz="1300" dirty="0"/>
           </a:p>
@@ -24353,7 +24471,7 @@
                 <a:ea typeface="Calibri" pitchFamily="34" charset="-122"/>
                 <a:cs typeface="Calibri" pitchFamily="34" charset="-120"/>
               </a:rPr>
-              <a:t>to consume food</a:t>
+              <a:t>warmth or warmth applied to food</a:t>
             </a:r>
             <a:endParaRPr lang="en-US" sz="850" dirty="0"/>
           </a:p>
@@ -24426,7 +24544,7 @@
                 <a:ea typeface="Trebuchet MS" pitchFamily="34" charset="-122"/>
                 <a:cs typeface="Trebuchet MS" pitchFamily="34" charset="-120"/>
               </a:rPr>
-              <a:t>en</a:t>
+              <a:t>ing</a:t>
             </a:r>
             <a:endParaRPr lang="en-US" sz="1300" dirty="0"/>
           </a:p>
@@ -24465,7 +24583,7 @@
                 <a:ea typeface="Calibri" pitchFamily="34" charset="-122"/>
                 <a:cs typeface="Calibri" pitchFamily="34" charset="-120"/>
               </a:rPr>
-              <a:t>done to, past participle</a:t>
+              <a:t>ongoing action</a:t>
             </a:r>
             <a:endParaRPr lang="en-US" sz="850" dirty="0"/>
           </a:p>
@@ -25879,7 +25997,7 @@
                 <a:ea typeface="Trebuchet MS" pitchFamily="34" charset="-122"/>
                 <a:cs typeface="Trebuchet MS" pitchFamily="34" charset="-120"/>
               </a:rPr>
-              <a:t>uneaten</a:t>
+              <a:t>reheating</a:t>
             </a:r>
             <a:endParaRPr lang="en-US" sz="2800" dirty="0"/>
           </a:p>
@@ -26018,7 +26136,7 @@
                 <a:ea typeface="Trebuchet MS" pitchFamily="34" charset="-122"/>
                 <a:cs typeface="Trebuchet MS" pitchFamily="34" charset="-120"/>
               </a:rPr>
-              <a:t>un</a:t>
+              <a:t>re</a:t>
             </a:r>
             <a:endParaRPr lang="en-US" sz="1300" dirty="0"/>
           </a:p>
@@ -26057,7 +26175,7 @@
                 <a:ea typeface="Calibri" pitchFamily="34" charset="-122"/>
                 <a:cs typeface="Calibri" pitchFamily="34" charset="-120"/>
               </a:rPr>
-              <a:t>not</a:t>
+              <a:t>again</a:t>
             </a:r>
             <a:endParaRPr lang="en-US" sz="850" dirty="0"/>
           </a:p>
@@ -26080,11 +26198,11 @@
             </a:avLst>
           </a:prstGeom>
           <a:solidFill>
-            <a:srgbClr val="CCFBF1"/>
+            <a:srgbClr val="FCE7F3"/>
           </a:solidFill>
           <a:ln w="19050">
             <a:solidFill>
-              <a:srgbClr val="0D9488"/>
+              <a:srgbClr val="DB2777"/>
             </a:solidFill>
             <a:prstDash val="solid"/>
           </a:ln>
@@ -26124,13 +26242,13 @@
             <a:r>
               <a:rPr lang="en-US" sz="1300" b="1" dirty="0">
                 <a:solidFill>
-                  <a:srgbClr val="0F766E"/>
+                  <a:srgbClr val="9D174D"/>
                 </a:solidFill>
                 <a:latin typeface="Trebuchet MS" pitchFamily="34" charset="0"/>
                 <a:ea typeface="Trebuchet MS" pitchFamily="34" charset="-122"/>
                 <a:cs typeface="Trebuchet MS" pitchFamily="34" charset="-120"/>
               </a:rPr>
-              <a:t>eat</a:t>
+              <a:t>heat</a:t>
             </a:r>
             <a:endParaRPr lang="en-US" sz="1300" dirty="0"/>
           </a:p>
@@ -26169,7 +26287,7 @@
                 <a:ea typeface="Calibri" pitchFamily="34" charset="-122"/>
                 <a:cs typeface="Calibri" pitchFamily="34" charset="-120"/>
               </a:rPr>
-              <a:t>to consume food</a:t>
+              <a:t>warmth or warmth applied to food</a:t>
             </a:r>
             <a:endParaRPr lang="en-US" sz="850" dirty="0"/>
           </a:p>
@@ -26242,7 +26360,7 @@
                 <a:ea typeface="Trebuchet MS" pitchFamily="34" charset="-122"/>
                 <a:cs typeface="Trebuchet MS" pitchFamily="34" charset="-120"/>
               </a:rPr>
-              <a:t>en</a:t>
+              <a:t>ing</a:t>
             </a:r>
             <a:endParaRPr lang="en-US" sz="1300" dirty="0"/>
           </a:p>
@@ -26281,7 +26399,7 @@
                 <a:ea typeface="Calibri" pitchFamily="34" charset="-122"/>
                 <a:cs typeface="Calibri" pitchFamily="34" charset="-120"/>
               </a:rPr>
-              <a:t>done to, past participle</a:t>
+              <a:t>ongoing action</a:t>
             </a:r>
             <a:endParaRPr lang="en-US" sz="850" dirty="0"/>
           </a:p>
@@ -26440,7 +26558,7 @@
                 <a:ea typeface="Trebuchet MS" pitchFamily="34" charset="-122"/>
                 <a:cs typeface="Trebuchet MS" pitchFamily="34" charset="-120"/>
               </a:rPr>
-              <a:t>un</a:t>
+              <a:t>re</a:t>
             </a:r>
             <a:endParaRPr lang="en-US" sz="1400" dirty="0"/>
           </a:p>
@@ -26545,7 +26663,7 @@
                 <a:ea typeface="Trebuchet MS" pitchFamily="34" charset="-122"/>
                 <a:cs typeface="Trebuchet MS" pitchFamily="34" charset="-120"/>
               </a:rPr>
-              <a:t>eat</a:t>
+              <a:t>heat</a:t>
             </a:r>
             <a:endParaRPr lang="en-US" sz="1400" dirty="0"/>
           </a:p>
@@ -26650,7 +26768,7 @@
                 <a:ea typeface="Trebuchet MS" pitchFamily="34" charset="-122"/>
                 <a:cs typeface="Trebuchet MS" pitchFamily="34" charset="-120"/>
               </a:rPr>
-              <a:t>en</a:t>
+              <a:t>ing</a:t>
             </a:r>
             <a:endParaRPr lang="en-US" sz="1400" dirty="0"/>
           </a:p>
@@ -27213,7 +27331,7 @@
                 <a:ea typeface="Trebuchet MS" pitchFamily="34" charset="-122"/>
                 <a:cs typeface="Trebuchet MS" pitchFamily="34" charset="-120"/>
               </a:rPr>
-              <a:t>uneaten</a:t>
+              <a:t>reheating</a:t>
             </a:r>
             <a:endParaRPr lang="en-US" sz="2800" dirty="0"/>
           </a:p>
@@ -27352,7 +27470,7 @@
                 <a:ea typeface="Trebuchet MS" pitchFamily="34" charset="-122"/>
                 <a:cs typeface="Trebuchet MS" pitchFamily="34" charset="-120"/>
               </a:rPr>
-              <a:t>un</a:t>
+              <a:t>re</a:t>
             </a:r>
             <a:endParaRPr lang="en-US" sz="1300" dirty="0"/>
           </a:p>
@@ -27391,7 +27509,7 @@
                 <a:ea typeface="Calibri" pitchFamily="34" charset="-122"/>
                 <a:cs typeface="Calibri" pitchFamily="34" charset="-120"/>
               </a:rPr>
-              <a:t>not</a:t>
+              <a:t>again</a:t>
             </a:r>
             <a:endParaRPr lang="en-US" sz="850" dirty="0"/>
           </a:p>
@@ -27414,11 +27532,11 @@
             </a:avLst>
           </a:prstGeom>
           <a:solidFill>
-            <a:srgbClr val="CCFBF1"/>
+            <a:srgbClr val="FCE7F3"/>
           </a:solidFill>
           <a:ln w="19050">
             <a:solidFill>
-              <a:srgbClr val="0D9488"/>
+              <a:srgbClr val="DB2777"/>
             </a:solidFill>
             <a:prstDash val="solid"/>
           </a:ln>
@@ -27458,13 +27576,13 @@
             <a:r>
               <a:rPr lang="en-US" sz="1300" b="1" dirty="0">
                 <a:solidFill>
-                  <a:srgbClr val="0F766E"/>
+                  <a:srgbClr val="9D174D"/>
                 </a:solidFill>
                 <a:latin typeface="Trebuchet MS" pitchFamily="34" charset="0"/>
                 <a:ea typeface="Trebuchet MS" pitchFamily="34" charset="-122"/>
                 <a:cs typeface="Trebuchet MS" pitchFamily="34" charset="-120"/>
               </a:rPr>
-              <a:t>eat</a:t>
+              <a:t>heat</a:t>
             </a:r>
             <a:endParaRPr lang="en-US" sz="1300" dirty="0"/>
           </a:p>
@@ -27503,7 +27621,7 @@
                 <a:ea typeface="Calibri" pitchFamily="34" charset="-122"/>
                 <a:cs typeface="Calibri" pitchFamily="34" charset="-120"/>
               </a:rPr>
-              <a:t>to consume food</a:t>
+              <a:t>warmth or warmth applied to food</a:t>
             </a:r>
             <a:endParaRPr lang="en-US" sz="850" dirty="0"/>
           </a:p>
@@ -27576,7 +27694,7 @@
                 <a:ea typeface="Trebuchet MS" pitchFamily="34" charset="-122"/>
                 <a:cs typeface="Trebuchet MS" pitchFamily="34" charset="-120"/>
               </a:rPr>
-              <a:t>en</a:t>
+              <a:t>ing</a:t>
             </a:r>
             <a:endParaRPr lang="en-US" sz="1300" dirty="0"/>
           </a:p>
@@ -27615,7 +27733,7 @@
                 <a:ea typeface="Calibri" pitchFamily="34" charset="-122"/>
                 <a:cs typeface="Calibri" pitchFamily="34" charset="-120"/>
               </a:rPr>
-              <a:t>done to, past participle</a:t>
+              <a:t>ongoing action</a:t>
             </a:r>
             <a:endParaRPr lang="en-US" sz="850" dirty="0"/>
           </a:p>
@@ -27774,7 +27892,7 @@
                 <a:ea typeface="Trebuchet MS" pitchFamily="34" charset="-122"/>
                 <a:cs typeface="Trebuchet MS" pitchFamily="34" charset="-120"/>
               </a:rPr>
-              <a:t>un</a:t>
+              <a:t>re</a:t>
             </a:r>
             <a:endParaRPr lang="en-US" sz="1400" dirty="0"/>
           </a:p>
@@ -27879,7 +27997,7 @@
                 <a:ea typeface="Trebuchet MS" pitchFamily="34" charset="-122"/>
                 <a:cs typeface="Trebuchet MS" pitchFamily="34" charset="-120"/>
               </a:rPr>
-              <a:t>eat</a:t>
+              <a:t>heat</a:t>
             </a:r>
             <a:endParaRPr lang="en-US" sz="1400" dirty="0"/>
           </a:p>
@@ -27984,7 +28102,7 @@
                 <a:ea typeface="Trebuchet MS" pitchFamily="34" charset="-122"/>
                 <a:cs typeface="Trebuchet MS" pitchFamily="34" charset="-120"/>
               </a:rPr>
-              <a:t>en</a:t>
+              <a:t>ing</a:t>
             </a:r>
             <a:endParaRPr lang="en-US" sz="1400" dirty="0"/>
           </a:p>
@@ -28091,7 +28209,7 @@
         </p:nvSpPr>
         <p:spPr>
           <a:xfrm>
-            <a:off x="2427732" y="4169664"/>
+            <a:off x="2124837" y="4169664"/>
             <a:ext cx="685800" cy="475488"/>
           </a:xfrm>
           <a:prstGeom prst="rect">
@@ -28118,7 +28236,7 @@
         </p:nvSpPr>
         <p:spPr>
           <a:xfrm>
-            <a:off x="2427732" y="4169664"/>
+            <a:off x="2124837" y="4169664"/>
             <a:ext cx="685800" cy="475488"/>
           </a:xfrm>
           <a:prstGeom prst="rect">
@@ -28143,7 +28261,7 @@
                 <a:ea typeface="Trebuchet MS" pitchFamily="34" charset="-122"/>
                 <a:cs typeface="Trebuchet MS" pitchFamily="34" charset="-120"/>
               </a:rPr>
-              <a:t>u</a:t>
+              <a:t>r</a:t>
             </a:r>
             <a:endParaRPr lang="en-US" sz="900" dirty="0"/>
           </a:p>
@@ -28157,7 +28275,7 @@
         </p:nvSpPr>
         <p:spPr>
           <a:xfrm>
-            <a:off x="3639312" y="4169664"/>
+            <a:off x="3033522" y="4169664"/>
             <a:ext cx="685800" cy="475488"/>
           </a:xfrm>
           <a:prstGeom prst="rect">
@@ -28184,7 +28302,7 @@
         </p:nvSpPr>
         <p:spPr>
           <a:xfrm>
-            <a:off x="3639312" y="4169664"/>
+            <a:off x="3033522" y="4169664"/>
             <a:ext cx="685800" cy="475488"/>
           </a:xfrm>
           <a:prstGeom prst="rect">
@@ -28209,7 +28327,7 @@
                 <a:ea typeface="Trebuchet MS" pitchFamily="34" charset="-122"/>
                 <a:cs typeface="Trebuchet MS" pitchFamily="34" charset="-120"/>
               </a:rPr>
-              <a:t>n</a:t>
+              <a:t>e</a:t>
             </a:r>
             <a:endParaRPr lang="en-US" sz="900" dirty="0"/>
           </a:p>
@@ -28223,7 +28341,7 @@
         </p:nvSpPr>
         <p:spPr>
           <a:xfrm>
-            <a:off x="4850892" y="4169664"/>
+            <a:off x="3942207" y="4169664"/>
             <a:ext cx="685800" cy="475488"/>
           </a:xfrm>
           <a:prstGeom prst="rect">
@@ -28250,7 +28368,7 @@
         </p:nvSpPr>
         <p:spPr>
           <a:xfrm>
-            <a:off x="4850892" y="4169664"/>
+            <a:off x="3942207" y="4169664"/>
             <a:ext cx="685800" cy="475488"/>
           </a:xfrm>
           <a:prstGeom prst="rect">
@@ -28275,7 +28393,7 @@
                 <a:ea typeface="Trebuchet MS" pitchFamily="34" charset="-122"/>
                 <a:cs typeface="Trebuchet MS" pitchFamily="34" charset="-120"/>
               </a:rPr>
-              <a:t>ea</a:t>
+              <a:t>h</a:t>
             </a:r>
             <a:endParaRPr lang="en-US" sz="900" dirty="0"/>
           </a:p>
@@ -28289,7 +28407,7 @@
         </p:nvSpPr>
         <p:spPr>
           <a:xfrm>
-            <a:off x="6062472" y="4169664"/>
+            <a:off x="4850892" y="4169664"/>
             <a:ext cx="685800" cy="475488"/>
           </a:xfrm>
           <a:prstGeom prst="rect">
@@ -28316,7 +28434,7 @@
         </p:nvSpPr>
         <p:spPr>
           <a:xfrm>
-            <a:off x="6062472" y="4169664"/>
+            <a:off x="4850892" y="4169664"/>
             <a:ext cx="685800" cy="475488"/>
           </a:xfrm>
           <a:prstGeom prst="rect">
@@ -28341,7 +28459,7 @@
                 <a:ea typeface="Trebuchet MS" pitchFamily="34" charset="-122"/>
                 <a:cs typeface="Trebuchet MS" pitchFamily="34" charset="-120"/>
               </a:rPr>
-              <a:t>t</a:t>
+              <a:t>ea</a:t>
             </a:r>
             <a:endParaRPr lang="en-US" sz="900" dirty="0"/>
           </a:p>
@@ -28355,7 +28473,7 @@
         </p:nvSpPr>
         <p:spPr>
           <a:xfrm>
-            <a:off x="7274052" y="4169664"/>
+            <a:off x="5759577" y="4169664"/>
             <a:ext cx="685800" cy="475488"/>
           </a:xfrm>
           <a:prstGeom prst="rect">
@@ -28382,7 +28500,7 @@
         </p:nvSpPr>
         <p:spPr>
           <a:xfrm>
-            <a:off x="7274052" y="4169664"/>
+            <a:off x="5759577" y="4169664"/>
             <a:ext cx="685800" cy="475488"/>
           </a:xfrm>
           <a:prstGeom prst="rect">
@@ -28407,7 +28525,139 @@
                 <a:ea typeface="Trebuchet MS" pitchFamily="34" charset="-122"/>
                 <a:cs typeface="Trebuchet MS" pitchFamily="34" charset="-120"/>
               </a:rPr>
-              <a:t>en</a:t>
+              <a:t>t</a:t>
+            </a:r>
+            <a:endParaRPr lang="en-US" sz="900" dirty="0"/>
+          </a:p>
+        </p:txBody>
+      </p:sp>
+      <p:sp>
+        <p:nvSpPr>
+          <p:cNvPr id="49" name="Shape 47"/>
+          <p:cNvSpPr/>
+          <p:nvPr/>
+        </p:nvSpPr>
+        <p:spPr>
+          <a:xfrm>
+            <a:off x="6668262" y="4169664"/>
+            <a:ext cx="685800" cy="475488"/>
+          </a:xfrm>
+          <a:prstGeom prst="rect">
+            <a:avLst>
+              <a:gd name="adj" fmla="val 7692"/>
+            </a:avLst>
+          </a:prstGeom>
+          <a:solidFill>
+            <a:srgbClr val="FFFFFF"/>
+          </a:solidFill>
+          <a:ln w="12700">
+            <a:solidFill>
+              <a:srgbClr val="DB2777"/>
+            </a:solidFill>
+            <a:prstDash val="solid"/>
+          </a:ln>
+        </p:spPr>
+      </p:sp>
+      <p:sp>
+        <p:nvSpPr>
+          <p:cNvPr id="50" name="Text 48"/>
+          <p:cNvSpPr/>
+          <p:nvPr/>
+        </p:nvSpPr>
+        <p:spPr>
+          <a:xfrm>
+            <a:off x="6668262" y="4169664"/>
+            <a:ext cx="685800" cy="475488"/>
+          </a:xfrm>
+          <a:prstGeom prst="rect">
+            <a:avLst/>
+          </a:prstGeom>
+          <a:noFill/>
+          <a:ln/>
+        </p:spPr>
+        <p:txBody>
+          <a:bodyPr wrap="square" lIns="0" tIns="0" rIns="0" bIns="0" rtlCol="0" anchor="ctr"/>
+          <a:lstStyle/>
+          <a:p>
+            <a:pPr algn="ctr" indent="0" marL="0">
+              <a:buNone/>
+            </a:pPr>
+            <a:r>
+              <a:rPr lang="en-US" sz="900" b="1" dirty="0">
+                <a:solidFill>
+                  <a:srgbClr val="9D174D"/>
+                </a:solidFill>
+                <a:latin typeface="Trebuchet MS" pitchFamily="34" charset="0"/>
+                <a:ea typeface="Trebuchet MS" pitchFamily="34" charset="-122"/>
+                <a:cs typeface="Trebuchet MS" pitchFamily="34" charset="-120"/>
+              </a:rPr>
+              <a:t>i</a:t>
+            </a:r>
+            <a:endParaRPr lang="en-US" sz="900" dirty="0"/>
+          </a:p>
+        </p:txBody>
+      </p:sp>
+      <p:sp>
+        <p:nvSpPr>
+          <p:cNvPr id="51" name="Shape 49"/>
+          <p:cNvSpPr/>
+          <p:nvPr/>
+        </p:nvSpPr>
+        <p:spPr>
+          <a:xfrm>
+            <a:off x="7576947" y="4169664"/>
+            <a:ext cx="685800" cy="475488"/>
+          </a:xfrm>
+          <a:prstGeom prst="rect">
+            <a:avLst>
+              <a:gd name="adj" fmla="val 7692"/>
+            </a:avLst>
+          </a:prstGeom>
+          <a:solidFill>
+            <a:srgbClr val="FFFFFF"/>
+          </a:solidFill>
+          <a:ln w="12700">
+            <a:solidFill>
+              <a:srgbClr val="DB2777"/>
+            </a:solidFill>
+            <a:prstDash val="solid"/>
+          </a:ln>
+        </p:spPr>
+      </p:sp>
+      <p:sp>
+        <p:nvSpPr>
+          <p:cNvPr id="52" name="Text 50"/>
+          <p:cNvSpPr/>
+          <p:nvPr/>
+        </p:nvSpPr>
+        <p:spPr>
+          <a:xfrm>
+            <a:off x="7576947" y="4169664"/>
+            <a:ext cx="685800" cy="475488"/>
+          </a:xfrm>
+          <a:prstGeom prst="rect">
+            <a:avLst/>
+          </a:prstGeom>
+          <a:noFill/>
+          <a:ln/>
+        </p:spPr>
+        <p:txBody>
+          <a:bodyPr wrap="square" lIns="0" tIns="0" rIns="0" bIns="0" rtlCol="0" anchor="ctr"/>
+          <a:lstStyle/>
+          <a:p>
+            <a:pPr algn="ctr" indent="0" marL="0">
+              <a:buNone/>
+            </a:pPr>
+            <a:r>
+              <a:rPr lang="en-US" sz="900" b="1" dirty="0">
+                <a:solidFill>
+                  <a:srgbClr val="9D174D"/>
+                </a:solidFill>
+                <a:latin typeface="Trebuchet MS" pitchFamily="34" charset="0"/>
+                <a:ea typeface="Trebuchet MS" pitchFamily="34" charset="-122"/>
+                <a:cs typeface="Trebuchet MS" pitchFamily="34" charset="-120"/>
+              </a:rPr>
+              <a:t>ng</a:t>
             </a:r>
             <a:endParaRPr lang="en-US" sz="900" dirty="0"/>
           </a:p>
@@ -28838,7 +29088,7 @@
                 <a:ea typeface="Trebuchet MS" pitchFamily="34" charset="-122"/>
                 <a:cs typeface="Trebuchet MS" pitchFamily="34" charset="-120"/>
               </a:rPr>
-              <a:t>eater</a:t>
+              <a:t>eating</a:t>
             </a:r>
             <a:endParaRPr lang="en-US" sz="2800" dirty="0"/>
           </a:p>
@@ -29665,7 +29915,7 @@
                 <a:ea typeface="Trebuchet MS" pitchFamily="34" charset="-122"/>
                 <a:cs typeface="Trebuchet MS" pitchFamily="34" charset="-120"/>
               </a:rPr>
-              <a:t>eater</a:t>
+              <a:t>eating</a:t>
             </a:r>
             <a:endParaRPr lang="en-US" sz="2800" dirty="0"/>
           </a:p>
@@ -29916,7 +30166,7 @@
                 <a:ea typeface="Trebuchet MS" pitchFamily="34" charset="-122"/>
                 <a:cs typeface="Trebuchet MS" pitchFamily="34" charset="-120"/>
               </a:rPr>
-              <a:t>er</a:t>
+              <a:t>ing</a:t>
             </a:r>
             <a:endParaRPr lang="en-US" sz="1300" dirty="0"/>
           </a:p>
@@ -29955,7 +30205,7 @@
                 <a:ea typeface="Calibri" pitchFamily="34" charset="-122"/>
                 <a:cs typeface="Calibri" pitchFamily="34" charset="-120"/>
               </a:rPr>
-              <a:t>a person who does something</a:t>
+              <a:t>ongoing action</a:t>
             </a:r>
             <a:endParaRPr lang="en-US" sz="850" dirty="0"/>
           </a:p>
@@ -30650,7 +30900,7 @@
                 <a:ea typeface="Trebuchet MS" pitchFamily="34" charset="-122"/>
                 <a:cs typeface="Trebuchet MS" pitchFamily="34" charset="-120"/>
               </a:rPr>
-              <a:t>eater</a:t>
+              <a:t>eating</a:t>
             </a:r>
             <a:endParaRPr lang="en-US" sz="2800" dirty="0"/>
           </a:p>
@@ -30901,7 +31151,7 @@
                 <a:ea typeface="Trebuchet MS" pitchFamily="34" charset="-122"/>
                 <a:cs typeface="Trebuchet MS" pitchFamily="34" charset="-120"/>
               </a:rPr>
-              <a:t>er</a:t>
+              <a:t>ing</a:t>
             </a:r>
             <a:endParaRPr lang="en-US" sz="1300" dirty="0"/>
           </a:p>
@@ -30940,7 +31190,7 @@
                 <a:ea typeface="Calibri" pitchFamily="34" charset="-122"/>
                 <a:cs typeface="Calibri" pitchFamily="34" charset="-120"/>
               </a:rPr>
-              <a:t>a person who does something</a:t>
+              <a:t>ongoing action</a:t>
             </a:r>
             <a:endParaRPr lang="en-US" sz="850" dirty="0"/>
           </a:p>
@@ -31204,7 +31454,7 @@
                 <a:ea typeface="Trebuchet MS" pitchFamily="34" charset="-122"/>
                 <a:cs typeface="Trebuchet MS" pitchFamily="34" charset="-120"/>
               </a:rPr>
-              <a:t>er</a:t>
+              <a:t>ing</a:t>
             </a:r>
             <a:endParaRPr lang="en-US" sz="1400" dirty="0"/>
           </a:p>
@@ -31767,7 +32017,7 @@
                 <a:ea typeface="Trebuchet MS" pitchFamily="34" charset="-122"/>
                 <a:cs typeface="Trebuchet MS" pitchFamily="34" charset="-120"/>
               </a:rPr>
-              <a:t>eater</a:t>
+              <a:t>eating</a:t>
             </a:r>
             <a:endParaRPr lang="en-US" sz="2800" dirty="0"/>
           </a:p>
@@ -32018,7 +32268,7 @@
                 <a:ea typeface="Trebuchet MS" pitchFamily="34" charset="-122"/>
                 <a:cs typeface="Trebuchet MS" pitchFamily="34" charset="-120"/>
               </a:rPr>
-              <a:t>er</a:t>
+              <a:t>ing</a:t>
             </a:r>
             <a:endParaRPr lang="en-US" sz="1300" dirty="0"/>
           </a:p>
@@ -32057,7 +32307,7 @@
                 <a:ea typeface="Calibri" pitchFamily="34" charset="-122"/>
                 <a:cs typeface="Calibri" pitchFamily="34" charset="-120"/>
               </a:rPr>
-              <a:t>a person who does something</a:t>
+              <a:t>ongoing action</a:t>
             </a:r>
             <a:endParaRPr lang="en-US" sz="850" dirty="0"/>
           </a:p>
@@ -32321,7 +32571,7 @@
                 <a:ea typeface="Trebuchet MS" pitchFamily="34" charset="-122"/>
                 <a:cs typeface="Trebuchet MS" pitchFamily="34" charset="-120"/>
               </a:rPr>
-              <a:t>er</a:t>
+              <a:t>ing</a:t>
             </a:r>
             <a:endParaRPr lang="en-US" sz="1400" dirty="0"/>
           </a:p>
@@ -32428,7 +32678,7 @@
         </p:nvSpPr>
         <p:spPr>
           <a:xfrm>
-            <a:off x="3033522" y="4169664"/>
+            <a:off x="2670048" y="4169664"/>
             <a:ext cx="685800" cy="475488"/>
           </a:xfrm>
           <a:prstGeom prst="rect">
@@ -32455,7 +32705,7 @@
         </p:nvSpPr>
         <p:spPr>
           <a:xfrm>
-            <a:off x="3033522" y="4169664"/>
+            <a:off x="2670048" y="4169664"/>
             <a:ext cx="685800" cy="475488"/>
           </a:xfrm>
           <a:prstGeom prst="rect">
@@ -32472,7 +32722,7 @@
               <a:buNone/>
             </a:pPr>
             <a:r>
-              <a:rPr lang="en-US" sz="1000" b="1" dirty="0">
+              <a:rPr lang="en-US" sz="900" b="1" dirty="0">
                 <a:solidFill>
                   <a:srgbClr val="9D174D"/>
                 </a:solidFill>
@@ -32482,7 +32732,7 @@
               </a:rPr>
               <a:t>ea</a:t>
             </a:r>
-            <a:endParaRPr lang="en-US" sz="1000" dirty="0"/>
+            <a:endParaRPr lang="en-US" sz="900" dirty="0"/>
           </a:p>
         </p:txBody>
       </p:sp>
@@ -32494,7 +32744,7 @@
         </p:nvSpPr>
         <p:spPr>
           <a:xfrm>
-            <a:off x="4850892" y="4169664"/>
+            <a:off x="4123944" y="4169664"/>
             <a:ext cx="685800" cy="475488"/>
           </a:xfrm>
           <a:prstGeom prst="rect">
@@ -32521,7 +32771,7 @@
         </p:nvSpPr>
         <p:spPr>
           <a:xfrm>
-            <a:off x="4850892" y="4169664"/>
+            <a:off x="4123944" y="4169664"/>
             <a:ext cx="685800" cy="475488"/>
           </a:xfrm>
           <a:prstGeom prst="rect">
@@ -32538,7 +32788,7 @@
               <a:buNone/>
             </a:pPr>
             <a:r>
-              <a:rPr lang="en-US" sz="1000" b="1" dirty="0">
+              <a:rPr lang="en-US" sz="900" b="1" dirty="0">
                 <a:solidFill>
                   <a:srgbClr val="9D174D"/>
                 </a:solidFill>
@@ -32548,7 +32798,7 @@
               </a:rPr>
               <a:t>t</a:t>
             </a:r>
-            <a:endParaRPr lang="en-US" sz="1000" dirty="0"/>
+            <a:endParaRPr lang="en-US" sz="900" dirty="0"/>
           </a:p>
         </p:txBody>
       </p:sp>
@@ -32560,7 +32810,7 @@
         </p:nvSpPr>
         <p:spPr>
           <a:xfrm>
-            <a:off x="6668262" y="4169664"/>
+            <a:off x="5577840" y="4169664"/>
             <a:ext cx="685800" cy="475488"/>
           </a:xfrm>
           <a:prstGeom prst="rect">
@@ -32587,7 +32837,7 @@
         </p:nvSpPr>
         <p:spPr>
           <a:xfrm>
-            <a:off x="6668262" y="4169664"/>
+            <a:off x="5577840" y="4169664"/>
             <a:ext cx="685800" cy="475488"/>
           </a:xfrm>
           <a:prstGeom prst="rect">
@@ -32604,7 +32854,7 @@
               <a:buNone/>
             </a:pPr>
             <a:r>
-              <a:rPr lang="en-US" sz="1000" b="1" dirty="0">
+              <a:rPr lang="en-US" sz="900" b="1" dirty="0">
                 <a:solidFill>
                   <a:srgbClr val="9D174D"/>
                 </a:solidFill>
@@ -32612,9 +32862,75 @@
                 <a:ea typeface="Trebuchet MS" pitchFamily="34" charset="-122"/>
                 <a:cs typeface="Trebuchet MS" pitchFamily="34" charset="-120"/>
               </a:rPr>
-              <a:t>er</a:t>
-            </a:r>
-            <a:endParaRPr lang="en-US" sz="1000" dirty="0"/>
+              <a:t>i</a:t>
+            </a:r>
+            <a:endParaRPr lang="en-US" sz="900" dirty="0"/>
+          </a:p>
+        </p:txBody>
+      </p:sp>
+      <p:sp>
+        <p:nvSpPr>
+          <p:cNvPr id="39" name="Shape 37"/>
+          <p:cNvSpPr/>
+          <p:nvPr/>
+        </p:nvSpPr>
+        <p:spPr>
+          <a:xfrm>
+            <a:off x="7031736" y="4169664"/>
+            <a:ext cx="685800" cy="475488"/>
+          </a:xfrm>
+          <a:prstGeom prst="rect">
+            <a:avLst>
+              <a:gd name="adj" fmla="val 7692"/>
+            </a:avLst>
+          </a:prstGeom>
+          <a:solidFill>
+            <a:srgbClr val="FFFFFF"/>
+          </a:solidFill>
+          <a:ln w="12700">
+            <a:solidFill>
+              <a:srgbClr val="DB2777"/>
+            </a:solidFill>
+            <a:prstDash val="solid"/>
+          </a:ln>
+        </p:spPr>
+      </p:sp>
+      <p:sp>
+        <p:nvSpPr>
+          <p:cNvPr id="40" name="Text 38"/>
+          <p:cNvSpPr/>
+          <p:nvPr/>
+        </p:nvSpPr>
+        <p:spPr>
+          <a:xfrm>
+            <a:off x="7031736" y="4169664"/>
+            <a:ext cx="685800" cy="475488"/>
+          </a:xfrm>
+          <a:prstGeom prst="rect">
+            <a:avLst/>
+          </a:prstGeom>
+          <a:noFill/>
+          <a:ln/>
+        </p:spPr>
+        <p:txBody>
+          <a:bodyPr wrap="square" lIns="0" tIns="0" rIns="0" bIns="0" rtlCol="0" anchor="ctr"/>
+          <a:lstStyle/>
+          <a:p>
+            <a:pPr algn="ctr" indent="0" marL="0">
+              <a:buNone/>
+            </a:pPr>
+            <a:r>
+              <a:rPr lang="en-US" sz="900" b="1" dirty="0">
+                <a:solidFill>
+                  <a:srgbClr val="9D174D"/>
+                </a:solidFill>
+                <a:latin typeface="Trebuchet MS" pitchFamily="34" charset="0"/>
+                <a:ea typeface="Trebuchet MS" pitchFamily="34" charset="-122"/>
+                <a:cs typeface="Trebuchet MS" pitchFamily="34" charset="-120"/>
+              </a:rPr>
+              <a:t>ng</a:t>
+            </a:r>
+            <a:endParaRPr lang="en-US" sz="900" dirty="0"/>
           </a:p>
         </p:txBody>
       </p:sp>
@@ -34566,7 +34882,7 @@
                 <a:ea typeface="Trebuchet MS" pitchFamily="34" charset="-122"/>
                 <a:cs typeface="Trebuchet MS" pitchFamily="34" charset="-120"/>
               </a:rPr>
-              <a:t>under-</a:t>
+              <a:t>un-</a:t>
             </a:r>
             <a:endParaRPr lang="en-US" sz="1300" dirty="0"/>
           </a:p>
@@ -34655,7 +34971,7 @@
                 <a:ea typeface="Trebuchet MS" pitchFamily="34" charset="-122"/>
                 <a:cs typeface="Trebuchet MS" pitchFamily="34" charset="-120"/>
               </a:rPr>
-              <a:t>-en</a:t>
+              <a:t>-ing</a:t>
             </a:r>
             <a:endParaRPr lang="en-US" sz="1300" dirty="0"/>
           </a:p>
@@ -34808,7 +35124,7 @@
                 <a:ea typeface="Trebuchet MS" pitchFamily="34" charset="-122"/>
                 <a:cs typeface="Trebuchet MS" pitchFamily="34" charset="-120"/>
               </a:rPr>
-              <a:t>-ing</a:t>
+              <a:t>-en</a:t>
             </a:r>
             <a:endParaRPr lang="en-US" sz="1300" dirty="0"/>
           </a:p>
@@ -34872,7 +35188,7 @@
                 <a:ea typeface="Trebuchet MS" pitchFamily="34" charset="-122"/>
                 <a:cs typeface="Trebuchet MS" pitchFamily="34" charset="-120"/>
               </a:rPr>
-              <a:t>un-</a:t>
+              <a:t>out-</a:t>
             </a:r>
             <a:endParaRPr lang="en-US" sz="1300" dirty="0"/>
           </a:p>
@@ -35025,7 +35341,7 @@
                 <a:ea typeface="Trebuchet MS" pitchFamily="34" charset="-122"/>
                 <a:cs typeface="Trebuchet MS" pitchFamily="34" charset="-120"/>
               </a:rPr>
-              <a:t>out-</a:t>
+              <a:t>under-</a:t>
             </a:r>
             <a:endParaRPr lang="en-US" sz="1300" dirty="0"/>
           </a:p>
@@ -35114,7 +35430,7 @@
                 <a:ea typeface="Trebuchet MS" pitchFamily="34" charset="-122"/>
                 <a:cs typeface="Trebuchet MS" pitchFamily="34" charset="-120"/>
               </a:rPr>
-              <a:t>-s</a:t>
+              <a:t>-en</a:t>
             </a:r>
             <a:endParaRPr lang="en-US" sz="1300" dirty="0"/>
           </a:p>
@@ -35417,7 +35733,7 @@
                 <a:ea typeface="Trebuchet MS" pitchFamily="34" charset="-122"/>
                 <a:cs typeface="Trebuchet MS" pitchFamily="34" charset="-120"/>
               </a:rPr>
-              <a:t>eatable</a:t>
+              <a:t>reheated</a:t>
             </a:r>
             <a:endParaRPr lang="en-US" sz="1200" dirty="0"/>
           </a:p>
@@ -35483,7 +35799,7 @@
                 <a:ea typeface="Trebuchet MS" pitchFamily="34" charset="-122"/>
                 <a:cs typeface="Trebuchet MS" pitchFamily="34" charset="-120"/>
               </a:rPr>
-              <a:t>reeaten</a:t>
+              <a:t>uneaten</a:t>
             </a:r>
             <a:endParaRPr lang="en-US" sz="1200" dirty="0"/>
           </a:p>
@@ -35549,7 +35865,7 @@
                 <a:ea typeface="Trebuchet MS" pitchFamily="34" charset="-122"/>
                 <a:cs typeface="Trebuchet MS" pitchFamily="34" charset="-120"/>
               </a:rPr>
-              <a:t>overeater</a:t>
+              <a:t>eatable</a:t>
             </a:r>
             <a:endParaRPr lang="en-US" sz="1200" dirty="0"/>
           </a:p>
@@ -35615,7 +35931,7 @@
                 <a:ea typeface="Trebuchet MS" pitchFamily="34" charset="-122"/>
                 <a:cs typeface="Trebuchet MS" pitchFamily="34" charset="-120"/>
               </a:rPr>
-              <a:t>uneaten</a:t>
+              <a:t>overeater</a:t>
             </a:r>
             <a:endParaRPr lang="en-US" sz="1200" dirty="0"/>
           </a:p>
@@ -35681,7 +35997,7 @@
                 <a:ea typeface="Trebuchet MS" pitchFamily="34" charset="-122"/>
                 <a:cs typeface="Trebuchet MS" pitchFamily="34" charset="-120"/>
               </a:rPr>
-              <a:t>outeaten</a:t>
+              <a:t>beater</a:t>
             </a:r>
             <a:endParaRPr lang="en-US" sz="1200" dirty="0"/>
           </a:p>
@@ -36869,7 +37185,7 @@
                 <a:ea typeface="Calibri" pitchFamily="34" charset="-122"/>
                 <a:cs typeface="Calibri" pitchFamily="34" charset="-120"/>
               </a:rPr>
-              <a:t>1.  The word 'uneaten' contains the root 'eat' and means food that has not been consumed.</a:t>
+              <a:t>1.  The root 'eat' comes from a French word meaning to chew.</a:t>
             </a:r>
             <a:endParaRPr lang="en-US" sz="1300" dirty="0"/>
           </a:p>
@@ -36892,11 +37208,11 @@
             </a:avLst>
           </a:prstGeom>
           <a:solidFill>
-            <a:srgbClr val="DCFCE7"/>
-          </a:solidFill>
-          <a:ln w="12700">
-            <a:solidFill>
-              <a:srgbClr val="16A34A"/>
+            <a:srgbClr val="FEE2E2"/>
+          </a:solidFill>
+          <a:ln w="12700">
+            <a:solidFill>
+              <a:srgbClr val="DC2626"/>
             </a:solidFill>
             <a:prstDash val="solid"/>
           </a:ln>
@@ -36929,13 +37245,13 @@
             <a:r>
               <a:rPr lang="en-US" sz="1100" b="1" dirty="0">
                 <a:solidFill>
-                  <a:srgbClr val="16A34A"/>
+                  <a:srgbClr val="DC2626"/>
                 </a:solidFill>
                 <a:latin typeface="Trebuchet MS" pitchFamily="34" charset="0"/>
                 <a:ea typeface="Trebuchet MS" pitchFamily="34" charset="-122"/>
                 <a:cs typeface="Trebuchet MS" pitchFamily="34" charset="-120"/>
               </a:rPr>
-              <a:t>TRUE</a:t>
+              <a:t>FALSE</a:t>
             </a:r>
             <a:endParaRPr lang="en-US" sz="1100" dirty="0"/>
           </a:p>
@@ -37008,7 +37324,7 @@
                 <a:ea typeface="Calibri" pitchFamily="34" charset="-122"/>
                 <a:cs typeface="Calibri" pitchFamily="34" charset="-120"/>
               </a:rPr>
-              <a:t>2.  The root 'eat' comes from a Greek word meaning to swallow.</a:t>
+              <a:t>2.  The prefix 'over-' in 'overeating' means too much.</a:t>
             </a:r>
             <a:endParaRPr lang="en-US" sz="1300" dirty="0"/>
           </a:p>
@@ -37031,11 +37347,11 @@
             </a:avLst>
           </a:prstGeom>
           <a:solidFill>
-            <a:srgbClr val="FEE2E2"/>
-          </a:solidFill>
-          <a:ln w="12700">
-            <a:solidFill>
-              <a:srgbClr val="DC2626"/>
+            <a:srgbClr val="DCFCE7"/>
+          </a:solidFill>
+          <a:ln w="12700">
+            <a:solidFill>
+              <a:srgbClr val="16A34A"/>
             </a:solidFill>
             <a:prstDash val="solid"/>
           </a:ln>
@@ -37068,13 +37384,13 @@
             <a:r>
               <a:rPr lang="en-US" sz="1100" b="1" dirty="0">
                 <a:solidFill>
-                  <a:srgbClr val="DC2626"/>
+                  <a:srgbClr val="16A34A"/>
                 </a:solidFill>
                 <a:latin typeface="Trebuchet MS" pitchFamily="34" charset="0"/>
                 <a:ea typeface="Trebuchet MS" pitchFamily="34" charset="-122"/>
                 <a:cs typeface="Trebuchet MS" pitchFamily="34" charset="-120"/>
               </a:rPr>
-              <a:t>FALSE</a:t>
+              <a:t>TRUE</a:t>
             </a:r>
             <a:endParaRPr lang="en-US" sz="1100" dirty="0"/>
           </a:p>
@@ -37147,7 +37463,7 @@
                 <a:ea typeface="Calibri" pitchFamily="34" charset="-122"/>
                 <a:cs typeface="Calibri" pitchFamily="34" charset="-120"/>
               </a:rPr>
-              <a:t>3.  Adding the prefix 'over' to 'eat' makes the word 'overeat', meaning to eat too much.</a:t>
+              <a:t>3.  The word 'uneaten' contains the root 'eat' and the prefix 'un-' meaning not.</a:t>
             </a:r>
             <a:endParaRPr lang="en-US" sz="1300" dirty="0"/>
           </a:p>
@@ -37286,7 +37602,7 @@
                 <a:ea typeface="Calibri" pitchFamily="34" charset="-122"/>
                 <a:cs typeface="Calibri" pitchFamily="34" charset="-120"/>
               </a:rPr>
-              <a:t>4.  The word 'eater' uses the suffix '-er' to describe a person who eats.</a:t>
+              <a:t>4.  The word 'eatable' uses the suffix '-able' to mean without eating.</a:t>
             </a:r>
             <a:endParaRPr lang="en-US" sz="1300" dirty="0"/>
           </a:p>
@@ -37309,11 +37625,11 @@
             </a:avLst>
           </a:prstGeom>
           <a:solidFill>
-            <a:srgbClr val="DCFCE7"/>
-          </a:solidFill>
-          <a:ln w="12700">
-            <a:solidFill>
-              <a:srgbClr val="16A34A"/>
+            <a:srgbClr val="FEE2E2"/>
+          </a:solidFill>
+          <a:ln w="12700">
+            <a:solidFill>
+              <a:srgbClr val="DC2626"/>
             </a:solidFill>
             <a:prstDash val="solid"/>
           </a:ln>
@@ -37346,13 +37662,13 @@
             <a:r>
               <a:rPr lang="en-US" sz="1100" b="1" dirty="0">
                 <a:solidFill>
-                  <a:srgbClr val="16A34A"/>
+                  <a:srgbClr val="DC2626"/>
                 </a:solidFill>
                 <a:latin typeface="Trebuchet MS" pitchFamily="34" charset="0"/>
                 <a:ea typeface="Trebuchet MS" pitchFamily="34" charset="-122"/>
                 <a:cs typeface="Trebuchet MS" pitchFamily="34" charset="-120"/>
               </a:rPr>
-              <a:t>TRUE</a:t>
+              <a:t>FALSE</a:t>
             </a:r>
             <a:endParaRPr lang="en-US" sz="1100" dirty="0"/>
           </a:p>
@@ -37425,7 +37741,7 @@
                 <a:ea typeface="Calibri" pitchFamily="34" charset="-122"/>
                 <a:cs typeface="Calibri" pitchFamily="34" charset="-120"/>
               </a:rPr>
-              <a:t>5.  The prefix 're' in 'reeat' means to eat before someone else.</a:t>
+              <a:t>5.  The word 'eater' is formed by adding the suffix '-er' to the root 'eat'.</a:t>
             </a:r>
             <a:endParaRPr lang="en-US" sz="1300" dirty="0"/>
           </a:p>
@@ -37448,11 +37764,11 @@
             </a:avLst>
           </a:prstGeom>
           <a:solidFill>
-            <a:srgbClr val="FEE2E2"/>
-          </a:solidFill>
-          <a:ln w="12700">
-            <a:solidFill>
-              <a:srgbClr val="DC2626"/>
+            <a:srgbClr val="DCFCE7"/>
+          </a:solidFill>
+          <a:ln w="12700">
+            <a:solidFill>
+              <a:srgbClr val="16A34A"/>
             </a:solidFill>
             <a:prstDash val="solid"/>
           </a:ln>
@@ -37485,13 +37801,13 @@
             <a:r>
               <a:rPr lang="en-US" sz="1100" b="1" dirty="0">
                 <a:solidFill>
-                  <a:srgbClr val="DC2626"/>
+                  <a:srgbClr val="16A34A"/>
                 </a:solidFill>
                 <a:latin typeface="Trebuchet MS" pitchFamily="34" charset="0"/>
                 <a:ea typeface="Trebuchet MS" pitchFamily="34" charset="-122"/>
                 <a:cs typeface="Trebuchet MS" pitchFamily="34" charset="-120"/>
               </a:rPr>
-              <a:t>FALSE</a:t>
+              <a:t>TRUE</a:t>
             </a:r>
             <a:endParaRPr lang="en-US" sz="1100" dirty="0"/>
           </a:p>
@@ -38262,7 +38578,7 @@
                 <a:ea typeface="Trebuchet MS" pitchFamily="34" charset="-122"/>
                 <a:cs typeface="Trebuchet MS" pitchFamily="34" charset="-120"/>
               </a:rPr>
-              <a:t>eatable</a:t>
+              <a:t>reheated</a:t>
             </a:r>
             <a:endParaRPr lang="en-US" sz="1300" dirty="0"/>
           </a:p>
@@ -38328,7 +38644,7 @@
                 <a:ea typeface="Trebuchet MS" pitchFamily="34" charset="-122"/>
                 <a:cs typeface="Trebuchet MS" pitchFamily="34" charset="-120"/>
               </a:rPr>
-              <a:t>reeaten</a:t>
+              <a:t>uneaten</a:t>
             </a:r>
             <a:endParaRPr lang="en-US" sz="1300" dirty="0"/>
           </a:p>
@@ -38394,7 +38710,7 @@
                 <a:ea typeface="Trebuchet MS" pitchFamily="34" charset="-122"/>
                 <a:cs typeface="Trebuchet MS" pitchFamily="34" charset="-120"/>
               </a:rPr>
-              <a:t>overeater</a:t>
+              <a:t>eatable</a:t>
             </a:r>
             <a:endParaRPr lang="en-US" sz="1300" dirty="0"/>
           </a:p>
@@ -38460,7 +38776,7 @@
                 <a:ea typeface="Trebuchet MS" pitchFamily="34" charset="-122"/>
                 <a:cs typeface="Trebuchet MS" pitchFamily="34" charset="-120"/>
               </a:rPr>
-              <a:t>uneaten</a:t>
+              <a:t>overeater</a:t>
             </a:r>
             <a:endParaRPr lang="en-US" sz="1300" dirty="0"/>
           </a:p>
@@ -39245,7 +39561,7 @@
                 <a:ea typeface="Trebuchet MS" pitchFamily="34" charset="-122"/>
                 <a:cs typeface="Trebuchet MS" pitchFamily="34" charset="-120"/>
               </a:rPr>
-              <a:t>under-</a:t>
+              <a:t>un-</a:t>
             </a:r>
             <a:endParaRPr lang="en-US" sz="1300" dirty="0"/>
           </a:p>
@@ -39334,7 +39650,7 @@
                 <a:ea typeface="Trebuchet MS" pitchFamily="34" charset="-122"/>
                 <a:cs typeface="Trebuchet MS" pitchFamily="34" charset="-120"/>
               </a:rPr>
-              <a:t>-en</a:t>
+              <a:t>-ing</a:t>
             </a:r>
             <a:endParaRPr lang="en-US" sz="1300" dirty="0"/>
           </a:p>
@@ -39487,7 +39803,7 @@
                 <a:ea typeface="Trebuchet MS" pitchFamily="34" charset="-122"/>
                 <a:cs typeface="Trebuchet MS" pitchFamily="34" charset="-120"/>
               </a:rPr>
-              <a:t>-ing</a:t>
+              <a:t>-en</a:t>
             </a:r>
             <a:endParaRPr lang="en-US" sz="1300" dirty="0"/>
           </a:p>
@@ -39551,7 +39867,7 @@
                 <a:ea typeface="Trebuchet MS" pitchFamily="34" charset="-122"/>
                 <a:cs typeface="Trebuchet MS" pitchFamily="34" charset="-120"/>
               </a:rPr>
-              <a:t>un-</a:t>
+              <a:t>out-</a:t>
             </a:r>
             <a:endParaRPr lang="en-US" sz="1300" dirty="0"/>
           </a:p>
@@ -39704,7 +40020,7 @@
                 <a:ea typeface="Trebuchet MS" pitchFamily="34" charset="-122"/>
                 <a:cs typeface="Trebuchet MS" pitchFamily="34" charset="-120"/>
               </a:rPr>
-              <a:t>out-</a:t>
+              <a:t>under-</a:t>
             </a:r>
             <a:endParaRPr lang="en-US" sz="1300" dirty="0"/>
           </a:p>
@@ -39793,7 +40109,7 @@
                 <a:ea typeface="Trebuchet MS" pitchFamily="34" charset="-122"/>
                 <a:cs typeface="Trebuchet MS" pitchFamily="34" charset="-120"/>
               </a:rPr>
-              <a:t>-s</a:t>
+              <a:t>-en</a:t>
             </a:r>
             <a:endParaRPr lang="en-US" sz="1300" dirty="0"/>
           </a:p>
@@ -40704,7 +41020,7 @@
                 <a:ea typeface="Calibri" pitchFamily="34" charset="-122"/>
                 <a:cs typeface="Calibri" pitchFamily="34" charset="-120"/>
               </a:rPr>
-              <a:t>Food that is safe and okay to eat.</a:t>
+              <a:t>Food that has been warmed up again after being cooked before.</a:t>
             </a:r>
             <a:endParaRPr lang="en-US" sz="1200" dirty="0"/>
           </a:p>
@@ -40843,7 +41159,7 @@
                 <a:ea typeface="Calibri" pitchFamily="34" charset="-122"/>
                 <a:cs typeface="Calibri" pitchFamily="34" charset="-120"/>
               </a:rPr>
-              <a:t>A person or animal that eats something.</a:t>
+              <a:t>A person or animal that eats a particular type of food.</a:t>
             </a:r>
             <a:endParaRPr lang="en-US" sz="1200" dirty="0"/>
           </a:p>
@@ -40982,7 +41298,7 @@
                 <a:ea typeface="Calibri" pitchFamily="34" charset="-122"/>
                 <a:cs typeface="Calibri" pitchFamily="34" charset="-120"/>
               </a:rPr>
-              <a:t>Food that has not been eaten and is still on the plate.</a:t>
+              <a:t>A person who regularly eats more food than their body needs.</a:t>
             </a:r>
             <a:endParaRPr lang="en-US" sz="1200" dirty="0"/>
           </a:p>
@@ -41055,7 +41371,7 @@
                 <a:ea typeface="Trebuchet MS" pitchFamily="34" charset="-122"/>
                 <a:cs typeface="Trebuchet MS" pitchFamily="34" charset="-120"/>
               </a:rPr>
-              <a:t>eatable</a:t>
+              <a:t>reheated</a:t>
             </a:r>
             <a:endParaRPr lang="en-US" sz="1200" dirty="0"/>
           </a:p>
@@ -41121,7 +41437,7 @@
                 <a:ea typeface="Calibri" pitchFamily="34" charset="-122"/>
                 <a:cs typeface="Calibri" pitchFamily="34" charset="-120"/>
               </a:rPr>
-              <a:t>Eating too much food at one time.</a:t>
+              <a:t>When someone eats too much food at one time.</a:t>
             </a:r>
             <a:endParaRPr lang="en-US" sz="1200" dirty="0"/>
           </a:p>
@@ -41194,7 +41510,7 @@
                 <a:ea typeface="Trebuchet MS" pitchFamily="34" charset="-122"/>
                 <a:cs typeface="Trebuchet MS" pitchFamily="34" charset="-120"/>
               </a:rPr>
-              <a:t>reeaten</a:t>
+              <a:t>uneaten</a:t>
             </a:r>
             <a:endParaRPr lang="en-US" sz="1200" dirty="0"/>
           </a:p>
@@ -41260,7 +41576,7 @@
                 <a:ea typeface="Calibri" pitchFamily="34" charset="-122"/>
                 <a:cs typeface="Calibri" pitchFamily="34" charset="-120"/>
               </a:rPr>
-              <a:t>Someone who regularly eats more food than their body needs.</a:t>
+              <a:t>Something that is safe and okay to eat.</a:t>
             </a:r>
             <a:endParaRPr lang="en-US" sz="1200" dirty="0"/>
           </a:p>
@@ -41333,7 +41649,7 @@
                 <a:ea typeface="Trebuchet MS" pitchFamily="34" charset="-122"/>
                 <a:cs typeface="Trebuchet MS" pitchFamily="34" charset="-120"/>
               </a:rPr>
-              <a:t>overeater</a:t>
+              <a:t>eatable</a:t>
             </a:r>
             <a:endParaRPr lang="en-US" sz="1200" dirty="0"/>
           </a:p>
@@ -41399,7 +41715,7 @@
                 <a:ea typeface="Calibri" pitchFamily="34" charset="-122"/>
                 <a:cs typeface="Calibri" pitchFamily="34" charset="-120"/>
               </a:rPr>
-              <a:t>Having eaten something again, like leftovers warmed up.</a:t>
+              <a:t>Food that has not been eaten and is still left over.</a:t>
             </a:r>
             <a:endParaRPr lang="en-US" sz="1200" dirty="0"/>
           </a:p>
@@ -41472,7 +41788,7 @@
                 <a:ea typeface="Trebuchet MS" pitchFamily="34" charset="-122"/>
                 <a:cs typeface="Trebuchet MS" pitchFamily="34" charset="-120"/>
               </a:rPr>
-              <a:t>uneaten</a:t>
+              <a:t>overeater</a:t>
             </a:r>
             <a:endParaRPr lang="en-US" sz="1200" dirty="0"/>
           </a:p>
@@ -42033,7 +42349,7 @@
                 <a:ea typeface="Calibri" pitchFamily="34" charset="-122"/>
                 <a:cs typeface="Calibri" pitchFamily="34" charset="-120"/>
               </a:rPr>
-              <a:t>The overeater at the school camp went back for thirds at every meal.</a:t>
+              <a:t>She is a very careful eater who always chews her food slowly before swallowing.</a:t>
             </a:r>
             <a:endParaRPr lang="en-US" sz="1500" dirty="0"/>
           </a:p>
@@ -42197,7 +42513,7 @@
                 <a:ea typeface="Calibri" pitchFamily="34" charset="-122"/>
                 <a:cs typeface="Calibri" pitchFamily="34" charset="-120"/>
               </a:rPr>
-              <a:t>She left most of her uneaten lunch in her bag because she was too excited to eat.</a:t>
+              <a:t>The children were overeating at the party because there were so many delicious snacks on the table.</a:t>
             </a:r>
             <a:endParaRPr lang="en-US" sz="1500" dirty="0"/>
           </a:p>
@@ -42361,7 +42677,7 @@
                 <a:ea typeface="Calibri" pitchFamily="34" charset="-122"/>
                 <a:cs typeface="Calibri" pitchFamily="34" charset="-120"/>
               </a:rPr>
-              <a:t>The biggest eater in our class can finish a whole watermelon by himself!</a:t>
+              <a:t>Half the sandwiches were left uneaten after lunch because the students were not very hungry.</a:t>
             </a:r>
             <a:endParaRPr lang="en-US" sz="1500" dirty="0"/>
           </a:p>

--- a/output/wordlabs-eat-3day.pptx
+++ b/output/wordlabs-eat-3day.pptx
@@ -17403,7 +17403,7 @@
                 <a:ea typeface="Trebuchet MS" pitchFamily="34" charset="-122"/>
                 <a:cs typeface="Trebuchet MS" pitchFamily="34" charset="-120"/>
               </a:rPr>
-              <a:t>Overeating</a:t>
+              <a:t>overeating</a:t>
             </a:r>
             <a:endParaRPr lang="en-US" sz="1400" dirty="0"/>
           </a:p>
@@ -18129,7 +18129,7 @@
                 <a:ea typeface="Trebuchet MS" pitchFamily="34" charset="-122"/>
                 <a:cs typeface="Trebuchet MS" pitchFamily="34" charset="-120"/>
               </a:rPr>
-              <a:t>Overeating</a:t>
+              <a:t>overeating</a:t>
             </a:r>
             <a:endParaRPr lang="en-US" sz="2800" dirty="0"/>
           </a:p>
@@ -18956,7 +18956,7 @@
                 <a:ea typeface="Trebuchet MS" pitchFamily="34" charset="-122"/>
                 <a:cs typeface="Trebuchet MS" pitchFamily="34" charset="-120"/>
               </a:rPr>
-              <a:t>Overeating</a:t>
+              <a:t>overeating</a:t>
             </a:r>
             <a:endParaRPr lang="en-US" sz="2800" dirty="0"/>
           </a:p>
@@ -20053,7 +20053,7 @@
                 <a:ea typeface="Trebuchet MS" pitchFamily="34" charset="-122"/>
                 <a:cs typeface="Trebuchet MS" pitchFamily="34" charset="-120"/>
               </a:rPr>
-              <a:t>Overeating</a:t>
+              <a:t>overeating</a:t>
             </a:r>
             <a:endParaRPr lang="en-US" sz="2800" dirty="0"/>
           </a:p>
@@ -21492,7 +21492,7 @@
                 <a:ea typeface="Trebuchet MS" pitchFamily="34" charset="-122"/>
                 <a:cs typeface="Trebuchet MS" pitchFamily="34" charset="-120"/>
               </a:rPr>
-              <a:t>Overeating</a:t>
+              <a:t>overeating</a:t>
             </a:r>
             <a:endParaRPr lang="en-US" sz="2800" dirty="0"/>
           </a:p>
@@ -37185,7 +37185,7 @@
                 <a:ea typeface="Calibri" pitchFamily="34" charset="-122"/>
                 <a:cs typeface="Calibri" pitchFamily="34" charset="-120"/>
               </a:rPr>
-              <a:t>1.  The root 'eat' comes from a French word meaning to chew.</a:t>
+              <a:t>1.  The word 'eater' is formed by adding the suffix '-er' to the root 'eat'.</a:t>
             </a:r>
             <a:endParaRPr lang="en-US" sz="1300" dirty="0"/>
           </a:p>
@@ -37208,11 +37208,11 @@
             </a:avLst>
           </a:prstGeom>
           <a:solidFill>
-            <a:srgbClr val="FEE2E2"/>
-          </a:solidFill>
-          <a:ln w="12700">
-            <a:solidFill>
-              <a:srgbClr val="DC2626"/>
+            <a:srgbClr val="DCFCE7"/>
+          </a:solidFill>
+          <a:ln w="12700">
+            <a:solidFill>
+              <a:srgbClr val="16A34A"/>
             </a:solidFill>
             <a:prstDash val="solid"/>
           </a:ln>
@@ -37245,13 +37245,13 @@
             <a:r>
               <a:rPr lang="en-US" sz="1100" b="1" dirty="0">
                 <a:solidFill>
-                  <a:srgbClr val="DC2626"/>
+                  <a:srgbClr val="16A34A"/>
                 </a:solidFill>
                 <a:latin typeface="Trebuchet MS" pitchFamily="34" charset="0"/>
                 <a:ea typeface="Trebuchet MS" pitchFamily="34" charset="-122"/>
                 <a:cs typeface="Trebuchet MS" pitchFamily="34" charset="-120"/>
               </a:rPr>
-              <a:t>FALSE</a:t>
+              <a:t>TRUE</a:t>
             </a:r>
             <a:endParaRPr lang="en-US" sz="1100" dirty="0"/>
           </a:p>
@@ -37602,7 +37602,7 @@
                 <a:ea typeface="Calibri" pitchFamily="34" charset="-122"/>
                 <a:cs typeface="Calibri" pitchFamily="34" charset="-120"/>
               </a:rPr>
-              <a:t>4.  The word 'eatable' uses the suffix '-able' to mean without eating.</a:t>
+              <a:t>4.  The root 'eat' comes from a French word meaning to chew.</a:t>
             </a:r>
             <a:endParaRPr lang="en-US" sz="1300" dirty="0"/>
           </a:p>
@@ -37741,7 +37741,7 @@
                 <a:ea typeface="Calibri" pitchFamily="34" charset="-122"/>
                 <a:cs typeface="Calibri" pitchFamily="34" charset="-120"/>
               </a:rPr>
-              <a:t>5.  The word 'eater' is formed by adding the suffix '-er' to the root 'eat'.</a:t>
+              <a:t>5.  The word 'eatable' uses the suffix '-able' to mean without eating.</a:t>
             </a:r>
             <a:endParaRPr lang="en-US" sz="1300" dirty="0"/>
           </a:p>
@@ -37764,11 +37764,11 @@
             </a:avLst>
           </a:prstGeom>
           <a:solidFill>
-            <a:srgbClr val="DCFCE7"/>
-          </a:solidFill>
-          <a:ln w="12700">
-            <a:solidFill>
-              <a:srgbClr val="16A34A"/>
+            <a:srgbClr val="FEE2E2"/>
+          </a:solidFill>
+          <a:ln w="12700">
+            <a:solidFill>
+              <a:srgbClr val="DC2626"/>
             </a:solidFill>
             <a:prstDash val="solid"/>
           </a:ln>
@@ -37801,13 +37801,13 @@
             <a:r>
               <a:rPr lang="en-US" sz="1100" b="1" dirty="0">
                 <a:solidFill>
-                  <a:srgbClr val="16A34A"/>
+                  <a:srgbClr val="DC2626"/>
                 </a:solidFill>
                 <a:latin typeface="Trebuchet MS" pitchFamily="34" charset="0"/>
                 <a:ea typeface="Trebuchet MS" pitchFamily="34" charset="-122"/>
                 <a:cs typeface="Trebuchet MS" pitchFamily="34" charset="-120"/>
               </a:rPr>
-              <a:t>TRUE</a:t>
+              <a:t>FALSE</a:t>
             </a:r>
             <a:endParaRPr lang="en-US" sz="1100" dirty="0"/>
           </a:p>
